--- a/3_Estimation.pptx
+++ b/3_Estimation.pptx
@@ -5,26 +5,32 @@
     <p:sldMasterId id="2147483648" r:id="rId4"/>
   </p:sldMasterIdLst>
   <p:notesMasterIdLst>
-    <p:notesMasterId r:id="rId19"/>
+    <p:notesMasterId r:id="rId25"/>
   </p:notesMasterIdLst>
   <p:handoutMasterIdLst>
-    <p:handoutMasterId r:id="rId20"/>
+    <p:handoutMasterId r:id="rId26"/>
   </p:handoutMasterIdLst>
   <p:sldIdLst>
     <p:sldId id="256" r:id="rId5"/>
-    <p:sldId id="270" r:id="rId6"/>
-    <p:sldId id="271" r:id="rId7"/>
-    <p:sldId id="272" r:id="rId8"/>
-    <p:sldId id="273" r:id="rId9"/>
-    <p:sldId id="274" r:id="rId10"/>
-    <p:sldId id="282" r:id="rId11"/>
-    <p:sldId id="275" r:id="rId12"/>
-    <p:sldId id="280" r:id="rId13"/>
-    <p:sldId id="277" r:id="rId14"/>
-    <p:sldId id="276" r:id="rId15"/>
-    <p:sldId id="278" r:id="rId16"/>
-    <p:sldId id="279" r:id="rId17"/>
-    <p:sldId id="281" r:id="rId18"/>
+    <p:sldId id="314" r:id="rId6"/>
+    <p:sldId id="361" r:id="rId7"/>
+    <p:sldId id="270" r:id="rId8"/>
+    <p:sldId id="271" r:id="rId9"/>
+    <p:sldId id="272" r:id="rId10"/>
+    <p:sldId id="273" r:id="rId11"/>
+    <p:sldId id="274" r:id="rId12"/>
+    <p:sldId id="282" r:id="rId13"/>
+    <p:sldId id="275" r:id="rId14"/>
+    <p:sldId id="280" r:id="rId15"/>
+    <p:sldId id="277" r:id="rId16"/>
+    <p:sldId id="362" r:id="rId17"/>
+    <p:sldId id="276" r:id="rId18"/>
+    <p:sldId id="363" r:id="rId19"/>
+    <p:sldId id="278" r:id="rId20"/>
+    <p:sldId id="279" r:id="rId21"/>
+    <p:sldId id="364" r:id="rId22"/>
+    <p:sldId id="281" r:id="rId23"/>
+    <p:sldId id="365" r:id="rId24"/>
   </p:sldIdLst>
   <p:sldSz cx="12188825" cy="6858000"/>
   <p:notesSz cx="6858000" cy="9144000"/>
@@ -246,7 +252,7 @@
                 <a:latin typeface="맑은 고딕" panose="020B0503020000020004" pitchFamily="50" charset="-127"/>
                 <a:ea typeface="맑은 고딕" panose="020B0503020000020004" pitchFamily="50" charset="-127"/>
               </a:rPr>
-              <a:t>2026-03-02</a:t>
+              <a:t>2026-03-16</a:t>
             </a:fld>
             <a:endParaRPr lang="ko-KR" altLang="en-US" dirty="0">
               <a:latin typeface="맑은 고딕" panose="020B0503020000020004" pitchFamily="50" charset="-127"/>
@@ -433,7 +439,7 @@
             <a:fld id="{39DBE7D5-AA2D-4B26-8C69-8B60D39FD5EE}" type="datetime1">
               <a:rPr lang="ko-KR" altLang="en-US" smtClean="0"/>
               <a:pPr/>
-              <a:t>2026-03-02</a:t>
+              <a:t>2026-03-16</a:t>
             </a:fld>
             <a:endParaRPr lang="ko-KR" altLang="en-US" dirty="0"/>
           </a:p>
@@ -869,7 +875,7 @@
     </p:spTree>
     <p:extLst>
       <p:ext uri="{BB962C8B-B14F-4D97-AF65-F5344CB8AC3E}">
-        <p14:creationId xmlns:p14="http://schemas.microsoft.com/office/powerpoint/2010/main" val="1329391888"/>
+        <p14:creationId xmlns:p14="http://schemas.microsoft.com/office/powerpoint/2010/main" val="3628120198"/>
       </p:ext>
     </p:extLst>
   </p:cSld>
@@ -954,7 +960,7 @@
     </p:spTree>
     <p:extLst>
       <p:ext uri="{BB962C8B-B14F-4D97-AF65-F5344CB8AC3E}">
-        <p14:creationId xmlns:p14="http://schemas.microsoft.com/office/powerpoint/2010/main" val="1394961274"/>
+        <p14:creationId xmlns:p14="http://schemas.microsoft.com/office/powerpoint/2010/main" val="1932367812"/>
       </p:ext>
     </p:extLst>
   </p:cSld>
@@ -1039,7 +1045,7 @@
     </p:spTree>
     <p:extLst>
       <p:ext uri="{BB962C8B-B14F-4D97-AF65-F5344CB8AC3E}">
-        <p14:creationId xmlns:p14="http://schemas.microsoft.com/office/powerpoint/2010/main" val="114399789"/>
+        <p14:creationId xmlns:p14="http://schemas.microsoft.com/office/powerpoint/2010/main" val="1329391888"/>
       </p:ext>
     </p:extLst>
   </p:cSld>
@@ -1054,7 +1060,13 @@
   <p:cSld>
     <p:spTree>
       <p:nvGrpSpPr>
-        <p:cNvPr id="1" name=""/>
+        <p:cNvPr id="1" name="">
+          <a:extLst>
+            <a:ext uri="{FF2B5EF4-FFF2-40B4-BE49-F238E27FC236}">
+              <a16:creationId xmlns:a16="http://schemas.microsoft.com/office/drawing/2014/main" id="{3959997E-FCBA-57BD-FA26-6E0D974345BF}"/>
+            </a:ext>
+          </a:extLst>
+        </p:cNvPr>
         <p:cNvGrpSpPr/>
         <p:nvPr/>
       </p:nvGrpSpPr>
@@ -1068,7 +1080,13 @@
       </p:grpSpPr>
       <p:sp>
         <p:nvSpPr>
-          <p:cNvPr id="2" name="슬라이드 이미지 개체 틀 1"/>
+          <p:cNvPr id="2" name="슬라이드 이미지 개체 틀 1">
+            <a:extLst>
+              <a:ext uri="{FF2B5EF4-FFF2-40B4-BE49-F238E27FC236}">
+                <a16:creationId xmlns:a16="http://schemas.microsoft.com/office/drawing/2014/main" id="{4AC5868B-65CA-7446-67AA-687959BA6E3D}"/>
+              </a:ext>
+            </a:extLst>
+          </p:cNvPr>
           <p:cNvSpPr>
             <a:spLocks noGrp="1" noRot="1" noChangeAspect="1"/>
           </p:cNvSpPr>
@@ -1080,7 +1098,13 @@
       </p:sp>
       <p:sp>
         <p:nvSpPr>
-          <p:cNvPr id="3" name="슬라이드 노트 개체 틀 2"/>
+          <p:cNvPr id="3" name="슬라이드 노트 개체 틀 2">
+            <a:extLst>
+              <a:ext uri="{FF2B5EF4-FFF2-40B4-BE49-F238E27FC236}">
+                <a16:creationId xmlns:a16="http://schemas.microsoft.com/office/drawing/2014/main" id="{FA53A8AB-378C-BFC6-6F41-4B8191A695E0}"/>
+              </a:ext>
+            </a:extLst>
+          </p:cNvPr>
           <p:cNvSpPr>
             <a:spLocks noGrp="1"/>
           </p:cNvSpPr>
@@ -1099,7 +1123,13 @@
       </p:sp>
       <p:sp>
         <p:nvSpPr>
-          <p:cNvPr id="4" name="슬라이드 번호 개체 틀 3"/>
+          <p:cNvPr id="4" name="슬라이드 번호 개체 틀 3">
+            <a:extLst>
+              <a:ext uri="{FF2B5EF4-FFF2-40B4-BE49-F238E27FC236}">
+                <a16:creationId xmlns:a16="http://schemas.microsoft.com/office/drawing/2014/main" id="{3B8861B1-46FB-45DE-209A-49F5883A26E3}"/>
+              </a:ext>
+            </a:extLst>
+          </p:cNvPr>
           <p:cNvSpPr>
             <a:spLocks noGrp="1"/>
           </p:cNvSpPr>
@@ -1124,7 +1154,7 @@
     </p:spTree>
     <p:extLst>
       <p:ext uri="{BB962C8B-B14F-4D97-AF65-F5344CB8AC3E}">
-        <p14:creationId xmlns:p14="http://schemas.microsoft.com/office/powerpoint/2010/main" val="945868928"/>
+        <p14:creationId xmlns:p14="http://schemas.microsoft.com/office/powerpoint/2010/main" val="2399581243"/>
       </p:ext>
     </p:extLst>
   </p:cSld>
@@ -1209,7 +1239,7 @@
     </p:spTree>
     <p:extLst>
       <p:ext uri="{BB962C8B-B14F-4D97-AF65-F5344CB8AC3E}">
-        <p14:creationId xmlns:p14="http://schemas.microsoft.com/office/powerpoint/2010/main" val="2261553159"/>
+        <p14:creationId xmlns:p14="http://schemas.microsoft.com/office/powerpoint/2010/main" val="1394961274"/>
       </p:ext>
     </p:extLst>
   </p:cSld>
@@ -1219,7 +1249,116 @@
 </p:notes>
 </file>
 
-<file path=ppt/notesSlides/notesSlide2.xml><?xml version="1.0" encoding="utf-8"?>
+<file path=ppt/notesSlides/notesSlide15.xml><?xml version="1.0" encoding="utf-8"?>
+<p:notes xmlns:a="http://schemas.openxmlformats.org/drawingml/2006/main" xmlns:r="http://schemas.openxmlformats.org/officeDocument/2006/relationships" xmlns:p="http://schemas.openxmlformats.org/presentationml/2006/main">
+  <p:cSld>
+    <p:spTree>
+      <p:nvGrpSpPr>
+        <p:cNvPr id="1" name="">
+          <a:extLst>
+            <a:ext uri="{FF2B5EF4-FFF2-40B4-BE49-F238E27FC236}">
+              <a16:creationId xmlns:a16="http://schemas.microsoft.com/office/drawing/2014/main" id="{B21AA8D9-600A-F975-AF39-7C4A71BDC3D6}"/>
+            </a:ext>
+          </a:extLst>
+        </p:cNvPr>
+        <p:cNvGrpSpPr/>
+        <p:nvPr/>
+      </p:nvGrpSpPr>
+      <p:grpSpPr>
+        <a:xfrm>
+          <a:off x="0" y="0"/>
+          <a:ext cx="0" cy="0"/>
+          <a:chOff x="0" y="0"/>
+          <a:chExt cx="0" cy="0"/>
+        </a:xfrm>
+      </p:grpSpPr>
+      <p:sp>
+        <p:nvSpPr>
+          <p:cNvPr id="2" name="슬라이드 이미지 개체 틀 1">
+            <a:extLst>
+              <a:ext uri="{FF2B5EF4-FFF2-40B4-BE49-F238E27FC236}">
+                <a16:creationId xmlns:a16="http://schemas.microsoft.com/office/drawing/2014/main" id="{4B17B488-9014-47F4-B025-68110CD11323}"/>
+              </a:ext>
+            </a:extLst>
+          </p:cNvPr>
+          <p:cNvSpPr>
+            <a:spLocks noGrp="1" noRot="1" noChangeAspect="1"/>
+          </p:cNvSpPr>
+          <p:nvPr>
+            <p:ph type="sldImg"/>
+          </p:nvPr>
+        </p:nvSpPr>
+        <p:spPr/>
+      </p:sp>
+      <p:sp>
+        <p:nvSpPr>
+          <p:cNvPr id="3" name="슬라이드 노트 개체 틀 2">
+            <a:extLst>
+              <a:ext uri="{FF2B5EF4-FFF2-40B4-BE49-F238E27FC236}">
+                <a16:creationId xmlns:a16="http://schemas.microsoft.com/office/drawing/2014/main" id="{274C337A-0E33-780B-F888-436B2DCF500D}"/>
+              </a:ext>
+            </a:extLst>
+          </p:cNvPr>
+          <p:cNvSpPr>
+            <a:spLocks noGrp="1"/>
+          </p:cNvSpPr>
+          <p:nvPr>
+            <p:ph type="body" idx="1"/>
+          </p:nvPr>
+        </p:nvSpPr>
+        <p:spPr/>
+        <p:txBody>
+          <a:bodyPr/>
+          <a:lstStyle/>
+          <a:p>
+            <a:endParaRPr lang="ko-KR" altLang="en-US" dirty="0"/>
+          </a:p>
+        </p:txBody>
+      </p:sp>
+      <p:sp>
+        <p:nvSpPr>
+          <p:cNvPr id="4" name="슬라이드 번호 개체 틀 3">
+            <a:extLst>
+              <a:ext uri="{FF2B5EF4-FFF2-40B4-BE49-F238E27FC236}">
+                <a16:creationId xmlns:a16="http://schemas.microsoft.com/office/drawing/2014/main" id="{28D3F98F-1801-D05E-7B68-8901BBFD8101}"/>
+              </a:ext>
+            </a:extLst>
+          </p:cNvPr>
+          <p:cNvSpPr>
+            <a:spLocks noGrp="1"/>
+          </p:cNvSpPr>
+          <p:nvPr>
+            <p:ph type="sldNum" sz="quarter" idx="10"/>
+          </p:nvPr>
+        </p:nvSpPr>
+        <p:spPr/>
+        <p:txBody>
+          <a:bodyPr/>
+          <a:lstStyle/>
+          <a:p>
+            <a:pPr rtl="0"/>
+            <a:fld id="{5FB91549-43BF-425A-AF25-75262019208C}" type="slidenum">
+              <a:rPr lang="en-US" altLang="ko-KR" smtClean="0"/>
+              <a:t>15</a:t>
+            </a:fld>
+            <a:endParaRPr lang="ko-KR" altLang="en-US" dirty="0"/>
+          </a:p>
+        </p:txBody>
+      </p:sp>
+    </p:spTree>
+    <p:extLst>
+      <p:ext uri="{BB962C8B-B14F-4D97-AF65-F5344CB8AC3E}">
+        <p14:creationId xmlns:p14="http://schemas.microsoft.com/office/powerpoint/2010/main" val="1252142345"/>
+      </p:ext>
+    </p:extLst>
+  </p:cSld>
+  <p:clrMapOvr>
+    <a:masterClrMapping/>
+  </p:clrMapOvr>
+</p:notes>
+</file>
+
+<file path=ppt/notesSlides/notesSlide16.xml><?xml version="1.0" encoding="utf-8"?>
 <p:notes xmlns:a="http://schemas.openxmlformats.org/drawingml/2006/main" xmlns:r="http://schemas.openxmlformats.org/officeDocument/2006/relationships" xmlns:p="http://schemas.openxmlformats.org/presentationml/2006/main">
   <p:cSld>
     <p:spTree>
@@ -1285,7 +1424,7 @@
             <a:pPr rtl="0"/>
             <a:fld id="{5FB91549-43BF-425A-AF25-75262019208C}" type="slidenum">
               <a:rPr lang="en-US" altLang="ko-KR" smtClean="0"/>
-              <a:t>2</a:t>
+              <a:t>16</a:t>
             </a:fld>
             <a:endParaRPr lang="ko-KR" altLang="en-US" dirty="0"/>
           </a:p>
@@ -1294,7 +1433,7 @@
     </p:spTree>
     <p:extLst>
       <p:ext uri="{BB962C8B-B14F-4D97-AF65-F5344CB8AC3E}">
-        <p14:creationId xmlns:p14="http://schemas.microsoft.com/office/powerpoint/2010/main" val="1911418281"/>
+        <p14:creationId xmlns:p14="http://schemas.microsoft.com/office/powerpoint/2010/main" val="114399789"/>
       </p:ext>
     </p:extLst>
   </p:cSld>
@@ -1304,7 +1443,7 @@
 </p:notes>
 </file>
 
-<file path=ppt/notesSlides/notesSlide3.xml><?xml version="1.0" encoding="utf-8"?>
+<file path=ppt/notesSlides/notesSlide17.xml><?xml version="1.0" encoding="utf-8"?>
 <p:notes xmlns:a="http://schemas.openxmlformats.org/drawingml/2006/main" xmlns:r="http://schemas.openxmlformats.org/officeDocument/2006/relationships" xmlns:p="http://schemas.openxmlformats.org/presentationml/2006/main">
   <p:cSld>
     <p:spTree>
@@ -1370,6 +1509,527 @@
             <a:pPr rtl="0"/>
             <a:fld id="{5FB91549-43BF-425A-AF25-75262019208C}" type="slidenum">
               <a:rPr lang="en-US" altLang="ko-KR" smtClean="0"/>
+              <a:t>17</a:t>
+            </a:fld>
+            <a:endParaRPr lang="ko-KR" altLang="en-US" dirty="0"/>
+          </a:p>
+        </p:txBody>
+      </p:sp>
+    </p:spTree>
+    <p:extLst>
+      <p:ext uri="{BB962C8B-B14F-4D97-AF65-F5344CB8AC3E}">
+        <p14:creationId xmlns:p14="http://schemas.microsoft.com/office/powerpoint/2010/main" val="945868928"/>
+      </p:ext>
+    </p:extLst>
+  </p:cSld>
+  <p:clrMapOvr>
+    <a:masterClrMapping/>
+  </p:clrMapOvr>
+</p:notes>
+</file>
+
+<file path=ppt/notesSlides/notesSlide18.xml><?xml version="1.0" encoding="utf-8"?>
+<p:notes xmlns:a="http://schemas.openxmlformats.org/drawingml/2006/main" xmlns:r="http://schemas.openxmlformats.org/officeDocument/2006/relationships" xmlns:p="http://schemas.openxmlformats.org/presentationml/2006/main">
+  <p:cSld>
+    <p:spTree>
+      <p:nvGrpSpPr>
+        <p:cNvPr id="1" name="">
+          <a:extLst>
+            <a:ext uri="{FF2B5EF4-FFF2-40B4-BE49-F238E27FC236}">
+              <a16:creationId xmlns:a16="http://schemas.microsoft.com/office/drawing/2014/main" id="{219B0E1B-93AF-FF85-F781-97C74771B763}"/>
+            </a:ext>
+          </a:extLst>
+        </p:cNvPr>
+        <p:cNvGrpSpPr/>
+        <p:nvPr/>
+      </p:nvGrpSpPr>
+      <p:grpSpPr>
+        <a:xfrm>
+          <a:off x="0" y="0"/>
+          <a:ext cx="0" cy="0"/>
+          <a:chOff x="0" y="0"/>
+          <a:chExt cx="0" cy="0"/>
+        </a:xfrm>
+      </p:grpSpPr>
+      <p:sp>
+        <p:nvSpPr>
+          <p:cNvPr id="2" name="슬라이드 이미지 개체 틀 1">
+            <a:extLst>
+              <a:ext uri="{FF2B5EF4-FFF2-40B4-BE49-F238E27FC236}">
+                <a16:creationId xmlns:a16="http://schemas.microsoft.com/office/drawing/2014/main" id="{368BEF73-EC5B-45F0-8957-614B1CF499CC}"/>
+              </a:ext>
+            </a:extLst>
+          </p:cNvPr>
+          <p:cNvSpPr>
+            <a:spLocks noGrp="1" noRot="1" noChangeAspect="1"/>
+          </p:cNvSpPr>
+          <p:nvPr>
+            <p:ph type="sldImg"/>
+          </p:nvPr>
+        </p:nvSpPr>
+        <p:spPr/>
+      </p:sp>
+      <p:sp>
+        <p:nvSpPr>
+          <p:cNvPr id="3" name="슬라이드 노트 개체 틀 2">
+            <a:extLst>
+              <a:ext uri="{FF2B5EF4-FFF2-40B4-BE49-F238E27FC236}">
+                <a16:creationId xmlns:a16="http://schemas.microsoft.com/office/drawing/2014/main" id="{A71D8B4C-753F-4EC2-9EB9-1B5812533C2C}"/>
+              </a:ext>
+            </a:extLst>
+          </p:cNvPr>
+          <p:cNvSpPr>
+            <a:spLocks noGrp="1"/>
+          </p:cNvSpPr>
+          <p:nvPr>
+            <p:ph type="body" idx="1"/>
+          </p:nvPr>
+        </p:nvSpPr>
+        <p:spPr/>
+        <p:txBody>
+          <a:bodyPr/>
+          <a:lstStyle/>
+          <a:p>
+            <a:endParaRPr lang="ko-KR" altLang="en-US" dirty="0"/>
+          </a:p>
+        </p:txBody>
+      </p:sp>
+      <p:sp>
+        <p:nvSpPr>
+          <p:cNvPr id="4" name="슬라이드 번호 개체 틀 3">
+            <a:extLst>
+              <a:ext uri="{FF2B5EF4-FFF2-40B4-BE49-F238E27FC236}">
+                <a16:creationId xmlns:a16="http://schemas.microsoft.com/office/drawing/2014/main" id="{BA0A74EC-1E8C-0429-EE5F-0040A8C472CC}"/>
+              </a:ext>
+            </a:extLst>
+          </p:cNvPr>
+          <p:cNvSpPr>
+            <a:spLocks noGrp="1"/>
+          </p:cNvSpPr>
+          <p:nvPr>
+            <p:ph type="sldNum" sz="quarter" idx="10"/>
+          </p:nvPr>
+        </p:nvSpPr>
+        <p:spPr/>
+        <p:txBody>
+          <a:bodyPr/>
+          <a:lstStyle/>
+          <a:p>
+            <a:pPr rtl="0"/>
+            <a:fld id="{5FB91549-43BF-425A-AF25-75262019208C}" type="slidenum">
+              <a:rPr lang="en-US" altLang="ko-KR" smtClean="0"/>
+              <a:t>18</a:t>
+            </a:fld>
+            <a:endParaRPr lang="ko-KR" altLang="en-US" dirty="0"/>
+          </a:p>
+        </p:txBody>
+      </p:sp>
+    </p:spTree>
+    <p:extLst>
+      <p:ext uri="{BB962C8B-B14F-4D97-AF65-F5344CB8AC3E}">
+        <p14:creationId xmlns:p14="http://schemas.microsoft.com/office/powerpoint/2010/main" val="266090397"/>
+      </p:ext>
+    </p:extLst>
+  </p:cSld>
+  <p:clrMapOvr>
+    <a:masterClrMapping/>
+  </p:clrMapOvr>
+</p:notes>
+</file>
+
+<file path=ppt/notesSlides/notesSlide19.xml><?xml version="1.0" encoding="utf-8"?>
+<p:notes xmlns:a="http://schemas.openxmlformats.org/drawingml/2006/main" xmlns:r="http://schemas.openxmlformats.org/officeDocument/2006/relationships" xmlns:p="http://schemas.openxmlformats.org/presentationml/2006/main">
+  <p:cSld>
+    <p:spTree>
+      <p:nvGrpSpPr>
+        <p:cNvPr id="1" name=""/>
+        <p:cNvGrpSpPr/>
+        <p:nvPr/>
+      </p:nvGrpSpPr>
+      <p:grpSpPr>
+        <a:xfrm>
+          <a:off x="0" y="0"/>
+          <a:ext cx="0" cy="0"/>
+          <a:chOff x="0" y="0"/>
+          <a:chExt cx="0" cy="0"/>
+        </a:xfrm>
+      </p:grpSpPr>
+      <p:sp>
+        <p:nvSpPr>
+          <p:cNvPr id="2" name="슬라이드 이미지 개체 틀 1"/>
+          <p:cNvSpPr>
+            <a:spLocks noGrp="1" noRot="1" noChangeAspect="1"/>
+          </p:cNvSpPr>
+          <p:nvPr>
+            <p:ph type="sldImg"/>
+          </p:nvPr>
+        </p:nvSpPr>
+        <p:spPr/>
+      </p:sp>
+      <p:sp>
+        <p:nvSpPr>
+          <p:cNvPr id="3" name="슬라이드 노트 개체 틀 2"/>
+          <p:cNvSpPr>
+            <a:spLocks noGrp="1"/>
+          </p:cNvSpPr>
+          <p:nvPr>
+            <p:ph type="body" idx="1"/>
+          </p:nvPr>
+        </p:nvSpPr>
+        <p:spPr/>
+        <p:txBody>
+          <a:bodyPr/>
+          <a:lstStyle/>
+          <a:p>
+            <a:endParaRPr lang="ko-KR" altLang="en-US" dirty="0"/>
+          </a:p>
+        </p:txBody>
+      </p:sp>
+      <p:sp>
+        <p:nvSpPr>
+          <p:cNvPr id="4" name="슬라이드 번호 개체 틀 3"/>
+          <p:cNvSpPr>
+            <a:spLocks noGrp="1"/>
+          </p:cNvSpPr>
+          <p:nvPr>
+            <p:ph type="sldNum" sz="quarter" idx="10"/>
+          </p:nvPr>
+        </p:nvSpPr>
+        <p:spPr/>
+        <p:txBody>
+          <a:bodyPr/>
+          <a:lstStyle/>
+          <a:p>
+            <a:pPr rtl="0"/>
+            <a:fld id="{5FB91549-43BF-425A-AF25-75262019208C}" type="slidenum">
+              <a:rPr lang="en-US" altLang="ko-KR" smtClean="0"/>
+              <a:t>19</a:t>
+            </a:fld>
+            <a:endParaRPr lang="ko-KR" altLang="en-US" dirty="0"/>
+          </a:p>
+        </p:txBody>
+      </p:sp>
+    </p:spTree>
+    <p:extLst>
+      <p:ext uri="{BB962C8B-B14F-4D97-AF65-F5344CB8AC3E}">
+        <p14:creationId xmlns:p14="http://schemas.microsoft.com/office/powerpoint/2010/main" val="2261553159"/>
+      </p:ext>
+    </p:extLst>
+  </p:cSld>
+  <p:clrMapOvr>
+    <a:masterClrMapping/>
+  </p:clrMapOvr>
+</p:notes>
+</file>
+
+<file path=ppt/notesSlides/notesSlide2.xml><?xml version="1.0" encoding="utf-8"?>
+<p:notes xmlns:a="http://schemas.openxmlformats.org/drawingml/2006/main" xmlns:r="http://schemas.openxmlformats.org/officeDocument/2006/relationships" xmlns:p="http://schemas.openxmlformats.org/presentationml/2006/main">
+  <p:cSld>
+    <p:spTree>
+      <p:nvGrpSpPr>
+        <p:cNvPr id="1" name="">
+          <a:extLst>
+            <a:ext uri="{FF2B5EF4-FFF2-40B4-BE49-F238E27FC236}">
+              <a16:creationId xmlns:a16="http://schemas.microsoft.com/office/drawing/2014/main" id="{82D3B65B-4D46-A4B6-4A55-CF7F725D8967}"/>
+            </a:ext>
+          </a:extLst>
+        </p:cNvPr>
+        <p:cNvGrpSpPr/>
+        <p:nvPr/>
+      </p:nvGrpSpPr>
+      <p:grpSpPr>
+        <a:xfrm>
+          <a:off x="0" y="0"/>
+          <a:ext cx="0" cy="0"/>
+          <a:chOff x="0" y="0"/>
+          <a:chExt cx="0" cy="0"/>
+        </a:xfrm>
+      </p:grpSpPr>
+      <p:sp>
+        <p:nvSpPr>
+          <p:cNvPr id="2" name="슬라이드 이미지 개체 틀 1">
+            <a:extLst>
+              <a:ext uri="{FF2B5EF4-FFF2-40B4-BE49-F238E27FC236}">
+                <a16:creationId xmlns:a16="http://schemas.microsoft.com/office/drawing/2014/main" id="{E2EC8E50-C409-8198-1011-7B049358C5D2}"/>
+              </a:ext>
+            </a:extLst>
+          </p:cNvPr>
+          <p:cNvSpPr>
+            <a:spLocks noGrp="1" noRot="1" noChangeAspect="1"/>
+          </p:cNvSpPr>
+          <p:nvPr>
+            <p:ph type="sldImg"/>
+          </p:nvPr>
+        </p:nvSpPr>
+        <p:spPr/>
+      </p:sp>
+      <p:sp>
+        <p:nvSpPr>
+          <p:cNvPr id="3" name="슬라이드 노트 개체 틀 2">
+            <a:extLst>
+              <a:ext uri="{FF2B5EF4-FFF2-40B4-BE49-F238E27FC236}">
+                <a16:creationId xmlns:a16="http://schemas.microsoft.com/office/drawing/2014/main" id="{8EBC7159-0CFA-4FF6-3C88-1A3B88DBE009}"/>
+              </a:ext>
+            </a:extLst>
+          </p:cNvPr>
+          <p:cNvSpPr>
+            <a:spLocks noGrp="1"/>
+          </p:cNvSpPr>
+          <p:nvPr>
+            <p:ph type="body" idx="1"/>
+          </p:nvPr>
+        </p:nvSpPr>
+        <p:spPr/>
+        <p:txBody>
+          <a:bodyPr/>
+          <a:lstStyle/>
+          <a:p>
+            <a:endParaRPr lang="ko-KR" altLang="en-US" dirty="0"/>
+          </a:p>
+        </p:txBody>
+      </p:sp>
+      <p:sp>
+        <p:nvSpPr>
+          <p:cNvPr id="4" name="슬라이드 번호 개체 틀 3">
+            <a:extLst>
+              <a:ext uri="{FF2B5EF4-FFF2-40B4-BE49-F238E27FC236}">
+                <a16:creationId xmlns:a16="http://schemas.microsoft.com/office/drawing/2014/main" id="{38F161A9-E2C3-ED47-AF62-F9F227017675}"/>
+              </a:ext>
+            </a:extLst>
+          </p:cNvPr>
+          <p:cNvSpPr>
+            <a:spLocks noGrp="1"/>
+          </p:cNvSpPr>
+          <p:nvPr>
+            <p:ph type="sldNum" sz="quarter" idx="10"/>
+          </p:nvPr>
+        </p:nvSpPr>
+        <p:spPr/>
+        <p:txBody>
+          <a:bodyPr/>
+          <a:lstStyle/>
+          <a:p>
+            <a:pPr rtl="0"/>
+            <a:fld id="{5FB91549-43BF-425A-AF25-75262019208C}" type="slidenum">
+              <a:rPr lang="en-US" altLang="ko-KR" smtClean="0"/>
+              <a:t>2</a:t>
+            </a:fld>
+            <a:endParaRPr lang="ko-KR" altLang="en-US" dirty="0"/>
+          </a:p>
+        </p:txBody>
+      </p:sp>
+    </p:spTree>
+    <p:extLst>
+      <p:ext uri="{BB962C8B-B14F-4D97-AF65-F5344CB8AC3E}">
+        <p14:creationId xmlns:p14="http://schemas.microsoft.com/office/powerpoint/2010/main" val="1167275013"/>
+      </p:ext>
+    </p:extLst>
+  </p:cSld>
+  <p:clrMapOvr>
+    <a:masterClrMapping/>
+  </p:clrMapOvr>
+</p:notes>
+</file>
+
+<file path=ppt/notesSlides/notesSlide20.xml><?xml version="1.0" encoding="utf-8"?>
+<p:notes xmlns:a="http://schemas.openxmlformats.org/drawingml/2006/main" xmlns:r="http://schemas.openxmlformats.org/officeDocument/2006/relationships" xmlns:p="http://schemas.openxmlformats.org/presentationml/2006/main">
+  <p:cSld>
+    <p:spTree>
+      <p:nvGrpSpPr>
+        <p:cNvPr id="1" name="">
+          <a:extLst>
+            <a:ext uri="{FF2B5EF4-FFF2-40B4-BE49-F238E27FC236}">
+              <a16:creationId xmlns:a16="http://schemas.microsoft.com/office/drawing/2014/main" id="{432EC3E5-1FC4-3931-3614-A706DB6483FB}"/>
+            </a:ext>
+          </a:extLst>
+        </p:cNvPr>
+        <p:cNvGrpSpPr/>
+        <p:nvPr/>
+      </p:nvGrpSpPr>
+      <p:grpSpPr>
+        <a:xfrm>
+          <a:off x="0" y="0"/>
+          <a:ext cx="0" cy="0"/>
+          <a:chOff x="0" y="0"/>
+          <a:chExt cx="0" cy="0"/>
+        </a:xfrm>
+      </p:grpSpPr>
+      <p:sp>
+        <p:nvSpPr>
+          <p:cNvPr id="2" name="슬라이드 이미지 개체 틀 1">
+            <a:extLst>
+              <a:ext uri="{FF2B5EF4-FFF2-40B4-BE49-F238E27FC236}">
+                <a16:creationId xmlns:a16="http://schemas.microsoft.com/office/drawing/2014/main" id="{B56B2BAB-1785-A207-B681-4BCABEA62470}"/>
+              </a:ext>
+            </a:extLst>
+          </p:cNvPr>
+          <p:cNvSpPr>
+            <a:spLocks noGrp="1" noRot="1" noChangeAspect="1"/>
+          </p:cNvSpPr>
+          <p:nvPr>
+            <p:ph type="sldImg"/>
+          </p:nvPr>
+        </p:nvSpPr>
+        <p:spPr/>
+      </p:sp>
+      <p:sp>
+        <p:nvSpPr>
+          <p:cNvPr id="3" name="슬라이드 노트 개체 틀 2">
+            <a:extLst>
+              <a:ext uri="{FF2B5EF4-FFF2-40B4-BE49-F238E27FC236}">
+                <a16:creationId xmlns:a16="http://schemas.microsoft.com/office/drawing/2014/main" id="{109899FA-1451-2BED-2B0B-D845302EDAE3}"/>
+              </a:ext>
+            </a:extLst>
+          </p:cNvPr>
+          <p:cNvSpPr>
+            <a:spLocks noGrp="1"/>
+          </p:cNvSpPr>
+          <p:nvPr>
+            <p:ph type="body" idx="1"/>
+          </p:nvPr>
+        </p:nvSpPr>
+        <p:spPr/>
+        <p:txBody>
+          <a:bodyPr/>
+          <a:lstStyle/>
+          <a:p>
+            <a:endParaRPr lang="ko-KR" altLang="en-US" dirty="0"/>
+          </a:p>
+        </p:txBody>
+      </p:sp>
+      <p:sp>
+        <p:nvSpPr>
+          <p:cNvPr id="4" name="슬라이드 번호 개체 틀 3">
+            <a:extLst>
+              <a:ext uri="{FF2B5EF4-FFF2-40B4-BE49-F238E27FC236}">
+                <a16:creationId xmlns:a16="http://schemas.microsoft.com/office/drawing/2014/main" id="{D24EF80B-F482-CBA7-1243-C185C2334409}"/>
+              </a:ext>
+            </a:extLst>
+          </p:cNvPr>
+          <p:cNvSpPr>
+            <a:spLocks noGrp="1"/>
+          </p:cNvSpPr>
+          <p:nvPr>
+            <p:ph type="sldNum" sz="quarter" idx="10"/>
+          </p:nvPr>
+        </p:nvSpPr>
+        <p:spPr/>
+        <p:txBody>
+          <a:bodyPr/>
+          <a:lstStyle/>
+          <a:p>
+            <a:pPr rtl="0"/>
+            <a:fld id="{5FB91549-43BF-425A-AF25-75262019208C}" type="slidenum">
+              <a:rPr lang="en-US" altLang="ko-KR" smtClean="0"/>
+              <a:t>20</a:t>
+            </a:fld>
+            <a:endParaRPr lang="ko-KR" altLang="en-US" dirty="0"/>
+          </a:p>
+        </p:txBody>
+      </p:sp>
+    </p:spTree>
+    <p:extLst>
+      <p:ext uri="{BB962C8B-B14F-4D97-AF65-F5344CB8AC3E}">
+        <p14:creationId xmlns:p14="http://schemas.microsoft.com/office/powerpoint/2010/main" val="1551770785"/>
+      </p:ext>
+    </p:extLst>
+  </p:cSld>
+  <p:clrMapOvr>
+    <a:masterClrMapping/>
+  </p:clrMapOvr>
+</p:notes>
+</file>
+
+<file path=ppt/notesSlides/notesSlide3.xml><?xml version="1.0" encoding="utf-8"?>
+<p:notes xmlns:a="http://schemas.openxmlformats.org/drawingml/2006/main" xmlns:r="http://schemas.openxmlformats.org/officeDocument/2006/relationships" xmlns:p="http://schemas.openxmlformats.org/presentationml/2006/main">
+  <p:cSld>
+    <p:spTree>
+      <p:nvGrpSpPr>
+        <p:cNvPr id="1" name="">
+          <a:extLst>
+            <a:ext uri="{FF2B5EF4-FFF2-40B4-BE49-F238E27FC236}">
+              <a16:creationId xmlns:a16="http://schemas.microsoft.com/office/drawing/2014/main" id="{2D864F9D-56F3-951B-50D6-A387C6DB1FD8}"/>
+            </a:ext>
+          </a:extLst>
+        </p:cNvPr>
+        <p:cNvGrpSpPr/>
+        <p:nvPr/>
+      </p:nvGrpSpPr>
+      <p:grpSpPr>
+        <a:xfrm>
+          <a:off x="0" y="0"/>
+          <a:ext cx="0" cy="0"/>
+          <a:chOff x="0" y="0"/>
+          <a:chExt cx="0" cy="0"/>
+        </a:xfrm>
+      </p:grpSpPr>
+      <p:sp>
+        <p:nvSpPr>
+          <p:cNvPr id="2" name="슬라이드 이미지 개체 틀 1">
+            <a:extLst>
+              <a:ext uri="{FF2B5EF4-FFF2-40B4-BE49-F238E27FC236}">
+                <a16:creationId xmlns:a16="http://schemas.microsoft.com/office/drawing/2014/main" id="{E0C41E97-65AE-AFF8-F9CE-0EBF5990743B}"/>
+              </a:ext>
+            </a:extLst>
+          </p:cNvPr>
+          <p:cNvSpPr>
+            <a:spLocks noGrp="1" noRot="1" noChangeAspect="1"/>
+          </p:cNvSpPr>
+          <p:nvPr>
+            <p:ph type="sldImg"/>
+          </p:nvPr>
+        </p:nvSpPr>
+        <p:spPr/>
+      </p:sp>
+      <p:sp>
+        <p:nvSpPr>
+          <p:cNvPr id="3" name="슬라이드 노트 개체 틀 2">
+            <a:extLst>
+              <a:ext uri="{FF2B5EF4-FFF2-40B4-BE49-F238E27FC236}">
+                <a16:creationId xmlns:a16="http://schemas.microsoft.com/office/drawing/2014/main" id="{0C491CBB-2C0A-B61E-F741-0D34DDCD8EC7}"/>
+              </a:ext>
+            </a:extLst>
+          </p:cNvPr>
+          <p:cNvSpPr>
+            <a:spLocks noGrp="1"/>
+          </p:cNvSpPr>
+          <p:nvPr>
+            <p:ph type="body" idx="1"/>
+          </p:nvPr>
+        </p:nvSpPr>
+        <p:spPr/>
+        <p:txBody>
+          <a:bodyPr/>
+          <a:lstStyle/>
+          <a:p>
+            <a:endParaRPr lang="ko-KR" altLang="en-US" dirty="0"/>
+          </a:p>
+        </p:txBody>
+      </p:sp>
+      <p:sp>
+        <p:nvSpPr>
+          <p:cNvPr id="4" name="슬라이드 번호 개체 틀 3">
+            <a:extLst>
+              <a:ext uri="{FF2B5EF4-FFF2-40B4-BE49-F238E27FC236}">
+                <a16:creationId xmlns:a16="http://schemas.microsoft.com/office/drawing/2014/main" id="{4A277E39-D60D-B26E-335C-19610E54272A}"/>
+              </a:ext>
+            </a:extLst>
+          </p:cNvPr>
+          <p:cNvSpPr>
+            <a:spLocks noGrp="1"/>
+          </p:cNvSpPr>
+          <p:nvPr>
+            <p:ph type="sldNum" sz="quarter" idx="10"/>
+          </p:nvPr>
+        </p:nvSpPr>
+        <p:spPr/>
+        <p:txBody>
+          <a:bodyPr/>
+          <a:lstStyle/>
+          <a:p>
+            <a:pPr rtl="0"/>
+            <a:fld id="{5FB91549-43BF-425A-AF25-75262019208C}" type="slidenum">
+              <a:rPr lang="en-US" altLang="ko-KR" smtClean="0"/>
               <a:t>3</a:t>
             </a:fld>
             <a:endParaRPr lang="ko-KR" altLang="en-US" dirty="0"/>
@@ -1379,7 +2039,7 @@
     </p:spTree>
     <p:extLst>
       <p:ext uri="{BB962C8B-B14F-4D97-AF65-F5344CB8AC3E}">
-        <p14:creationId xmlns:p14="http://schemas.microsoft.com/office/powerpoint/2010/main" val="3674128110"/>
+        <p14:creationId xmlns:p14="http://schemas.microsoft.com/office/powerpoint/2010/main" val="329701599"/>
       </p:ext>
     </p:extLst>
   </p:cSld>
@@ -1464,7 +2124,7 @@
     </p:spTree>
     <p:extLst>
       <p:ext uri="{BB962C8B-B14F-4D97-AF65-F5344CB8AC3E}">
-        <p14:creationId xmlns:p14="http://schemas.microsoft.com/office/powerpoint/2010/main" val="962635640"/>
+        <p14:creationId xmlns:p14="http://schemas.microsoft.com/office/powerpoint/2010/main" val="1911418281"/>
       </p:ext>
     </p:extLst>
   </p:cSld>
@@ -1549,7 +2209,7 @@
     </p:spTree>
     <p:extLst>
       <p:ext uri="{BB962C8B-B14F-4D97-AF65-F5344CB8AC3E}">
-        <p14:creationId xmlns:p14="http://schemas.microsoft.com/office/powerpoint/2010/main" val="3912811316"/>
+        <p14:creationId xmlns:p14="http://schemas.microsoft.com/office/powerpoint/2010/main" val="3674128110"/>
       </p:ext>
     </p:extLst>
   </p:cSld>
@@ -1634,7 +2294,7 @@
     </p:spTree>
     <p:extLst>
       <p:ext uri="{BB962C8B-B14F-4D97-AF65-F5344CB8AC3E}">
-        <p14:creationId xmlns:p14="http://schemas.microsoft.com/office/powerpoint/2010/main" val="3259237565"/>
+        <p14:creationId xmlns:p14="http://schemas.microsoft.com/office/powerpoint/2010/main" val="962635640"/>
       </p:ext>
     </p:extLst>
   </p:cSld>
@@ -1649,13 +2309,7 @@
   <p:cSld>
     <p:spTree>
       <p:nvGrpSpPr>
-        <p:cNvPr id="1" name="">
-          <a:extLst>
-            <a:ext uri="{FF2B5EF4-FFF2-40B4-BE49-F238E27FC236}">
-              <a16:creationId xmlns:a16="http://schemas.microsoft.com/office/drawing/2014/main" id="{7FFE48B6-8181-F485-483D-74B530894E3E}"/>
-            </a:ext>
-          </a:extLst>
-        </p:cNvPr>
+        <p:cNvPr id="1" name=""/>
         <p:cNvGrpSpPr/>
         <p:nvPr/>
       </p:nvGrpSpPr>
@@ -1669,13 +2323,7 @@
       </p:grpSpPr>
       <p:sp>
         <p:nvSpPr>
-          <p:cNvPr id="2" name="슬라이드 이미지 개체 틀 1">
-            <a:extLst>
-              <a:ext uri="{FF2B5EF4-FFF2-40B4-BE49-F238E27FC236}">
-                <a16:creationId xmlns:a16="http://schemas.microsoft.com/office/drawing/2014/main" id="{ABA4750D-9A32-1465-3219-6D24F3105F42}"/>
-              </a:ext>
-            </a:extLst>
-          </p:cNvPr>
+          <p:cNvPr id="2" name="슬라이드 이미지 개체 틀 1"/>
           <p:cNvSpPr>
             <a:spLocks noGrp="1" noRot="1" noChangeAspect="1"/>
           </p:cNvSpPr>
@@ -1687,13 +2335,7 @@
       </p:sp>
       <p:sp>
         <p:nvSpPr>
-          <p:cNvPr id="3" name="슬라이드 노트 개체 틀 2">
-            <a:extLst>
-              <a:ext uri="{FF2B5EF4-FFF2-40B4-BE49-F238E27FC236}">
-                <a16:creationId xmlns:a16="http://schemas.microsoft.com/office/drawing/2014/main" id="{6E012341-B157-0FA0-B642-6A8375F85540}"/>
-              </a:ext>
-            </a:extLst>
-          </p:cNvPr>
+          <p:cNvPr id="3" name="슬라이드 노트 개체 틀 2"/>
           <p:cNvSpPr>
             <a:spLocks noGrp="1"/>
           </p:cNvSpPr>
@@ -1712,13 +2354,7 @@
       </p:sp>
       <p:sp>
         <p:nvSpPr>
-          <p:cNvPr id="4" name="슬라이드 번호 개체 틀 3">
-            <a:extLst>
-              <a:ext uri="{FF2B5EF4-FFF2-40B4-BE49-F238E27FC236}">
-                <a16:creationId xmlns:a16="http://schemas.microsoft.com/office/drawing/2014/main" id="{68637A8C-9EC5-48D4-4FED-AD011394FDE8}"/>
-              </a:ext>
-            </a:extLst>
-          </p:cNvPr>
+          <p:cNvPr id="4" name="슬라이드 번호 개체 틀 3"/>
           <p:cNvSpPr>
             <a:spLocks noGrp="1"/>
           </p:cNvSpPr>
@@ -1743,7 +2379,7 @@
     </p:spTree>
     <p:extLst>
       <p:ext uri="{BB962C8B-B14F-4D97-AF65-F5344CB8AC3E}">
-        <p14:creationId xmlns:p14="http://schemas.microsoft.com/office/powerpoint/2010/main" val="151068689"/>
+        <p14:creationId xmlns:p14="http://schemas.microsoft.com/office/powerpoint/2010/main" val="3912811316"/>
       </p:ext>
     </p:extLst>
   </p:cSld>
@@ -1828,7 +2464,7 @@
     </p:spTree>
     <p:extLst>
       <p:ext uri="{BB962C8B-B14F-4D97-AF65-F5344CB8AC3E}">
-        <p14:creationId xmlns:p14="http://schemas.microsoft.com/office/powerpoint/2010/main" val="3628120198"/>
+        <p14:creationId xmlns:p14="http://schemas.microsoft.com/office/powerpoint/2010/main" val="3259237565"/>
       </p:ext>
     </p:extLst>
   </p:cSld>
@@ -1843,7 +2479,13 @@
   <p:cSld>
     <p:spTree>
       <p:nvGrpSpPr>
-        <p:cNvPr id="1" name=""/>
+        <p:cNvPr id="1" name="">
+          <a:extLst>
+            <a:ext uri="{FF2B5EF4-FFF2-40B4-BE49-F238E27FC236}">
+              <a16:creationId xmlns:a16="http://schemas.microsoft.com/office/drawing/2014/main" id="{7FFE48B6-8181-F485-483D-74B530894E3E}"/>
+            </a:ext>
+          </a:extLst>
+        </p:cNvPr>
         <p:cNvGrpSpPr/>
         <p:nvPr/>
       </p:nvGrpSpPr>
@@ -1857,7 +2499,13 @@
       </p:grpSpPr>
       <p:sp>
         <p:nvSpPr>
-          <p:cNvPr id="2" name="슬라이드 이미지 개체 틀 1"/>
+          <p:cNvPr id="2" name="슬라이드 이미지 개체 틀 1">
+            <a:extLst>
+              <a:ext uri="{FF2B5EF4-FFF2-40B4-BE49-F238E27FC236}">
+                <a16:creationId xmlns:a16="http://schemas.microsoft.com/office/drawing/2014/main" id="{ABA4750D-9A32-1465-3219-6D24F3105F42}"/>
+              </a:ext>
+            </a:extLst>
+          </p:cNvPr>
           <p:cNvSpPr>
             <a:spLocks noGrp="1" noRot="1" noChangeAspect="1"/>
           </p:cNvSpPr>
@@ -1869,7 +2517,13 @@
       </p:sp>
       <p:sp>
         <p:nvSpPr>
-          <p:cNvPr id="3" name="슬라이드 노트 개체 틀 2"/>
+          <p:cNvPr id="3" name="슬라이드 노트 개체 틀 2">
+            <a:extLst>
+              <a:ext uri="{FF2B5EF4-FFF2-40B4-BE49-F238E27FC236}">
+                <a16:creationId xmlns:a16="http://schemas.microsoft.com/office/drawing/2014/main" id="{6E012341-B157-0FA0-B642-6A8375F85540}"/>
+              </a:ext>
+            </a:extLst>
+          </p:cNvPr>
           <p:cNvSpPr>
             <a:spLocks noGrp="1"/>
           </p:cNvSpPr>
@@ -1888,7 +2542,13 @@
       </p:sp>
       <p:sp>
         <p:nvSpPr>
-          <p:cNvPr id="4" name="슬라이드 번호 개체 틀 3"/>
+          <p:cNvPr id="4" name="슬라이드 번호 개체 틀 3">
+            <a:extLst>
+              <a:ext uri="{FF2B5EF4-FFF2-40B4-BE49-F238E27FC236}">
+                <a16:creationId xmlns:a16="http://schemas.microsoft.com/office/drawing/2014/main" id="{68637A8C-9EC5-48D4-4FED-AD011394FDE8}"/>
+              </a:ext>
+            </a:extLst>
+          </p:cNvPr>
           <p:cNvSpPr>
             <a:spLocks noGrp="1"/>
           </p:cNvSpPr>
@@ -1913,7 +2573,7 @@
     </p:spTree>
     <p:extLst>
       <p:ext uri="{BB962C8B-B14F-4D97-AF65-F5344CB8AC3E}">
-        <p14:creationId xmlns:p14="http://schemas.microsoft.com/office/powerpoint/2010/main" val="1932367812"/>
+        <p14:creationId xmlns:p14="http://schemas.microsoft.com/office/powerpoint/2010/main" val="151068689"/>
       </p:ext>
     </p:extLst>
   </p:cSld>
@@ -2161,7 +2821,7 @@
           <a:p>
             <a:fld id="{4B229CEB-779D-4AB3-81CB-8FCEEAE03F61}" type="datetime1">
               <a:rPr lang="ko-KR" altLang="en-US" smtClean="0"/>
-              <a:t>2026-03-02</a:t>
+              <a:t>2026-03-16</a:t>
             </a:fld>
             <a:endParaRPr lang="ko-KR" altLang="en-US" dirty="0"/>
           </a:p>
@@ -2399,7 +3059,7 @@
             <a:pPr rtl="0"/>
             <a:fld id="{C3B7A883-0BF0-4B4B-84D5-D747A0111A56}" type="datetime1">
               <a:rPr lang="ko-KR" altLang="en-US" noProof="0" smtClean="0"/>
-              <a:t>2026-03-02</a:t>
+              <a:t>2026-03-16</a:t>
             </a:fld>
             <a:endParaRPr lang="ko-KR" altLang="en-US" noProof="0" dirty="0"/>
           </a:p>
@@ -2617,7 +3277,7 @@
             <a:pPr rtl="0"/>
             <a:fld id="{3DA7EA29-F2BB-4FB1-BB4B-C55A7FA3FC5C}" type="datetime1">
               <a:rPr lang="ko-KR" altLang="en-US" noProof="0" smtClean="0"/>
-              <a:t>2026-03-02</a:t>
+              <a:t>2026-03-16</a:t>
             </a:fld>
             <a:endParaRPr lang="ko-KR" altLang="en-US" noProof="0" dirty="0"/>
           </a:p>
@@ -2826,7 +3486,7 @@
             <a:pPr rtl="0"/>
             <a:fld id="{D76306AB-75A0-421C-B431-0E4E30A5C28E}" type="datetime1">
               <a:rPr lang="ko-KR" altLang="en-US" noProof="0" smtClean="0"/>
-              <a:t>2026-03-02</a:t>
+              <a:t>2026-03-16</a:t>
             </a:fld>
             <a:endParaRPr lang="ko-KR" altLang="en-US" noProof="0" dirty="0"/>
           </a:p>
@@ -3096,7 +3756,7 @@
             <a:pPr rtl="0"/>
             <a:fld id="{E1D969EE-F1EB-462E-B70D-5B36B3806A4E}" type="datetime1">
               <a:rPr lang="ko-KR" altLang="en-US" noProof="0" smtClean="0"/>
-              <a:t>2026-03-02</a:t>
+              <a:t>2026-03-16</a:t>
             </a:fld>
             <a:endParaRPr lang="ko-KR" altLang="en-US" noProof="0" dirty="0"/>
           </a:p>
@@ -3404,7 +4064,7 @@
             <a:pPr rtl="0"/>
             <a:fld id="{E8CBB1B7-E0A1-46A3-B5B5-C69931095FF6}" type="datetime1">
               <a:rPr lang="ko-KR" altLang="en-US" noProof="0" smtClean="0"/>
-              <a:t>2026-03-02</a:t>
+              <a:t>2026-03-16</a:t>
             </a:fld>
             <a:endParaRPr lang="ko-KR" altLang="en-US" noProof="0" dirty="0"/>
           </a:p>
@@ -3855,7 +4515,7 @@
             <a:pPr rtl="0"/>
             <a:fld id="{DAFC0E65-06AB-44D7-AAEE-8F4C7ED84A0C}" type="datetime1">
               <a:rPr lang="ko-KR" altLang="en-US" noProof="0" smtClean="0"/>
-              <a:t>2026-03-02</a:t>
+              <a:t>2026-03-16</a:t>
             </a:fld>
             <a:endParaRPr lang="ko-KR" altLang="en-US" noProof="0" dirty="0"/>
           </a:p>
@@ -3992,7 +4652,7 @@
             <a:pPr rtl="0"/>
             <a:fld id="{30189E66-D439-4767-B911-EB49CB20E313}" type="datetime1">
               <a:rPr lang="ko-KR" altLang="en-US" noProof="0" smtClean="0"/>
-              <a:t>2026-03-02</a:t>
+              <a:t>2026-03-16</a:t>
             </a:fld>
             <a:endParaRPr lang="ko-KR" altLang="en-US" noProof="0" dirty="0"/>
           </a:p>
@@ -4105,7 +4765,7 @@
             <a:pPr rtl="0"/>
             <a:fld id="{D4E4FFC0-DB28-4291-80A0-63DBF8428320}" type="datetime1">
               <a:rPr lang="ko-KR" altLang="en-US" noProof="0" smtClean="0"/>
-              <a:t>2026-03-02</a:t>
+              <a:t>2026-03-16</a:t>
             </a:fld>
             <a:endParaRPr lang="ko-KR" altLang="en-US" noProof="0" dirty="0"/>
           </a:p>
@@ -4410,7 +5070,7 @@
             <a:pPr rtl="0"/>
             <a:fld id="{3AB5804B-C38E-4214-93DF-3E6DA00134E8}" type="datetime1">
               <a:rPr lang="ko-KR" altLang="en-US" noProof="0" smtClean="0"/>
-              <a:t>2026-03-02</a:t>
+              <a:t>2026-03-16</a:t>
             </a:fld>
             <a:endParaRPr lang="ko-KR" altLang="en-US" noProof="0" dirty="0"/>
           </a:p>
@@ -4704,7 +5364,7 @@
             <a:pPr rtl="0"/>
             <a:fld id="{CABEE384-F18F-4153-AC21-608599869F84}" type="datetime1">
               <a:rPr lang="ko-KR" altLang="en-US" noProof="0" smtClean="0"/>
-              <a:t>2026-03-02</a:t>
+              <a:t>2026-03-16</a:t>
             </a:fld>
             <a:endParaRPr lang="ko-KR" altLang="en-US" noProof="0" dirty="0"/>
           </a:p>
@@ -4936,7 +5596,7 @@
           <a:p>
             <a:fld id="{667A4C69-65FB-481C-AC2A-84D254D33675}" type="datetime1">
               <a:rPr lang="ko-KR" altLang="en-US" smtClean="0"/>
-              <a:t>2026-03-02</a:t>
+              <a:t>2026-03-16</a:t>
             </a:fld>
             <a:endParaRPr lang="ko-KR" altLang="en-US" dirty="0"/>
           </a:p>
@@ -5578,6 +6238,237 @@
           </a:p>
         </p:txBody>
       </p:sp>
+      <p:pic>
+        <p:nvPicPr>
+          <p:cNvPr id="2" name="그림 1"/>
+          <p:cNvPicPr>
+            <a:picLocks noChangeAspect="1"/>
+          </p:cNvPicPr>
+          <p:nvPr/>
+        </p:nvPicPr>
+        <p:blipFill>
+          <a:blip r:embed="rId3"/>
+          <a:stretch>
+            <a:fillRect/>
+          </a:stretch>
+        </p:blipFill>
+        <p:spPr>
+          <a:xfrm>
+            <a:off x="2349996" y="836712"/>
+            <a:ext cx="8159176" cy="5519639"/>
+          </a:xfrm>
+          <a:prstGeom prst="rect">
+            <a:avLst/>
+          </a:prstGeom>
+        </p:spPr>
+      </p:pic>
+    </p:spTree>
+    <p:extLst>
+      <p:ext uri="{BB962C8B-B14F-4D97-AF65-F5344CB8AC3E}">
+        <p14:creationId xmlns:p14="http://schemas.microsoft.com/office/powerpoint/2010/main" val="3590809602"/>
+      </p:ext>
+    </p:extLst>
+  </p:cSld>
+  <p:clrMapOvr>
+    <a:masterClrMapping/>
+  </p:clrMapOvr>
+  <mc:AlternateContent xmlns:mc="http://schemas.openxmlformats.org/markup-compatibility/2006" xmlns:p14="http://schemas.microsoft.com/office/powerpoint/2010/main">
+    <mc:Choice Requires="p14">
+      <p:transition spd="med" p14:dur="700">
+        <p:fade/>
+      </p:transition>
+    </mc:Choice>
+    <mc:Fallback xmlns="">
+      <p:transition spd="med">
+        <p:fade/>
+      </p:transition>
+    </mc:Fallback>
+  </mc:AlternateContent>
+</p:sld>
+</file>
+
+<file path=ppt/slides/slide11.xml><?xml version="1.0" encoding="utf-8"?>
+<p:sld xmlns:a="http://schemas.openxmlformats.org/drawingml/2006/main" xmlns:r="http://schemas.openxmlformats.org/officeDocument/2006/relationships" xmlns:p="http://schemas.openxmlformats.org/presentationml/2006/main">
+  <p:cSld>
+    <p:spTree>
+      <p:nvGrpSpPr>
+        <p:cNvPr id="1" name=""/>
+        <p:cNvGrpSpPr/>
+        <p:nvPr/>
+      </p:nvGrpSpPr>
+      <p:grpSpPr>
+        <a:xfrm>
+          <a:off x="0" y="0"/>
+          <a:ext cx="0" cy="0"/>
+          <a:chOff x="0" y="0"/>
+          <a:chExt cx="0" cy="0"/>
+        </a:xfrm>
+      </p:grpSpPr>
+      <p:sp>
+        <p:nvSpPr>
+          <p:cNvPr id="8" name="슬라이드 번호 개체 틀 7"/>
+          <p:cNvSpPr>
+            <a:spLocks noGrp="1"/>
+          </p:cNvSpPr>
+          <p:nvPr>
+            <p:ph type="sldNum" sz="quarter" idx="12"/>
+          </p:nvPr>
+        </p:nvSpPr>
+        <p:spPr/>
+        <p:txBody>
+          <a:bodyPr/>
+          <a:lstStyle/>
+          <a:p>
+            <a:pPr rtl="0"/>
+            <a:fld id="{A3F31473-23EB-4724-8B59-FE6D21D89FA4}" type="slidenum">
+              <a:rPr lang="en-US" altLang="ko-KR" noProof="0" smtClean="0"/>
+              <a:t>11</a:t>
+            </a:fld>
+            <a:endParaRPr lang="en-US" altLang="ko-KR" noProof="0" dirty="0"/>
+          </a:p>
+        </p:txBody>
+      </p:sp>
+      <p:pic>
+        <p:nvPicPr>
+          <p:cNvPr id="2050" name="Picture 2" descr="https://wikidocs.net/images/page/163985/ci02.png"/>
+          <p:cNvPicPr>
+            <a:picLocks noChangeAspect="1" noChangeArrowheads="1"/>
+          </p:cNvPicPr>
+          <p:nvPr/>
+        </p:nvPicPr>
+        <p:blipFill>
+          <a:blip r:embed="rId3">
+            <a:extLst>
+              <a:ext uri="{28A0092B-C50C-407E-A947-70E740481C1C}">
+                <a14:useLocalDpi xmlns:a14="http://schemas.microsoft.com/office/drawing/2010/main" val="0"/>
+              </a:ext>
+            </a:extLst>
+          </a:blip>
+          <a:srcRect/>
+          <a:stretch>
+            <a:fillRect/>
+          </a:stretch>
+        </p:blipFill>
+        <p:spPr bwMode="auto">
+          <a:xfrm>
+            <a:off x="1718204" y="1484784"/>
+            <a:ext cx="8439150" cy="4105275"/>
+          </a:xfrm>
+          <a:prstGeom prst="rect">
+            <a:avLst/>
+          </a:prstGeom>
+          <a:noFill/>
+          <a:extLst>
+            <a:ext uri="{909E8E84-426E-40DD-AFC4-6F175D3DCCD1}">
+              <a14:hiddenFill xmlns:a14="http://schemas.microsoft.com/office/drawing/2010/main">
+                <a:solidFill>
+                  <a:srgbClr val="FFFFFF"/>
+                </a:solidFill>
+              </a14:hiddenFill>
+            </a:ext>
+          </a:extLst>
+        </p:spPr>
+      </p:pic>
+      <p:sp>
+        <p:nvSpPr>
+          <p:cNvPr id="2" name="직사각형 1"/>
+          <p:cNvSpPr/>
+          <p:nvPr/>
+        </p:nvSpPr>
+        <p:spPr>
+          <a:xfrm>
+            <a:off x="1629916" y="5661248"/>
+            <a:ext cx="2866490" cy="369332"/>
+          </a:xfrm>
+          <a:prstGeom prst="rect">
+            <a:avLst/>
+          </a:prstGeom>
+        </p:spPr>
+        <p:txBody>
+          <a:bodyPr wrap="none">
+            <a:spAutoFit/>
+          </a:bodyPr>
+          <a:lstStyle/>
+          <a:p>
+            <a:r>
+              <a:rPr lang="ko-KR" altLang="en-US" dirty="0">
+                <a:hlinkClick r:id="rId4"/>
+              </a:rPr>
+              <a:t>https://wikidocs.net/163985</a:t>
+            </a:r>
+            <a:r>
+              <a:rPr lang="ko-KR" altLang="en-US" dirty="0"/>
+              <a:t> </a:t>
+            </a:r>
+          </a:p>
+        </p:txBody>
+      </p:sp>
+    </p:spTree>
+    <p:extLst>
+      <p:ext uri="{BB962C8B-B14F-4D97-AF65-F5344CB8AC3E}">
+        <p14:creationId xmlns:p14="http://schemas.microsoft.com/office/powerpoint/2010/main" val="4127239139"/>
+      </p:ext>
+    </p:extLst>
+  </p:cSld>
+  <p:clrMapOvr>
+    <a:masterClrMapping/>
+  </p:clrMapOvr>
+  <mc:AlternateContent xmlns:mc="http://schemas.openxmlformats.org/markup-compatibility/2006" xmlns:p14="http://schemas.microsoft.com/office/powerpoint/2010/main">
+    <mc:Choice Requires="p14">
+      <p:transition spd="med" p14:dur="700">
+        <p:fade/>
+      </p:transition>
+    </mc:Choice>
+    <mc:Fallback xmlns="">
+      <p:transition spd="med">
+        <p:fade/>
+      </p:transition>
+    </mc:Fallback>
+  </mc:AlternateContent>
+</p:sld>
+</file>
+
+<file path=ppt/slides/slide12.xml><?xml version="1.0" encoding="utf-8"?>
+<p:sld xmlns:a="http://schemas.openxmlformats.org/drawingml/2006/main" xmlns:r="http://schemas.openxmlformats.org/officeDocument/2006/relationships" xmlns:p="http://schemas.openxmlformats.org/presentationml/2006/main">
+  <p:cSld>
+    <p:spTree>
+      <p:nvGrpSpPr>
+        <p:cNvPr id="1" name=""/>
+        <p:cNvGrpSpPr/>
+        <p:nvPr/>
+      </p:nvGrpSpPr>
+      <p:grpSpPr>
+        <a:xfrm>
+          <a:off x="0" y="0"/>
+          <a:ext cx="0" cy="0"/>
+          <a:chOff x="0" y="0"/>
+          <a:chExt cx="0" cy="0"/>
+        </a:xfrm>
+      </p:grpSpPr>
+      <p:sp>
+        <p:nvSpPr>
+          <p:cNvPr id="8" name="슬라이드 번호 개체 틀 7"/>
+          <p:cNvSpPr>
+            <a:spLocks noGrp="1"/>
+          </p:cNvSpPr>
+          <p:nvPr>
+            <p:ph type="sldNum" sz="quarter" idx="12"/>
+          </p:nvPr>
+        </p:nvSpPr>
+        <p:spPr/>
+        <p:txBody>
+          <a:bodyPr/>
+          <a:lstStyle/>
+          <a:p>
+            <a:pPr rtl="0"/>
+            <a:fld id="{A3F31473-23EB-4724-8B59-FE6D21D89FA4}" type="slidenum">
+              <a:rPr lang="en-US" altLang="ko-KR" noProof="0" smtClean="0"/>
+              <a:t>12</a:t>
+            </a:fld>
+            <a:endParaRPr lang="en-US" altLang="ko-KR" noProof="0" dirty="0"/>
+          </a:p>
+        </p:txBody>
+      </p:sp>
       <p:sp>
         <p:nvSpPr>
           <p:cNvPr id="2" name="직사각형 1"/>
@@ -5661,7 +6552,250 @@
 </p:sld>
 </file>
 
-<file path=ppt/slides/slide11.xml><?xml version="1.0" encoding="utf-8"?>
+<file path=ppt/slides/slide13.xml><?xml version="1.0" encoding="utf-8"?>
+<p:sld xmlns:a="http://schemas.openxmlformats.org/drawingml/2006/main" xmlns:r="http://schemas.openxmlformats.org/officeDocument/2006/relationships" xmlns:p="http://schemas.openxmlformats.org/presentationml/2006/main">
+  <p:cSld>
+    <p:spTree>
+      <p:nvGrpSpPr>
+        <p:cNvPr id="1" name="">
+          <a:extLst>
+            <a:ext uri="{FF2B5EF4-FFF2-40B4-BE49-F238E27FC236}">
+              <a16:creationId xmlns:a16="http://schemas.microsoft.com/office/drawing/2014/main" id="{A9D9CBA5-0897-61E1-8F3A-B36C83CB0BAB}"/>
+            </a:ext>
+          </a:extLst>
+        </p:cNvPr>
+        <p:cNvGrpSpPr/>
+        <p:nvPr/>
+      </p:nvGrpSpPr>
+      <p:grpSpPr>
+        <a:xfrm>
+          <a:off x="0" y="0"/>
+          <a:ext cx="0" cy="0"/>
+          <a:chOff x="0" y="0"/>
+          <a:chExt cx="0" cy="0"/>
+        </a:xfrm>
+      </p:grpSpPr>
+      <p:sp>
+        <p:nvSpPr>
+          <p:cNvPr id="8" name="슬라이드 번호 개체 틀 7">
+            <a:extLst>
+              <a:ext uri="{FF2B5EF4-FFF2-40B4-BE49-F238E27FC236}">
+                <a16:creationId xmlns:a16="http://schemas.microsoft.com/office/drawing/2014/main" id="{7FAE84D3-1511-D91D-B5F7-4FFD5A038808}"/>
+              </a:ext>
+            </a:extLst>
+          </p:cNvPr>
+          <p:cNvSpPr>
+            <a:spLocks noGrp="1"/>
+          </p:cNvSpPr>
+          <p:nvPr>
+            <p:ph type="sldNum" sz="quarter" idx="12"/>
+          </p:nvPr>
+        </p:nvSpPr>
+        <p:spPr/>
+        <p:txBody>
+          <a:bodyPr/>
+          <a:lstStyle/>
+          <a:p>
+            <a:pPr rtl="0"/>
+            <a:fld id="{A3F31473-23EB-4724-8B59-FE6D21D89FA4}" type="slidenum">
+              <a:rPr lang="en-US" altLang="ko-KR" noProof="0" smtClean="0"/>
+              <a:t>13</a:t>
+            </a:fld>
+            <a:endParaRPr lang="en-US" altLang="ko-KR" noProof="0" dirty="0"/>
+          </a:p>
+        </p:txBody>
+      </p:sp>
+      <p:sp>
+        <p:nvSpPr>
+          <p:cNvPr id="5" name="TextBox 4">
+            <a:extLst>
+              <a:ext uri="{FF2B5EF4-FFF2-40B4-BE49-F238E27FC236}">
+                <a16:creationId xmlns:a16="http://schemas.microsoft.com/office/drawing/2014/main" id="{8F92C6CD-0717-8F5E-8CE7-27DD74AA0D55}"/>
+              </a:ext>
+            </a:extLst>
+          </p:cNvPr>
+          <p:cNvSpPr txBox="1"/>
+          <p:nvPr/>
+        </p:nvSpPr>
+        <p:spPr>
+          <a:xfrm>
+            <a:off x="117748" y="260648"/>
+            <a:ext cx="2592288" cy="584775"/>
+          </a:xfrm>
+          <a:prstGeom prst="rect">
+            <a:avLst/>
+          </a:prstGeom>
+          <a:noFill/>
+        </p:spPr>
+        <p:txBody>
+          <a:bodyPr wrap="square" rtlCol="0">
+            <a:spAutoFit/>
+          </a:bodyPr>
+          <a:lstStyle/>
+          <a:p>
+            <a:r>
+              <a:rPr lang="ko-KR" altLang="en-US" sz="3200" b="1" dirty="0"/>
+              <a:t>실습하기</a:t>
+            </a:r>
+          </a:p>
+        </p:txBody>
+      </p:sp>
+      <p:sp>
+        <p:nvSpPr>
+          <p:cNvPr id="9" name="TextBox 8">
+            <a:extLst>
+              <a:ext uri="{FF2B5EF4-FFF2-40B4-BE49-F238E27FC236}">
+                <a16:creationId xmlns:a16="http://schemas.microsoft.com/office/drawing/2014/main" id="{91EBCE46-A2C4-FE9B-FB3C-C83E9244E97E}"/>
+              </a:ext>
+            </a:extLst>
+          </p:cNvPr>
+          <p:cNvSpPr txBox="1"/>
+          <p:nvPr/>
+        </p:nvSpPr>
+        <p:spPr>
+          <a:xfrm>
+            <a:off x="1845940" y="404416"/>
+            <a:ext cx="2186432" cy="400110"/>
+          </a:xfrm>
+          <a:prstGeom prst="rect">
+            <a:avLst/>
+          </a:prstGeom>
+          <a:noFill/>
+        </p:spPr>
+        <p:txBody>
+          <a:bodyPr wrap="none" rtlCol="0">
+            <a:spAutoFit/>
+          </a:bodyPr>
+          <a:lstStyle/>
+          <a:p>
+            <a:r>
+              <a:rPr lang="en-US" altLang="ko-KR" sz="2000" dirty="0">
+                <a:hlinkClick r:id="rId3">
+                  <a:extLst>
+                    <a:ext uri="{A12FA001-AC4F-418D-AE19-62706E023703}">
+                      <ahyp:hlinkClr xmlns:ahyp="http://schemas.microsoft.com/office/drawing/2018/hyperlinkcolor" val="tx"/>
+                    </a:ext>
+                  </a:extLst>
+                </a:hlinkClick>
+              </a:rPr>
+              <a:t>Click</a:t>
+            </a:r>
+            <a:r>
+              <a:rPr lang="ko-KR" altLang="en-US" sz="2000" dirty="0">
+                <a:hlinkClick r:id="rId3">
+                  <a:extLst>
+                    <a:ext uri="{A12FA001-AC4F-418D-AE19-62706E023703}">
+                      <ahyp:hlinkClr xmlns:ahyp="http://schemas.microsoft.com/office/drawing/2018/hyperlinkcolor" val="tx"/>
+                    </a:ext>
+                  </a:extLst>
+                </a:hlinkClick>
+              </a:rPr>
+              <a:t> </a:t>
+            </a:r>
+            <a:r>
+              <a:rPr lang="en-US" altLang="ko-KR" sz="2000" dirty="0">
+                <a:hlinkClick r:id="rId3">
+                  <a:extLst>
+                    <a:ext uri="{A12FA001-AC4F-418D-AE19-62706E023703}">
+                      <ahyp:hlinkClr xmlns:ahyp="http://schemas.microsoft.com/office/drawing/2018/hyperlinkcolor" val="tx"/>
+                    </a:ext>
+                  </a:extLst>
+                </a:hlinkClick>
+              </a:rPr>
+              <a:t>to</a:t>
+            </a:r>
+            <a:r>
+              <a:rPr lang="ko-KR" altLang="en-US" sz="2000" dirty="0">
+                <a:hlinkClick r:id="rId3">
+                  <a:extLst>
+                    <a:ext uri="{A12FA001-AC4F-418D-AE19-62706E023703}">
+                      <ahyp:hlinkClr xmlns:ahyp="http://schemas.microsoft.com/office/drawing/2018/hyperlinkcolor" val="tx"/>
+                    </a:ext>
+                  </a:extLst>
+                </a:hlinkClick>
+              </a:rPr>
+              <a:t> </a:t>
+            </a:r>
+            <a:r>
+              <a:rPr lang="en-US" altLang="ko-KR" sz="2000" dirty="0">
+                <a:hlinkClick r:id="rId3">
+                  <a:extLst>
+                    <a:ext uri="{A12FA001-AC4F-418D-AE19-62706E023703}">
+                      <ahyp:hlinkClr xmlns:ahyp="http://schemas.microsoft.com/office/drawing/2018/hyperlinkcolor" val="tx"/>
+                    </a:ext>
+                  </a:extLst>
+                </a:hlinkClick>
+              </a:rPr>
+              <a:t>simulate</a:t>
+            </a:r>
+            <a:r>
+              <a:rPr lang="ko-KR" altLang="en-US" sz="2000" dirty="0"/>
+              <a:t> </a:t>
+            </a:r>
+            <a:r>
+              <a:rPr lang="en-US" altLang="ko-KR" sz="2000" dirty="0"/>
+              <a:t>CI</a:t>
+            </a:r>
+            <a:endParaRPr lang="ko-KR" altLang="en-US" sz="2000" dirty="0"/>
+          </a:p>
+        </p:txBody>
+      </p:sp>
+      <p:pic>
+        <p:nvPicPr>
+          <p:cNvPr id="11" name="그림 10">
+            <a:extLst>
+              <a:ext uri="{FF2B5EF4-FFF2-40B4-BE49-F238E27FC236}">
+                <a16:creationId xmlns:a16="http://schemas.microsoft.com/office/drawing/2014/main" id="{8B1B8307-C04A-2546-5139-0F2C30654FAE}"/>
+              </a:ext>
+            </a:extLst>
+          </p:cNvPr>
+          <p:cNvPicPr>
+            <a:picLocks noChangeAspect="1"/>
+          </p:cNvPicPr>
+          <p:nvPr/>
+        </p:nvPicPr>
+        <p:blipFill>
+          <a:blip r:embed="rId4"/>
+          <a:stretch>
+            <a:fillRect/>
+          </a:stretch>
+        </p:blipFill>
+        <p:spPr>
+          <a:xfrm>
+            <a:off x="1053852" y="1147876"/>
+            <a:ext cx="8645713" cy="5461335"/>
+          </a:xfrm>
+          <a:prstGeom prst="rect">
+            <a:avLst/>
+          </a:prstGeom>
+        </p:spPr>
+      </p:pic>
+    </p:spTree>
+    <p:extLst>
+      <p:ext uri="{BB962C8B-B14F-4D97-AF65-F5344CB8AC3E}">
+        <p14:creationId xmlns:p14="http://schemas.microsoft.com/office/powerpoint/2010/main" val="3491636795"/>
+      </p:ext>
+    </p:extLst>
+  </p:cSld>
+  <p:clrMapOvr>
+    <a:masterClrMapping/>
+  </p:clrMapOvr>
+  <mc:AlternateContent xmlns:mc="http://schemas.openxmlformats.org/markup-compatibility/2006" xmlns:p14="http://schemas.microsoft.com/office/powerpoint/2010/main">
+    <mc:Choice Requires="p14">
+      <p:transition spd="med" p14:dur="700">
+        <p:fade/>
+      </p:transition>
+    </mc:Choice>
+    <mc:Fallback xmlns="">
+      <p:transition spd="med">
+        <p:fade/>
+      </p:transition>
+    </mc:Fallback>
+  </mc:AlternateContent>
+</p:sld>
+</file>
+
+<file path=ppt/slides/slide14.xml><?xml version="1.0" encoding="utf-8"?>
 <p:sld xmlns:a="http://schemas.openxmlformats.org/drawingml/2006/main" xmlns:r="http://schemas.openxmlformats.org/officeDocument/2006/relationships" xmlns:p="http://schemas.openxmlformats.org/presentationml/2006/main">
   <p:cSld>
     <p:spTree>
@@ -5696,7 +6830,7 @@
             <a:pPr rtl="0"/>
             <a:fld id="{A3F31473-23EB-4724-8B59-FE6D21D89FA4}" type="slidenum">
               <a:rPr lang="en-US" altLang="ko-KR" noProof="0" smtClean="0"/>
-              <a:t>11</a:t>
+              <a:t>14</a:t>
             </a:fld>
             <a:endParaRPr lang="en-US" altLang="ko-KR" noProof="0" dirty="0"/>
           </a:p>
@@ -5751,7 +6885,589 @@
 </p:sld>
 </file>
 
-<file path=ppt/slides/slide12.xml><?xml version="1.0" encoding="utf-8"?>
+<file path=ppt/slides/slide15.xml><?xml version="1.0" encoding="utf-8"?>
+<p:sld xmlns:a="http://schemas.openxmlformats.org/drawingml/2006/main" xmlns:r="http://schemas.openxmlformats.org/officeDocument/2006/relationships" xmlns:p="http://schemas.openxmlformats.org/presentationml/2006/main">
+  <p:cSld>
+    <p:spTree>
+      <p:nvGrpSpPr>
+        <p:cNvPr id="1" name="">
+          <a:extLst>
+            <a:ext uri="{FF2B5EF4-FFF2-40B4-BE49-F238E27FC236}">
+              <a16:creationId xmlns:a16="http://schemas.microsoft.com/office/drawing/2014/main" id="{ED0C8D64-2465-85C7-D991-C725B4D0D029}"/>
+            </a:ext>
+          </a:extLst>
+        </p:cNvPr>
+        <p:cNvGrpSpPr/>
+        <p:nvPr/>
+      </p:nvGrpSpPr>
+      <p:grpSpPr>
+        <a:xfrm>
+          <a:off x="0" y="0"/>
+          <a:ext cx="0" cy="0"/>
+          <a:chOff x="0" y="0"/>
+          <a:chExt cx="0" cy="0"/>
+        </a:xfrm>
+      </p:grpSpPr>
+      <p:sp>
+        <p:nvSpPr>
+          <p:cNvPr id="8" name="슬라이드 번호 개체 틀 7">
+            <a:extLst>
+              <a:ext uri="{FF2B5EF4-FFF2-40B4-BE49-F238E27FC236}">
+                <a16:creationId xmlns:a16="http://schemas.microsoft.com/office/drawing/2014/main" id="{C66F2910-2209-1475-49C6-6EC7DDC33E9C}"/>
+              </a:ext>
+            </a:extLst>
+          </p:cNvPr>
+          <p:cNvSpPr>
+            <a:spLocks noGrp="1"/>
+          </p:cNvSpPr>
+          <p:nvPr>
+            <p:ph type="sldNum" sz="quarter" idx="12"/>
+          </p:nvPr>
+        </p:nvSpPr>
+        <p:spPr/>
+        <p:txBody>
+          <a:bodyPr/>
+          <a:lstStyle/>
+          <a:p>
+            <a:pPr rtl="0"/>
+            <a:fld id="{A3F31473-23EB-4724-8B59-FE6D21D89FA4}" type="slidenum">
+              <a:rPr lang="en-US" altLang="ko-KR" noProof="0" smtClean="0"/>
+              <a:t>15</a:t>
+            </a:fld>
+            <a:endParaRPr lang="en-US" altLang="ko-KR" noProof="0" dirty="0"/>
+          </a:p>
+        </p:txBody>
+      </p:sp>
+      <p:sp>
+        <p:nvSpPr>
+          <p:cNvPr id="5" name="TextBox 4">
+            <a:extLst>
+              <a:ext uri="{FF2B5EF4-FFF2-40B4-BE49-F238E27FC236}">
+                <a16:creationId xmlns:a16="http://schemas.microsoft.com/office/drawing/2014/main" id="{65C73BBB-662E-79D0-E653-928BFAC00570}"/>
+              </a:ext>
+            </a:extLst>
+          </p:cNvPr>
+          <p:cNvSpPr txBox="1"/>
+          <p:nvPr/>
+        </p:nvSpPr>
+        <p:spPr>
+          <a:xfrm>
+            <a:off x="117748" y="260648"/>
+            <a:ext cx="2592288" cy="584775"/>
+          </a:xfrm>
+          <a:prstGeom prst="rect">
+            <a:avLst/>
+          </a:prstGeom>
+          <a:noFill/>
+        </p:spPr>
+        <p:txBody>
+          <a:bodyPr wrap="square" rtlCol="0">
+            <a:spAutoFit/>
+          </a:bodyPr>
+          <a:lstStyle/>
+          <a:p>
+            <a:r>
+              <a:rPr lang="ko-KR" altLang="en-US" sz="3200" b="1"/>
+              <a:t>문제 풀이</a:t>
+            </a:r>
+          </a:p>
+        </p:txBody>
+      </p:sp>
+      <p:sp>
+        <p:nvSpPr>
+          <p:cNvPr id="6" name="TextBox 5">
+            <a:extLst>
+              <a:ext uri="{FF2B5EF4-FFF2-40B4-BE49-F238E27FC236}">
+                <a16:creationId xmlns:a16="http://schemas.microsoft.com/office/drawing/2014/main" id="{C75B5F45-07E8-2B83-9D55-0E0CE4EB3311}"/>
+              </a:ext>
+            </a:extLst>
+          </p:cNvPr>
+          <p:cNvSpPr txBox="1"/>
+          <p:nvPr/>
+        </p:nvSpPr>
+        <p:spPr>
+          <a:xfrm>
+            <a:off x="189756" y="1268760"/>
+            <a:ext cx="9923077" cy="1354217"/>
+          </a:xfrm>
+          <a:prstGeom prst="rect">
+            <a:avLst/>
+          </a:prstGeom>
+          <a:solidFill>
+            <a:schemeClr val="bg1">
+              <a:lumMod val="85000"/>
+            </a:schemeClr>
+          </a:solidFill>
+        </p:spPr>
+        <p:txBody>
+          <a:bodyPr wrap="square">
+            <a:spAutoFit/>
+          </a:bodyPr>
+          <a:lstStyle/>
+          <a:p>
+            <a:pPr>
+              <a:buNone/>
+            </a:pPr>
+            <a:r>
+              <a:rPr lang="ko-KR" altLang="en-US" dirty="0">
+                <a:latin typeface="휴먼모음T" panose="02030504000101010101" pitchFamily="18" charset="-127"/>
+                <a:ea typeface="휴먼모음T" panose="02030504000101010101" pitchFamily="18" charset="-127"/>
+              </a:rPr>
+              <a:t>문제 </a:t>
+            </a:r>
+            <a:r>
+              <a:rPr lang="en-US" altLang="ko-KR" dirty="0">
+                <a:latin typeface="휴먼모음T" panose="02030504000101010101" pitchFamily="18" charset="-127"/>
+                <a:ea typeface="휴먼모음T" panose="02030504000101010101" pitchFamily="18" charset="-127"/>
+              </a:rPr>
+              <a:t>1. </a:t>
+            </a:r>
+            <a:r>
+              <a:rPr lang="ko-KR" altLang="en-US" dirty="0">
+                <a:latin typeface="휴먼모음T" panose="02030504000101010101" pitchFamily="18" charset="-127"/>
+                <a:ea typeface="휴먼모음T" panose="02030504000101010101" pitchFamily="18" charset="-127"/>
+              </a:rPr>
+              <a:t>데이터 준비 및 탐색 </a:t>
+            </a:r>
+            <a:r>
+              <a:rPr lang="en-US" altLang="ko-KR" dirty="0">
+                <a:latin typeface="휴먼모음T" panose="02030504000101010101" pitchFamily="18" charset="-127"/>
+                <a:ea typeface="휴먼모음T" panose="02030504000101010101" pitchFamily="18" charset="-127"/>
+              </a:rPr>
+              <a:t>(10</a:t>
+            </a:r>
+            <a:r>
+              <a:rPr lang="ko-KR" altLang="en-US" dirty="0">
+                <a:latin typeface="휴먼모음T" panose="02030504000101010101" pitchFamily="18" charset="-127"/>
+                <a:ea typeface="휴먼모음T" panose="02030504000101010101" pitchFamily="18" charset="-127"/>
+              </a:rPr>
+              <a:t>점</a:t>
+            </a:r>
+            <a:r>
+              <a:rPr lang="en-US" altLang="ko-KR" dirty="0">
+                <a:latin typeface="휴먼모음T" panose="02030504000101010101" pitchFamily="18" charset="-127"/>
+                <a:ea typeface="휴먼모음T" panose="02030504000101010101" pitchFamily="18" charset="-127"/>
+              </a:rPr>
+              <a:t>)</a:t>
+            </a:r>
+          </a:p>
+          <a:p>
+            <a:pPr>
+              <a:buNone/>
+            </a:pPr>
+            <a:endParaRPr lang="en-US" altLang="ko-KR" sz="1600" dirty="0">
+              <a:latin typeface="휴먼모음T" panose="02030504000101010101" pitchFamily="18" charset="-127"/>
+              <a:ea typeface="휴먼모음T" panose="02030504000101010101" pitchFamily="18" charset="-127"/>
+            </a:endParaRPr>
+          </a:p>
+          <a:p>
+            <a:pPr>
+              <a:buNone/>
+            </a:pPr>
+            <a:r>
+              <a:rPr lang="en-US" altLang="ko-KR" sz="1600" dirty="0">
+                <a:latin typeface="휴먼모음T" panose="02030504000101010101" pitchFamily="18" charset="-127"/>
+                <a:ea typeface="휴먼모음T" panose="02030504000101010101" pitchFamily="18" charset="-127"/>
+              </a:rPr>
+              <a:t>Python</a:t>
+            </a:r>
+            <a:r>
+              <a:rPr lang="ko-KR" altLang="en-US" sz="1600" dirty="0">
+                <a:latin typeface="휴먼모음T" panose="02030504000101010101" pitchFamily="18" charset="-127"/>
+                <a:ea typeface="휴먼모음T" panose="02030504000101010101" pitchFamily="18" charset="-127"/>
+              </a:rPr>
+              <a:t>의 </a:t>
+            </a:r>
+            <a:r>
+              <a:rPr lang="en-US" altLang="ko-KR" sz="1600" dirty="0">
+                <a:latin typeface="휴먼모음T" panose="02030504000101010101" pitchFamily="18" charset="-127"/>
+                <a:ea typeface="휴먼모음T" panose="02030504000101010101" pitchFamily="18" charset="-127"/>
+              </a:rPr>
+              <a:t>seaborn</a:t>
+            </a:r>
+            <a:r>
+              <a:rPr lang="ko-KR" altLang="en-US" sz="1600" dirty="0">
+                <a:latin typeface="휴먼모음T" panose="02030504000101010101" pitchFamily="18" charset="-127"/>
+                <a:ea typeface="휴먼모음T" panose="02030504000101010101" pitchFamily="18" charset="-127"/>
+              </a:rPr>
+              <a:t> 라이브러리를 이용하여 </a:t>
+            </a:r>
+            <a:r>
+              <a:rPr lang="en-US" altLang="ko-KR" sz="1600" dirty="0">
+                <a:latin typeface="휴먼모음T" panose="02030504000101010101" pitchFamily="18" charset="-127"/>
+                <a:ea typeface="휴먼모음T" panose="02030504000101010101" pitchFamily="18" charset="-127"/>
+              </a:rPr>
+              <a:t>penguins</a:t>
+            </a:r>
+            <a:r>
+              <a:rPr lang="ko-KR" altLang="en-US" sz="1600" dirty="0">
+                <a:latin typeface="휴먼모음T" panose="02030504000101010101" pitchFamily="18" charset="-127"/>
+                <a:ea typeface="휴먼모음T" panose="02030504000101010101" pitchFamily="18" charset="-127"/>
+              </a:rPr>
+              <a:t> 데이터를 불러오고</a:t>
+            </a:r>
+            <a:r>
+              <a:rPr lang="en-US" altLang="ko-KR" sz="1600" dirty="0">
+                <a:latin typeface="휴먼모음T" panose="02030504000101010101" pitchFamily="18" charset="-127"/>
+                <a:ea typeface="휴먼모음T" panose="02030504000101010101" pitchFamily="18" charset="-127"/>
+              </a:rPr>
+              <a:t>, </a:t>
+            </a:r>
+            <a:r>
+              <a:rPr lang="ko-KR" altLang="en-US" sz="1600" dirty="0" err="1">
+                <a:latin typeface="휴먼모음T" panose="02030504000101010101" pitchFamily="18" charset="-127"/>
+                <a:ea typeface="휴먼모음T" panose="02030504000101010101" pitchFamily="18" charset="-127"/>
+              </a:rPr>
+              <a:t>결측치를</a:t>
+            </a:r>
+            <a:r>
+              <a:rPr lang="ko-KR" altLang="en-US" sz="1600" dirty="0">
+                <a:latin typeface="휴먼모음T" panose="02030504000101010101" pitchFamily="18" charset="-127"/>
+                <a:ea typeface="휴먼모음T" panose="02030504000101010101" pitchFamily="18" charset="-127"/>
+              </a:rPr>
+              <a:t> 제거한 후 </a:t>
+            </a:r>
+            <a:r>
+              <a:rPr lang="en-US" altLang="ko-KR" sz="1600" dirty="0">
+                <a:latin typeface="휴먼모음T" panose="02030504000101010101" pitchFamily="18" charset="-127"/>
+                <a:ea typeface="휴먼모음T" panose="02030504000101010101" pitchFamily="18" charset="-127"/>
+              </a:rPr>
+              <a:t>'Gentoo'</a:t>
+            </a:r>
+            <a:r>
+              <a:rPr lang="ko-KR" altLang="en-US" sz="1600" dirty="0">
+                <a:latin typeface="휴먼모음T" panose="02030504000101010101" pitchFamily="18" charset="-127"/>
+                <a:ea typeface="휴먼모음T" panose="02030504000101010101" pitchFamily="18" charset="-127"/>
+              </a:rPr>
+              <a:t> 종의 </a:t>
+            </a:r>
+            <a:r>
+              <a:rPr lang="en-US" altLang="ko-KR" sz="1600" dirty="0">
+                <a:latin typeface="휴먼모음T" panose="02030504000101010101" pitchFamily="18" charset="-127"/>
+                <a:ea typeface="휴먼모음T" panose="02030504000101010101" pitchFamily="18" charset="-127"/>
+              </a:rPr>
+              <a:t>'</a:t>
+            </a:r>
+            <a:r>
+              <a:rPr lang="en-US" altLang="ko-KR" sz="1600" dirty="0" err="1">
+                <a:latin typeface="휴먼모음T" panose="02030504000101010101" pitchFamily="18" charset="-127"/>
+                <a:ea typeface="휴먼모음T" panose="02030504000101010101" pitchFamily="18" charset="-127"/>
+              </a:rPr>
+              <a:t>flipper_length_mm</a:t>
+            </a:r>
+            <a:r>
+              <a:rPr lang="en-US" altLang="ko-KR" sz="1600" dirty="0">
+                <a:latin typeface="휴먼모음T" panose="02030504000101010101" pitchFamily="18" charset="-127"/>
+                <a:ea typeface="휴먼모음T" panose="02030504000101010101" pitchFamily="18" charset="-127"/>
+              </a:rPr>
+              <a:t>' (</a:t>
+            </a:r>
+            <a:r>
+              <a:rPr lang="ko-KR" altLang="en-US" sz="1600" dirty="0">
+                <a:latin typeface="휴먼모음T" panose="02030504000101010101" pitchFamily="18" charset="-127"/>
+                <a:ea typeface="휴먼모음T" panose="02030504000101010101" pitchFamily="18" charset="-127"/>
+              </a:rPr>
+              <a:t>지느러미 길이</a:t>
+            </a:r>
+            <a:r>
+              <a:rPr lang="en-US" altLang="ko-KR" sz="1600" dirty="0">
+                <a:latin typeface="휴먼모음T" panose="02030504000101010101" pitchFamily="18" charset="-127"/>
+                <a:ea typeface="휴먼모음T" panose="02030504000101010101" pitchFamily="18" charset="-127"/>
+              </a:rPr>
+              <a:t>)</a:t>
+            </a:r>
+            <a:r>
+              <a:rPr lang="ko-KR" altLang="en-US" sz="1600" dirty="0">
+                <a:latin typeface="휴먼모음T" panose="02030504000101010101" pitchFamily="18" charset="-127"/>
+                <a:ea typeface="휴먼모음T" panose="02030504000101010101" pitchFamily="18" charset="-127"/>
+              </a:rPr>
+              <a:t> 데이터만을 추출하여 </a:t>
+            </a:r>
+            <a:r>
+              <a:rPr lang="en-US" altLang="ko-KR" sz="1600" dirty="0" err="1">
+                <a:latin typeface="휴먼모음T" panose="02030504000101010101" pitchFamily="18" charset="-127"/>
+                <a:ea typeface="휴먼모음T" panose="02030504000101010101" pitchFamily="18" charset="-127"/>
+              </a:rPr>
+              <a:t>gentoo_flipper</a:t>
+            </a:r>
+            <a:r>
+              <a:rPr lang="ko-KR" altLang="en-US" sz="1600" dirty="0">
+                <a:latin typeface="휴먼모음T" panose="02030504000101010101" pitchFamily="18" charset="-127"/>
+                <a:ea typeface="휴먼모음T" panose="02030504000101010101" pitchFamily="18" charset="-127"/>
+              </a:rPr>
+              <a:t> 변수에 </a:t>
+            </a:r>
+            <a:r>
+              <a:rPr lang="ko-KR" altLang="en-US" sz="1600" dirty="0" err="1">
+                <a:latin typeface="휴먼모음T" panose="02030504000101010101" pitchFamily="18" charset="-127"/>
+                <a:ea typeface="휴먼모음T" panose="02030504000101010101" pitchFamily="18" charset="-127"/>
+              </a:rPr>
+              <a:t>저장하시오</a:t>
+            </a:r>
+            <a:r>
+              <a:rPr lang="en-US" altLang="ko-KR" sz="1600" dirty="0">
+                <a:latin typeface="휴먼모음T" panose="02030504000101010101" pitchFamily="18" charset="-127"/>
+                <a:ea typeface="휴먼모음T" panose="02030504000101010101" pitchFamily="18" charset="-127"/>
+              </a:rPr>
+              <a:t>. </a:t>
+            </a:r>
+            <a:r>
+              <a:rPr lang="ko-KR" altLang="en-US" sz="1600" dirty="0">
+                <a:latin typeface="휴먼모음T" panose="02030504000101010101" pitchFamily="18" charset="-127"/>
+                <a:ea typeface="휴먼모음T" panose="02030504000101010101" pitchFamily="18" charset="-127"/>
+              </a:rPr>
+              <a:t>이후 이 데이터의 전체 평균</a:t>
+            </a:r>
+            <a:r>
+              <a:rPr lang="en-US" altLang="ko-KR" sz="1600" dirty="0">
+                <a:latin typeface="휴먼모음T" panose="02030504000101010101" pitchFamily="18" charset="-127"/>
+                <a:ea typeface="휴먼모음T" panose="02030504000101010101" pitchFamily="18" charset="-127"/>
+              </a:rPr>
+              <a:t>(</a:t>
+            </a:r>
+            <a:r>
+              <a:rPr lang="ko-KR" altLang="en-US" sz="1600" dirty="0">
+                <a:latin typeface="휴먼모음T" panose="02030504000101010101" pitchFamily="18" charset="-127"/>
+                <a:ea typeface="휴먼모음T" panose="02030504000101010101" pitchFamily="18" charset="-127"/>
+              </a:rPr>
+              <a:t>모평균으로 가정</a:t>
+            </a:r>
+            <a:r>
+              <a:rPr lang="en-US" altLang="ko-KR" sz="1600" dirty="0">
+                <a:latin typeface="휴먼모음T" panose="02030504000101010101" pitchFamily="18" charset="-127"/>
+                <a:ea typeface="휴먼모음T" panose="02030504000101010101" pitchFamily="18" charset="-127"/>
+              </a:rPr>
+              <a:t>)</a:t>
+            </a:r>
+            <a:r>
+              <a:rPr lang="ko-KR" altLang="en-US" sz="1600" dirty="0">
+                <a:latin typeface="휴먼모음T" panose="02030504000101010101" pitchFamily="18" charset="-127"/>
+                <a:ea typeface="휴먼모음T" panose="02030504000101010101" pitchFamily="18" charset="-127"/>
+              </a:rPr>
+              <a:t>을 </a:t>
+            </a:r>
+            <a:r>
+              <a:rPr lang="ko-KR" altLang="en-US" sz="1600" dirty="0" err="1">
+                <a:latin typeface="휴먼모음T" panose="02030504000101010101" pitchFamily="18" charset="-127"/>
+                <a:ea typeface="휴먼모음T" panose="02030504000101010101" pitchFamily="18" charset="-127"/>
+              </a:rPr>
+              <a:t>구하시오</a:t>
+            </a:r>
+            <a:r>
+              <a:rPr lang="en-US" altLang="ko-KR" sz="1600" dirty="0">
+                <a:latin typeface="휴먼모음T" panose="02030504000101010101" pitchFamily="18" charset="-127"/>
+                <a:ea typeface="휴먼모음T" panose="02030504000101010101" pitchFamily="18" charset="-127"/>
+              </a:rPr>
+              <a:t>.</a:t>
+            </a:r>
+          </a:p>
+        </p:txBody>
+      </p:sp>
+      <p:sp>
+        <p:nvSpPr>
+          <p:cNvPr id="7" name="Rectangle 2">
+            <a:extLst>
+              <a:ext uri="{FF2B5EF4-FFF2-40B4-BE49-F238E27FC236}">
+                <a16:creationId xmlns:a16="http://schemas.microsoft.com/office/drawing/2014/main" id="{A29A51BF-DD34-1792-CF22-6628F22DDD26}"/>
+              </a:ext>
+            </a:extLst>
+          </p:cNvPr>
+          <p:cNvSpPr>
+            <a:spLocks noChangeArrowheads="1"/>
+          </p:cNvSpPr>
+          <p:nvPr/>
+        </p:nvSpPr>
+        <p:spPr bwMode="auto">
+          <a:xfrm>
+            <a:off x="189756" y="3563135"/>
+            <a:ext cx="9433048" cy="1061829"/>
+          </a:xfrm>
+          <a:prstGeom prst="rect">
+            <a:avLst/>
+          </a:prstGeom>
+          <a:solidFill>
+            <a:schemeClr val="bg1">
+              <a:lumMod val="85000"/>
+            </a:schemeClr>
+          </a:solidFill>
+          <a:ln>
+            <a:noFill/>
+          </a:ln>
+          <a:effectLst/>
+        </p:spPr>
+        <p:txBody>
+          <a:bodyPr vert="horz" wrap="square" lIns="91440" tIns="0" rIns="91440" bIns="45720" numCol="1" anchor="ctr" anchorCtr="0" compatLnSpc="1">
+            <a:prstTxWarp prst="textNoShape">
+              <a:avLst/>
+            </a:prstTxWarp>
+            <a:spAutoFit/>
+          </a:bodyPr>
+          <a:lstStyle/>
+          <a:p>
+            <a:pPr marR="0" lvl="0" indent="0" fontAlgn="base">
+              <a:lnSpc>
+                <a:spcPct val="100000"/>
+              </a:lnSpc>
+              <a:spcBef>
+                <a:spcPct val="0"/>
+              </a:spcBef>
+              <a:spcAft>
+                <a:spcPct val="0"/>
+              </a:spcAft>
+              <a:buClrTx/>
+              <a:buSzTx/>
+              <a:tabLst/>
+            </a:pPr>
+            <a:r>
+              <a:rPr lang="ko-KR" altLang="ko-KR" dirty="0">
+                <a:latin typeface="휴먼모음T" panose="02030504000101010101" pitchFamily="18" charset="-127"/>
+                <a:ea typeface="휴먼모음T" panose="02030504000101010101" pitchFamily="18" charset="-127"/>
+              </a:rPr>
+              <a:t>문제 2. 표본 추출 및 </a:t>
+            </a:r>
+            <a:r>
+              <a:rPr lang="ko-KR" altLang="ko-KR" dirty="0" err="1">
+                <a:latin typeface="휴먼모음T" panose="02030504000101010101" pitchFamily="18" charset="-127"/>
+                <a:ea typeface="휴먼모음T" panose="02030504000101010101" pitchFamily="18" charset="-127"/>
+              </a:rPr>
+              <a:t>점추정</a:t>
+            </a:r>
+            <a:r>
+              <a:rPr lang="ko-KR" altLang="ko-KR" dirty="0">
+                <a:latin typeface="휴먼모음T" panose="02030504000101010101" pitchFamily="18" charset="-127"/>
+                <a:ea typeface="휴먼모음T" panose="02030504000101010101" pitchFamily="18" charset="-127"/>
+              </a:rPr>
+              <a:t> (20점)</a:t>
+            </a:r>
+            <a:endParaRPr lang="en-US" altLang="ko-KR" dirty="0">
+              <a:latin typeface="휴먼모음T" panose="02030504000101010101" pitchFamily="18" charset="-127"/>
+              <a:ea typeface="휴먼모음T" panose="02030504000101010101" pitchFamily="18" charset="-127"/>
+            </a:endParaRPr>
+          </a:p>
+          <a:p>
+            <a:pPr marR="0" lvl="0" indent="0" fontAlgn="base">
+              <a:lnSpc>
+                <a:spcPct val="100000"/>
+              </a:lnSpc>
+              <a:spcBef>
+                <a:spcPct val="0"/>
+              </a:spcBef>
+              <a:spcAft>
+                <a:spcPct val="0"/>
+              </a:spcAft>
+              <a:buClrTx/>
+              <a:buSzTx/>
+              <a:tabLst/>
+            </a:pPr>
+            <a:endParaRPr lang="ko-KR" altLang="ko-KR" sz="1600" dirty="0">
+              <a:latin typeface="휴먼모음T" panose="02030504000101010101" pitchFamily="18" charset="-127"/>
+              <a:ea typeface="휴먼모음T" panose="02030504000101010101" pitchFamily="18" charset="-127"/>
+            </a:endParaRPr>
+          </a:p>
+          <a:p>
+            <a:pPr marR="0" lvl="0" indent="0" fontAlgn="base">
+              <a:lnSpc>
+                <a:spcPct val="100000"/>
+              </a:lnSpc>
+              <a:spcBef>
+                <a:spcPct val="0"/>
+              </a:spcBef>
+              <a:spcAft>
+                <a:spcPct val="0"/>
+              </a:spcAft>
+              <a:buClrTx/>
+              <a:buSzTx/>
+              <a:tabLst/>
+            </a:pPr>
+            <a:r>
+              <a:rPr lang="ko-KR" altLang="ko-KR" sz="1600" dirty="0" err="1">
+                <a:latin typeface="휴먼모음T" panose="02030504000101010101" pitchFamily="18" charset="-127"/>
+                <a:ea typeface="휴먼모음T" panose="02030504000101010101" pitchFamily="18" charset="-127"/>
+              </a:rPr>
+              <a:t>gentoo_flipper</a:t>
+            </a:r>
+            <a:r>
+              <a:rPr lang="ko-KR" altLang="ko-KR" sz="1600" dirty="0">
+                <a:latin typeface="휴먼모음T" panose="02030504000101010101" pitchFamily="18" charset="-127"/>
+                <a:ea typeface="휴먼모음T" panose="02030504000101010101" pitchFamily="18" charset="-127"/>
+              </a:rPr>
+              <a:t> 데이터에서 무작위로 5개의 표본을 추출하여 표본평균을 </a:t>
+            </a:r>
+            <a:r>
+              <a:rPr lang="ko-KR" altLang="ko-KR" sz="1600" dirty="0" err="1">
+                <a:latin typeface="휴먼모음T" panose="02030504000101010101" pitchFamily="18" charset="-127"/>
+                <a:ea typeface="휴먼모음T" panose="02030504000101010101" pitchFamily="18" charset="-127"/>
+              </a:rPr>
+              <a:t>구하시오</a:t>
+            </a:r>
+            <a:r>
+              <a:rPr lang="ko-KR" altLang="ko-KR" sz="1600" dirty="0">
+                <a:latin typeface="휴먼모음T" panose="02030504000101010101" pitchFamily="18" charset="-127"/>
+                <a:ea typeface="휴먼모음T" panose="02030504000101010101" pitchFamily="18" charset="-127"/>
+              </a:rPr>
+              <a:t>. 다시 50개의 표본을 추출하여 표본평균을 </a:t>
+            </a:r>
+            <a:r>
+              <a:rPr lang="ko-KR" altLang="ko-KR" sz="1600" dirty="0" err="1">
+                <a:latin typeface="휴먼모음T" panose="02030504000101010101" pitchFamily="18" charset="-127"/>
+                <a:ea typeface="휴먼모음T" panose="02030504000101010101" pitchFamily="18" charset="-127"/>
+              </a:rPr>
+              <a:t>구하시오</a:t>
+            </a:r>
+            <a:r>
+              <a:rPr lang="ko-KR" altLang="ko-KR" sz="1600" dirty="0">
+                <a:latin typeface="휴먼모음T" panose="02030504000101010101" pitchFamily="18" charset="-127"/>
+                <a:ea typeface="휴먼모음T" panose="02030504000101010101" pitchFamily="18" charset="-127"/>
+              </a:rPr>
+              <a:t>. 두 점추정치 중 어느 것이 모평균에 더 근접한지 비교하고, 그 이유를 </a:t>
+            </a:r>
+            <a:r>
+              <a:rPr lang="ko-KR" altLang="ko-KR" sz="1600" dirty="0" err="1">
+                <a:latin typeface="휴먼모음T" panose="02030504000101010101" pitchFamily="18" charset="-127"/>
+                <a:ea typeface="휴먼모음T" panose="02030504000101010101" pitchFamily="18" charset="-127"/>
+              </a:rPr>
+              <a:t>기술하시오</a:t>
+            </a:r>
+            <a:r>
+              <a:rPr lang="en-US" altLang="ko-KR" sz="1600" dirty="0">
+                <a:latin typeface="휴먼모음T" panose="02030504000101010101" pitchFamily="18" charset="-127"/>
+                <a:ea typeface="휴먼모음T" panose="02030504000101010101" pitchFamily="18" charset="-127"/>
+              </a:rPr>
+              <a:t>.</a:t>
+            </a:r>
+            <a:endParaRPr lang="ko-KR" altLang="ko-KR" sz="1600" dirty="0">
+              <a:latin typeface="휴먼모음T" panose="02030504000101010101" pitchFamily="18" charset="-127"/>
+              <a:ea typeface="휴먼모음T" panose="02030504000101010101" pitchFamily="18" charset="-127"/>
+            </a:endParaRPr>
+          </a:p>
+        </p:txBody>
+      </p:sp>
+    </p:spTree>
+    <p:extLst>
+      <p:ext uri="{BB962C8B-B14F-4D97-AF65-F5344CB8AC3E}">
+        <p14:creationId xmlns:p14="http://schemas.microsoft.com/office/powerpoint/2010/main" val="1893394278"/>
+      </p:ext>
+    </p:extLst>
+  </p:cSld>
+  <p:clrMapOvr>
+    <a:masterClrMapping/>
+  </p:clrMapOvr>
+  <mc:AlternateContent xmlns:mc="http://schemas.openxmlformats.org/markup-compatibility/2006" xmlns:p14="http://schemas.microsoft.com/office/powerpoint/2010/main">
+    <mc:Choice Requires="p14">
+      <p:transition spd="med" p14:dur="700">
+        <p:fade/>
+      </p:transition>
+    </mc:Choice>
+    <mc:Fallback xmlns="">
+      <p:transition spd="med">
+        <p:fade/>
+      </p:transition>
+    </mc:Fallback>
+  </mc:AlternateContent>
+</p:sld>
+</file>
+
+<file path=ppt/slides/slide16.xml><?xml version="1.0" encoding="utf-8"?>
 <p:sld xmlns:a="http://schemas.openxmlformats.org/drawingml/2006/main" xmlns:r="http://schemas.openxmlformats.org/officeDocument/2006/relationships" xmlns:p="http://schemas.openxmlformats.org/presentationml/2006/main">
   <p:cSld>
     <p:spTree>
@@ -5786,7 +7502,7 @@
             <a:pPr rtl="0"/>
             <a:fld id="{A3F31473-23EB-4724-8B59-FE6D21D89FA4}" type="slidenum">
               <a:rPr lang="en-US" altLang="ko-KR" noProof="0" smtClean="0"/>
-              <a:t>12</a:t>
+              <a:t>16</a:t>
             </a:fld>
             <a:endParaRPr lang="en-US" altLang="ko-KR" noProof="0" dirty="0"/>
           </a:p>
@@ -5841,7 +7557,7 @@
 </p:sld>
 </file>
 
-<file path=ppt/slides/slide13.xml><?xml version="1.0" encoding="utf-8"?>
+<file path=ppt/slides/slide17.xml><?xml version="1.0" encoding="utf-8"?>
 <p:sld xmlns:a="http://schemas.openxmlformats.org/drawingml/2006/main" xmlns:r="http://schemas.openxmlformats.org/officeDocument/2006/relationships" xmlns:p="http://schemas.openxmlformats.org/presentationml/2006/main">
   <p:cSld>
     <p:spTree>
@@ -5876,7 +7592,7 @@
             <a:pPr rtl="0"/>
             <a:fld id="{A3F31473-23EB-4724-8B59-FE6D21D89FA4}" type="slidenum">
               <a:rPr lang="en-US" altLang="ko-KR" noProof="0" smtClean="0"/>
-              <a:t>13</a:t>
+              <a:t>17</a:t>
             </a:fld>
             <a:endParaRPr lang="en-US" altLang="ko-KR" noProof="0" dirty="0"/>
           </a:p>
@@ -5884,7 +7600,13 @@
       </p:sp>
       <p:pic>
         <p:nvPicPr>
-          <p:cNvPr id="2" name="그림 1"/>
+          <p:cNvPr id="6" name="그림 5">
+            <a:extLst>
+              <a:ext uri="{FF2B5EF4-FFF2-40B4-BE49-F238E27FC236}">
+                <a16:creationId xmlns:a16="http://schemas.microsoft.com/office/drawing/2014/main" id="{E606BEF1-983A-18E7-B4E7-AC329BEE8481}"/>
+              </a:ext>
+            </a:extLst>
+          </p:cNvPr>
           <p:cNvPicPr>
             <a:picLocks noChangeAspect="1"/>
           </p:cNvPicPr>
@@ -5898,8 +7620,8 @@
         </p:blipFill>
         <p:spPr>
           <a:xfrm>
-            <a:off x="1773932" y="323658"/>
-            <a:ext cx="8971126" cy="6032693"/>
+            <a:off x="2014929" y="305927"/>
+            <a:ext cx="8142425" cy="6246145"/>
           </a:xfrm>
           <a:prstGeom prst="rect">
             <a:avLst/>
@@ -5931,7 +7653,778 @@
 </p:sld>
 </file>
 
-<file path=ppt/slides/slide14.xml><?xml version="1.0" encoding="utf-8"?>
+<file path=ppt/slides/slide18.xml><?xml version="1.0" encoding="utf-8"?>
+<p:sld xmlns:a="http://schemas.openxmlformats.org/drawingml/2006/main" xmlns:r="http://schemas.openxmlformats.org/officeDocument/2006/relationships" xmlns:p="http://schemas.openxmlformats.org/presentationml/2006/main">
+  <p:cSld>
+    <p:spTree>
+      <p:nvGrpSpPr>
+        <p:cNvPr id="1" name="">
+          <a:extLst>
+            <a:ext uri="{FF2B5EF4-FFF2-40B4-BE49-F238E27FC236}">
+              <a16:creationId xmlns:a16="http://schemas.microsoft.com/office/drawing/2014/main" id="{144CFA6D-7BDE-F4CB-ECB4-44A7CEB8F142}"/>
+            </a:ext>
+          </a:extLst>
+        </p:cNvPr>
+        <p:cNvGrpSpPr/>
+        <p:nvPr/>
+      </p:nvGrpSpPr>
+      <p:grpSpPr>
+        <a:xfrm>
+          <a:off x="0" y="0"/>
+          <a:ext cx="0" cy="0"/>
+          <a:chOff x="0" y="0"/>
+          <a:chExt cx="0" cy="0"/>
+        </a:xfrm>
+      </p:grpSpPr>
+      <p:sp>
+        <p:nvSpPr>
+          <p:cNvPr id="8" name="슬라이드 번호 개체 틀 7">
+            <a:extLst>
+              <a:ext uri="{FF2B5EF4-FFF2-40B4-BE49-F238E27FC236}">
+                <a16:creationId xmlns:a16="http://schemas.microsoft.com/office/drawing/2014/main" id="{9613359B-04AB-2B7A-0694-56AD7107F85E}"/>
+              </a:ext>
+            </a:extLst>
+          </p:cNvPr>
+          <p:cNvSpPr>
+            <a:spLocks noGrp="1"/>
+          </p:cNvSpPr>
+          <p:nvPr>
+            <p:ph type="sldNum" sz="quarter" idx="12"/>
+          </p:nvPr>
+        </p:nvSpPr>
+        <p:spPr/>
+        <p:txBody>
+          <a:bodyPr/>
+          <a:lstStyle/>
+          <a:p>
+            <a:pPr rtl="0"/>
+            <a:fld id="{A3F31473-23EB-4724-8B59-FE6D21D89FA4}" type="slidenum">
+              <a:rPr lang="en-US" altLang="ko-KR" noProof="0" smtClean="0"/>
+              <a:t>18</a:t>
+            </a:fld>
+            <a:endParaRPr lang="en-US" altLang="ko-KR" noProof="0" dirty="0"/>
+          </a:p>
+        </p:txBody>
+      </p:sp>
+      <p:sp>
+        <p:nvSpPr>
+          <p:cNvPr id="5" name="TextBox 4">
+            <a:extLst>
+              <a:ext uri="{FF2B5EF4-FFF2-40B4-BE49-F238E27FC236}">
+                <a16:creationId xmlns:a16="http://schemas.microsoft.com/office/drawing/2014/main" id="{293136A9-4ED2-A9C4-59EA-DC5ABFD71B4B}"/>
+              </a:ext>
+            </a:extLst>
+          </p:cNvPr>
+          <p:cNvSpPr txBox="1"/>
+          <p:nvPr/>
+        </p:nvSpPr>
+        <p:spPr>
+          <a:xfrm>
+            <a:off x="117748" y="260648"/>
+            <a:ext cx="2592288" cy="584775"/>
+          </a:xfrm>
+          <a:prstGeom prst="rect">
+            <a:avLst/>
+          </a:prstGeom>
+          <a:noFill/>
+        </p:spPr>
+        <p:txBody>
+          <a:bodyPr wrap="square" rtlCol="0">
+            <a:spAutoFit/>
+          </a:bodyPr>
+          <a:lstStyle/>
+          <a:p>
+            <a:r>
+              <a:rPr lang="ko-KR" altLang="en-US" sz="3200" b="1"/>
+              <a:t>문제 풀이</a:t>
+            </a:r>
+          </a:p>
+        </p:txBody>
+      </p:sp>
+      <p:sp>
+        <p:nvSpPr>
+          <p:cNvPr id="2" name="Rectangle 1">
+            <a:extLst>
+              <a:ext uri="{FF2B5EF4-FFF2-40B4-BE49-F238E27FC236}">
+                <a16:creationId xmlns:a16="http://schemas.microsoft.com/office/drawing/2014/main" id="{E47FC9AE-9BFA-3C11-A9C0-7DCCB2B04601}"/>
+              </a:ext>
+            </a:extLst>
+          </p:cNvPr>
+          <p:cNvSpPr>
+            <a:spLocks noChangeArrowheads="1"/>
+          </p:cNvSpPr>
+          <p:nvPr/>
+        </p:nvSpPr>
+        <p:spPr bwMode="auto">
+          <a:xfrm>
+            <a:off x="306607" y="1140713"/>
+            <a:ext cx="11404427" cy="2169825"/>
+          </a:xfrm>
+          <a:prstGeom prst="rect">
+            <a:avLst/>
+          </a:prstGeom>
+          <a:solidFill>
+            <a:schemeClr val="bg1">
+              <a:lumMod val="85000"/>
+            </a:schemeClr>
+          </a:solidFill>
+          <a:ln>
+            <a:noFill/>
+          </a:ln>
+          <a:effectLst/>
+        </p:spPr>
+        <p:txBody>
+          <a:bodyPr vert="horz" wrap="square" lIns="91440" tIns="0" rIns="91440" bIns="45720" numCol="1" anchor="ctr" anchorCtr="0" compatLnSpc="1">
+            <a:prstTxWarp prst="textNoShape">
+              <a:avLst/>
+            </a:prstTxWarp>
+            <a:spAutoFit/>
+          </a:bodyPr>
+          <a:lstStyle/>
+          <a:p>
+            <a:pPr marL="0" marR="0" lvl="0" indent="0" algn="l" defTabSz="914400" rtl="0" eaLnBrk="0" fontAlgn="base" latinLnBrk="0" hangingPunct="0">
+              <a:lnSpc>
+                <a:spcPct val="100000"/>
+              </a:lnSpc>
+              <a:spcBef>
+                <a:spcPct val="0"/>
+              </a:spcBef>
+              <a:spcAft>
+                <a:spcPct val="0"/>
+              </a:spcAft>
+              <a:buClrTx/>
+              <a:buSzTx/>
+              <a:buFontTx/>
+              <a:buNone/>
+              <a:tabLst/>
+            </a:pPr>
+            <a:r>
+              <a:rPr lang="ko-KR" altLang="ko-KR" dirty="0">
+                <a:latin typeface="휴먼모음T" panose="02030504000101010101" pitchFamily="18" charset="-127"/>
+                <a:ea typeface="휴먼모음T" panose="02030504000101010101" pitchFamily="18" charset="-127"/>
+              </a:rPr>
+              <a:t>문제 3. </a:t>
+            </a:r>
+            <a:r>
+              <a:rPr lang="ko-KR" altLang="ko-KR" dirty="0" err="1">
+                <a:latin typeface="휴먼모음T" panose="02030504000101010101" pitchFamily="18" charset="-127"/>
+                <a:ea typeface="휴먼모음T" panose="02030504000101010101" pitchFamily="18" charset="-127"/>
+              </a:rPr>
+              <a:t>t</a:t>
+            </a:r>
+            <a:r>
+              <a:rPr lang="ko-KR" altLang="ko-KR" dirty="0">
+                <a:latin typeface="휴먼모음T" panose="02030504000101010101" pitchFamily="18" charset="-127"/>
+                <a:ea typeface="휴먼모음T" panose="02030504000101010101" pitchFamily="18" charset="-127"/>
+              </a:rPr>
+              <a:t>-분포를 이용한 신뢰구간 계산 (40점)</a:t>
+            </a:r>
+            <a:endParaRPr lang="en-US" altLang="ko-KR" dirty="0">
+              <a:latin typeface="휴먼모음T" panose="02030504000101010101" pitchFamily="18" charset="-127"/>
+              <a:ea typeface="휴먼모음T" panose="02030504000101010101" pitchFamily="18" charset="-127"/>
+            </a:endParaRPr>
+          </a:p>
+          <a:p>
+            <a:pPr marL="0" marR="0" lvl="0" indent="0" algn="l" defTabSz="914400" rtl="0" eaLnBrk="0" fontAlgn="base" latinLnBrk="0" hangingPunct="0">
+              <a:lnSpc>
+                <a:spcPct val="100000"/>
+              </a:lnSpc>
+              <a:spcBef>
+                <a:spcPct val="0"/>
+              </a:spcBef>
+              <a:spcAft>
+                <a:spcPct val="0"/>
+              </a:spcAft>
+              <a:buClrTx/>
+              <a:buSzTx/>
+              <a:buFontTx/>
+              <a:buNone/>
+              <a:tabLst/>
+            </a:pPr>
+            <a:endParaRPr lang="ko-KR" altLang="ko-KR" dirty="0">
+              <a:latin typeface="휴먼모음T" panose="02030504000101010101" pitchFamily="18" charset="-127"/>
+              <a:ea typeface="휴먼모음T" panose="02030504000101010101" pitchFamily="18" charset="-127"/>
+            </a:endParaRPr>
+          </a:p>
+          <a:p>
+            <a:pPr marL="0" marR="0" lvl="0" indent="0" algn="l" defTabSz="914400" rtl="0" eaLnBrk="0" fontAlgn="base" latinLnBrk="0" hangingPunct="0">
+              <a:lnSpc>
+                <a:spcPct val="100000"/>
+              </a:lnSpc>
+              <a:spcBef>
+                <a:spcPct val="0"/>
+              </a:spcBef>
+              <a:spcAft>
+                <a:spcPct val="0"/>
+              </a:spcAft>
+              <a:buClrTx/>
+              <a:buSzTx/>
+              <a:buFontTx/>
+              <a:buNone/>
+              <a:tabLst/>
+            </a:pPr>
+            <a:r>
+              <a:rPr lang="ko-KR" altLang="ko-KR" dirty="0">
+                <a:latin typeface="휴먼모음T" panose="02030504000101010101" pitchFamily="18" charset="-127"/>
+                <a:ea typeface="휴먼모음T" panose="02030504000101010101" pitchFamily="18" charset="-127"/>
+              </a:rPr>
+              <a:t>'</a:t>
+            </a:r>
+            <a:r>
+              <a:rPr lang="ko-KR" altLang="ko-KR" dirty="0" err="1">
+                <a:latin typeface="휴먼모음T" panose="02030504000101010101" pitchFamily="18" charset="-127"/>
+                <a:ea typeface="휴먼모음T" panose="02030504000101010101" pitchFamily="18" charset="-127"/>
+              </a:rPr>
+              <a:t>Gentoo</a:t>
+            </a:r>
+            <a:r>
+              <a:rPr lang="ko-KR" altLang="ko-KR" dirty="0">
+                <a:latin typeface="휴먼모음T" panose="02030504000101010101" pitchFamily="18" charset="-127"/>
+                <a:ea typeface="휴먼모음T" panose="02030504000101010101" pitchFamily="18" charset="-127"/>
+              </a:rPr>
+              <a:t>' 펭귄 중 무작위로 추출된 15마리의 지느러미 길이 데이터</a:t>
+            </a:r>
+            <a:r>
+              <a:rPr lang="ko-KR" altLang="en-US" dirty="0">
+                <a:latin typeface="휴먼모음T" panose="02030504000101010101" pitchFamily="18" charset="-127"/>
+                <a:ea typeface="휴먼모음T" panose="02030504000101010101" pitchFamily="18" charset="-127"/>
+              </a:rPr>
+              <a:t>를</a:t>
+            </a:r>
+            <a:r>
+              <a:rPr lang="en-US" altLang="ko-KR" dirty="0">
+                <a:latin typeface="휴먼모음T" panose="02030504000101010101" pitchFamily="18" charset="-127"/>
+                <a:ea typeface="휴먼모음T" panose="02030504000101010101" pitchFamily="18" charset="-127"/>
+              </a:rPr>
+              <a:t> </a:t>
+            </a:r>
+            <a:r>
+              <a:rPr lang="en-US" altLang="ko-KR" dirty="0" err="1">
+                <a:latin typeface="휴먼모음T" panose="02030504000101010101" pitchFamily="18" charset="-127"/>
+                <a:ea typeface="휴먼모음T" panose="02030504000101010101" pitchFamily="18" charset="-127"/>
+              </a:rPr>
+              <a:t>random_state</a:t>
+            </a:r>
+            <a:r>
+              <a:rPr lang="en-US" altLang="ko-KR" dirty="0">
+                <a:latin typeface="휴먼모음T" panose="02030504000101010101" pitchFamily="18" charset="-127"/>
+                <a:ea typeface="휴먼모음T" panose="02030504000101010101" pitchFamily="18" charset="-127"/>
+              </a:rPr>
+              <a:t> =11</a:t>
+            </a:r>
+            <a:r>
+              <a:rPr lang="ko-KR" altLang="en-US" dirty="0">
+                <a:latin typeface="휴먼모음T" panose="02030504000101010101" pitchFamily="18" charset="-127"/>
+                <a:ea typeface="휴먼모음T" panose="02030504000101010101" pitchFamily="18" charset="-127"/>
+              </a:rPr>
+              <a:t>로</a:t>
+            </a:r>
+            <a:r>
+              <a:rPr lang="en-US" altLang="ko-KR" dirty="0">
+                <a:latin typeface="휴먼모음T" panose="02030504000101010101" pitchFamily="18" charset="-127"/>
+                <a:ea typeface="휴먼모음T" panose="02030504000101010101" pitchFamily="18" charset="-127"/>
+              </a:rPr>
+              <a:t> </a:t>
+            </a:r>
+            <a:r>
+              <a:rPr lang="ko-KR" altLang="en-US" dirty="0">
+                <a:latin typeface="휴먼모음T" panose="02030504000101010101" pitchFamily="18" charset="-127"/>
+                <a:ea typeface="휴먼모음T" panose="02030504000101010101" pitchFamily="18" charset="-127"/>
+              </a:rPr>
+              <a:t>추출한 </a:t>
+            </a:r>
+            <a:r>
+              <a:rPr lang="ko-KR" altLang="ko-KR" dirty="0">
+                <a:latin typeface="휴먼모음T" panose="02030504000101010101" pitchFamily="18" charset="-127"/>
+                <a:ea typeface="휴먼모음T" panose="02030504000101010101" pitchFamily="18" charset="-127"/>
+              </a:rPr>
+              <a:t>데이터를 바탕으로 다음을 </a:t>
+            </a:r>
+            <a:r>
+              <a:rPr lang="ko-KR" altLang="ko-KR" dirty="0" err="1">
+                <a:latin typeface="휴먼모음T" panose="02030504000101010101" pitchFamily="18" charset="-127"/>
+                <a:ea typeface="휴먼모음T" panose="02030504000101010101" pitchFamily="18" charset="-127"/>
+              </a:rPr>
+              <a:t>계산하시오</a:t>
+            </a:r>
+            <a:r>
+              <a:rPr lang="ko-KR" altLang="ko-KR" dirty="0">
+                <a:latin typeface="휴먼모음T" panose="02030504000101010101" pitchFamily="18" charset="-127"/>
+                <a:ea typeface="휴먼모음T" panose="02030504000101010101" pitchFamily="18" charset="-127"/>
+              </a:rPr>
+              <a:t>. (소수점 둘째 자리까지 표기)</a:t>
+            </a:r>
+            <a:endParaRPr lang="en-US" altLang="ko-KR" dirty="0">
+              <a:latin typeface="휴먼모음T" panose="02030504000101010101" pitchFamily="18" charset="-127"/>
+              <a:ea typeface="휴먼모음T" panose="02030504000101010101" pitchFamily="18" charset="-127"/>
+            </a:endParaRPr>
+          </a:p>
+          <a:p>
+            <a:pPr marL="0" marR="0" lvl="0" indent="0" algn="l" defTabSz="914400" rtl="0" eaLnBrk="0" fontAlgn="base" latinLnBrk="0" hangingPunct="0">
+              <a:lnSpc>
+                <a:spcPct val="100000"/>
+              </a:lnSpc>
+              <a:spcBef>
+                <a:spcPct val="0"/>
+              </a:spcBef>
+              <a:spcAft>
+                <a:spcPct val="0"/>
+              </a:spcAft>
+              <a:buClrTx/>
+              <a:buSzTx/>
+              <a:buFontTx/>
+              <a:buNone/>
+              <a:tabLst/>
+            </a:pPr>
+            <a:endParaRPr lang="ko-KR" altLang="ko-KR" dirty="0">
+              <a:latin typeface="휴먼모음T" panose="02030504000101010101" pitchFamily="18" charset="-127"/>
+              <a:ea typeface="휴먼모음T" panose="02030504000101010101" pitchFamily="18" charset="-127"/>
+            </a:endParaRPr>
+          </a:p>
+          <a:p>
+            <a:pPr marL="800100" lvl="1" indent="-342900" eaLnBrk="0" fontAlgn="base" hangingPunct="0">
+              <a:spcBef>
+                <a:spcPct val="0"/>
+              </a:spcBef>
+              <a:spcAft>
+                <a:spcPct val="0"/>
+              </a:spcAft>
+              <a:buFont typeface="+mj-lt"/>
+              <a:buAutoNum type="arabicPeriod"/>
+            </a:pPr>
+            <a:r>
+              <a:rPr lang="ko-KR" altLang="ko-KR" sz="1600" dirty="0">
+                <a:latin typeface="휴먼모음T" panose="02030504000101010101" pitchFamily="18" charset="-127"/>
+                <a:ea typeface="휴먼모음T" panose="02030504000101010101" pitchFamily="18" charset="-127"/>
+              </a:rPr>
+              <a:t>표본평균과 표본</a:t>
+            </a:r>
+            <a:r>
+              <a:rPr lang="en-US" altLang="ko-KR" sz="1600" dirty="0">
+                <a:latin typeface="휴먼모음T" panose="02030504000101010101" pitchFamily="18" charset="-127"/>
+                <a:ea typeface="휴먼모음T" panose="02030504000101010101" pitchFamily="18" charset="-127"/>
+              </a:rPr>
+              <a:t> </a:t>
+            </a:r>
+            <a:r>
+              <a:rPr lang="ko-KR" altLang="ko-KR" sz="1600" dirty="0">
+                <a:latin typeface="휴먼모음T" panose="02030504000101010101" pitchFamily="18" charset="-127"/>
+                <a:ea typeface="휴먼모음T" panose="02030504000101010101" pitchFamily="18" charset="-127"/>
+              </a:rPr>
+              <a:t>표준편차</a:t>
+            </a:r>
+          </a:p>
+          <a:p>
+            <a:pPr marL="800100" lvl="1" indent="-342900" eaLnBrk="0" fontAlgn="base" hangingPunct="0">
+              <a:spcBef>
+                <a:spcPct val="0"/>
+              </a:spcBef>
+              <a:spcAft>
+                <a:spcPct val="0"/>
+              </a:spcAft>
+              <a:buFont typeface="+mj-lt"/>
+              <a:buAutoNum type="arabicPeriod"/>
+            </a:pPr>
+            <a:r>
+              <a:rPr lang="ko-KR" altLang="ko-KR" sz="1600" dirty="0">
+                <a:latin typeface="휴먼모음T" panose="02030504000101010101" pitchFamily="18" charset="-127"/>
+                <a:ea typeface="휴먼모음T" panose="02030504000101010101" pitchFamily="18" charset="-127"/>
+              </a:rPr>
+              <a:t>95% 신뢰수준에서의 신뢰구간 (단, </a:t>
+            </a:r>
+            <a:r>
+              <a:rPr lang="ko-KR" altLang="ko-KR" sz="1600" dirty="0" err="1">
+                <a:latin typeface="휴먼모음T" panose="02030504000101010101" pitchFamily="18" charset="-127"/>
+                <a:ea typeface="휴먼모음T" panose="02030504000101010101" pitchFamily="18" charset="-127"/>
+              </a:rPr>
+              <a:t>scipy.stats를</a:t>
+            </a:r>
+            <a:r>
+              <a:rPr lang="ko-KR" altLang="ko-KR" sz="1600" dirty="0">
+                <a:latin typeface="휴먼모음T" panose="02030504000101010101" pitchFamily="18" charset="-127"/>
+                <a:ea typeface="휴먼모음T" panose="02030504000101010101" pitchFamily="18" charset="-127"/>
+              </a:rPr>
+              <a:t> 활용할 것)</a:t>
+            </a:r>
+            <a:endParaRPr lang="en-US" altLang="ko-KR" sz="1600" dirty="0">
+              <a:latin typeface="휴먼모음T" panose="02030504000101010101" pitchFamily="18" charset="-127"/>
+              <a:ea typeface="휴먼모음T" panose="02030504000101010101" pitchFamily="18" charset="-127"/>
+            </a:endParaRPr>
+          </a:p>
+          <a:p>
+            <a:pPr marL="800100" lvl="1" indent="-342900" eaLnBrk="0" fontAlgn="base" hangingPunct="0">
+              <a:spcBef>
+                <a:spcPct val="0"/>
+              </a:spcBef>
+              <a:spcAft>
+                <a:spcPct val="0"/>
+              </a:spcAft>
+              <a:buFont typeface="+mj-lt"/>
+              <a:buAutoNum type="arabicPeriod"/>
+            </a:pPr>
+            <a:r>
+              <a:rPr lang="ko-KR" altLang="ko-KR" sz="1600" dirty="0">
+                <a:latin typeface="휴먼모음T" panose="02030504000101010101" pitchFamily="18" charset="-127"/>
+                <a:ea typeface="휴먼모음T" panose="02030504000101010101" pitchFamily="18" charset="-127"/>
+              </a:rPr>
+              <a:t>만약 동일한 데이터로 99% 신뢰구간을 구한다면, 95% 때보다 구간의 너비(</a:t>
+            </a:r>
+            <a:r>
+              <a:rPr lang="ko-KR" altLang="ko-KR" sz="1600" dirty="0" err="1">
+                <a:latin typeface="휴먼모음T" panose="02030504000101010101" pitchFamily="18" charset="-127"/>
+                <a:ea typeface="휴먼모음T" panose="02030504000101010101" pitchFamily="18" charset="-127"/>
+              </a:rPr>
+              <a:t>Width</a:t>
+            </a:r>
+            <a:r>
+              <a:rPr lang="ko-KR" altLang="ko-KR" sz="1600" dirty="0">
+                <a:latin typeface="휴먼모음T" panose="02030504000101010101" pitchFamily="18" charset="-127"/>
+                <a:ea typeface="휴먼모음T" panose="02030504000101010101" pitchFamily="18" charset="-127"/>
+              </a:rPr>
+              <a:t>)는 어떻게 변하겠는가?</a:t>
+            </a:r>
+          </a:p>
+        </p:txBody>
+      </p:sp>
+      <p:sp>
+        <p:nvSpPr>
+          <p:cNvPr id="4" name="TextBox 3">
+            <a:extLst>
+              <a:ext uri="{FF2B5EF4-FFF2-40B4-BE49-F238E27FC236}">
+                <a16:creationId xmlns:a16="http://schemas.microsoft.com/office/drawing/2014/main" id="{AFB9812D-4BDB-71D7-0078-C7761D0F87A7}"/>
+              </a:ext>
+            </a:extLst>
+          </p:cNvPr>
+          <p:cNvSpPr txBox="1"/>
+          <p:nvPr/>
+        </p:nvSpPr>
+        <p:spPr>
+          <a:xfrm>
+            <a:off x="306608" y="3861048"/>
+            <a:ext cx="11404427" cy="1969770"/>
+          </a:xfrm>
+          <a:prstGeom prst="rect">
+            <a:avLst/>
+          </a:prstGeom>
+          <a:solidFill>
+            <a:schemeClr val="bg1">
+              <a:lumMod val="85000"/>
+            </a:schemeClr>
+          </a:solidFill>
+        </p:spPr>
+        <p:txBody>
+          <a:bodyPr wrap="square">
+            <a:spAutoFit/>
+          </a:bodyPr>
+          <a:lstStyle/>
+          <a:p>
+            <a:pPr lvl="0" eaLnBrk="0" fontAlgn="base" hangingPunct="0">
+              <a:spcBef>
+                <a:spcPct val="0"/>
+              </a:spcBef>
+              <a:spcAft>
+                <a:spcPct val="0"/>
+              </a:spcAft>
+            </a:pPr>
+            <a:r>
+              <a:rPr lang="ko-KR" altLang="ko-KR" dirty="0">
+                <a:latin typeface="휴먼모음T" panose="02030504000101010101" pitchFamily="18" charset="-127"/>
+                <a:ea typeface="휴먼모음T" panose="02030504000101010101" pitchFamily="18" charset="-127"/>
+              </a:rPr>
+              <a:t>문제 </a:t>
+            </a:r>
+            <a:r>
+              <a:rPr lang="en-US" altLang="ko-KR" dirty="0">
+                <a:latin typeface="휴먼모음T" panose="02030504000101010101" pitchFamily="18" charset="-127"/>
+                <a:ea typeface="휴먼모음T" panose="02030504000101010101" pitchFamily="18" charset="-127"/>
+              </a:rPr>
+              <a:t>4</a:t>
+            </a:r>
+            <a:r>
+              <a:rPr lang="ko-KR" altLang="ko-KR" dirty="0">
+                <a:latin typeface="휴먼모음T" panose="02030504000101010101" pitchFamily="18" charset="-127"/>
+                <a:ea typeface="휴먼모음T" panose="02030504000101010101" pitchFamily="18" charset="-127"/>
+              </a:rPr>
+              <a:t>. </a:t>
+            </a:r>
+            <a:r>
+              <a:rPr lang="en-US" altLang="ko-KR" dirty="0">
+                <a:latin typeface="휴먼모음T" panose="02030504000101010101" pitchFamily="18" charset="-127"/>
+                <a:ea typeface="휴먼모음T" panose="02030504000101010101" pitchFamily="18" charset="-127"/>
+              </a:rPr>
+              <a:t>Z</a:t>
+            </a:r>
+            <a:r>
+              <a:rPr lang="ko-KR" altLang="ko-KR" dirty="0">
+                <a:latin typeface="휴먼모음T" panose="02030504000101010101" pitchFamily="18" charset="-127"/>
+                <a:ea typeface="휴먼모음T" panose="02030504000101010101" pitchFamily="18" charset="-127"/>
+              </a:rPr>
+              <a:t>-분포를 이용한 신뢰구간 계산 (</a:t>
+            </a:r>
+            <a:r>
+              <a:rPr lang="en-US" altLang="ko-KR" dirty="0">
+                <a:latin typeface="휴먼모음T" panose="02030504000101010101" pitchFamily="18" charset="-127"/>
+                <a:ea typeface="휴먼모음T" panose="02030504000101010101" pitchFamily="18" charset="-127"/>
+              </a:rPr>
+              <a:t>3</a:t>
+            </a:r>
+            <a:r>
+              <a:rPr lang="ko-KR" altLang="ko-KR" dirty="0">
+                <a:latin typeface="휴먼모음T" panose="02030504000101010101" pitchFamily="18" charset="-127"/>
+                <a:ea typeface="휴먼모음T" panose="02030504000101010101" pitchFamily="18" charset="-127"/>
+              </a:rPr>
+              <a:t>0점)</a:t>
+            </a:r>
+            <a:endParaRPr lang="en-US" altLang="ko-KR" dirty="0">
+              <a:latin typeface="휴먼모음T" panose="02030504000101010101" pitchFamily="18" charset="-127"/>
+              <a:ea typeface="휴먼모음T" panose="02030504000101010101" pitchFamily="18" charset="-127"/>
+            </a:endParaRPr>
+          </a:p>
+          <a:p>
+            <a:pPr lvl="0" eaLnBrk="0" fontAlgn="base" hangingPunct="0">
+              <a:spcBef>
+                <a:spcPct val="0"/>
+              </a:spcBef>
+              <a:spcAft>
+                <a:spcPct val="0"/>
+              </a:spcAft>
+            </a:pPr>
+            <a:endParaRPr lang="ko-KR" altLang="ko-KR" dirty="0">
+              <a:latin typeface="휴먼모음T" panose="02030504000101010101" pitchFamily="18" charset="-127"/>
+              <a:ea typeface="휴먼모음T" panose="02030504000101010101" pitchFamily="18" charset="-127"/>
+            </a:endParaRPr>
+          </a:p>
+          <a:p>
+            <a:pPr lvl="0" eaLnBrk="0" fontAlgn="base" hangingPunct="0">
+              <a:spcBef>
+                <a:spcPct val="0"/>
+              </a:spcBef>
+              <a:spcAft>
+                <a:spcPct val="0"/>
+              </a:spcAft>
+            </a:pPr>
+            <a:r>
+              <a:rPr lang="ko-KR" altLang="ko-KR" dirty="0">
+                <a:latin typeface="휴먼모음T" panose="02030504000101010101" pitchFamily="18" charset="-127"/>
+                <a:ea typeface="휴먼모음T" panose="02030504000101010101" pitchFamily="18" charset="-127"/>
+              </a:rPr>
+              <a:t>'</a:t>
+            </a:r>
+            <a:r>
+              <a:rPr lang="ko-KR" altLang="ko-KR" dirty="0" err="1">
+                <a:latin typeface="휴먼모음T" panose="02030504000101010101" pitchFamily="18" charset="-127"/>
+                <a:ea typeface="휴먼모음T" panose="02030504000101010101" pitchFamily="18" charset="-127"/>
+              </a:rPr>
+              <a:t>Gentoo</a:t>
+            </a:r>
+            <a:r>
+              <a:rPr lang="ko-KR" altLang="ko-KR" dirty="0">
+                <a:latin typeface="휴먼모음T" panose="02030504000101010101" pitchFamily="18" charset="-127"/>
+                <a:ea typeface="휴먼모음T" panose="02030504000101010101" pitchFamily="18" charset="-127"/>
+              </a:rPr>
+              <a:t>' 펭귄 중 무작위로 추출된 15마리의 지느러미 길이 데이터</a:t>
+            </a:r>
+            <a:r>
+              <a:rPr lang="ko-KR" altLang="en-US" dirty="0">
+                <a:latin typeface="휴먼모음T" panose="02030504000101010101" pitchFamily="18" charset="-127"/>
+                <a:ea typeface="휴먼모음T" panose="02030504000101010101" pitchFamily="18" charset="-127"/>
+              </a:rPr>
+              <a:t>를</a:t>
+            </a:r>
+            <a:r>
+              <a:rPr lang="en-US" altLang="ko-KR" dirty="0">
+                <a:latin typeface="휴먼모음T" panose="02030504000101010101" pitchFamily="18" charset="-127"/>
+                <a:ea typeface="휴먼모음T" panose="02030504000101010101" pitchFamily="18" charset="-127"/>
+              </a:rPr>
+              <a:t> </a:t>
+            </a:r>
+            <a:r>
+              <a:rPr lang="en-US" altLang="ko-KR" dirty="0" err="1">
+                <a:latin typeface="휴먼모음T" panose="02030504000101010101" pitchFamily="18" charset="-127"/>
+                <a:ea typeface="휴먼모음T" panose="02030504000101010101" pitchFamily="18" charset="-127"/>
+              </a:rPr>
+              <a:t>random_state</a:t>
+            </a:r>
+            <a:r>
+              <a:rPr lang="en-US" altLang="ko-KR" dirty="0">
+                <a:latin typeface="휴먼모음T" panose="02030504000101010101" pitchFamily="18" charset="-127"/>
+                <a:ea typeface="휴먼모음T" panose="02030504000101010101" pitchFamily="18" charset="-127"/>
+              </a:rPr>
+              <a:t> =11</a:t>
+            </a:r>
+            <a:r>
+              <a:rPr lang="ko-KR" altLang="en-US" dirty="0">
+                <a:latin typeface="휴먼모음T" panose="02030504000101010101" pitchFamily="18" charset="-127"/>
+                <a:ea typeface="휴먼모음T" panose="02030504000101010101" pitchFamily="18" charset="-127"/>
+              </a:rPr>
+              <a:t>로</a:t>
+            </a:r>
+            <a:r>
+              <a:rPr lang="en-US" altLang="ko-KR" dirty="0">
+                <a:latin typeface="휴먼모음T" panose="02030504000101010101" pitchFamily="18" charset="-127"/>
+                <a:ea typeface="휴먼모음T" panose="02030504000101010101" pitchFamily="18" charset="-127"/>
+              </a:rPr>
+              <a:t> </a:t>
+            </a:r>
+            <a:r>
+              <a:rPr lang="ko-KR" altLang="en-US" dirty="0">
+                <a:latin typeface="휴먼모음T" panose="02030504000101010101" pitchFamily="18" charset="-127"/>
+                <a:ea typeface="휴먼모음T" panose="02030504000101010101" pitchFamily="18" charset="-127"/>
+              </a:rPr>
+              <a:t>추출한 </a:t>
+            </a:r>
+            <a:r>
+              <a:rPr lang="ko-KR" altLang="ko-KR" dirty="0">
+                <a:latin typeface="휴먼모음T" panose="02030504000101010101" pitchFamily="18" charset="-127"/>
+                <a:ea typeface="휴먼모음T" panose="02030504000101010101" pitchFamily="18" charset="-127"/>
+              </a:rPr>
+              <a:t>데이터를 바탕으로 다음을 </a:t>
+            </a:r>
+            <a:r>
+              <a:rPr lang="ko-KR" altLang="ko-KR" dirty="0" err="1">
+                <a:latin typeface="휴먼모음T" panose="02030504000101010101" pitchFamily="18" charset="-127"/>
+                <a:ea typeface="휴먼모음T" panose="02030504000101010101" pitchFamily="18" charset="-127"/>
+              </a:rPr>
+              <a:t>계산하시오</a:t>
+            </a:r>
+            <a:r>
+              <a:rPr lang="ko-KR" altLang="ko-KR" dirty="0">
+                <a:latin typeface="휴먼모음T" panose="02030504000101010101" pitchFamily="18" charset="-127"/>
+                <a:ea typeface="휴먼모음T" panose="02030504000101010101" pitchFamily="18" charset="-127"/>
+              </a:rPr>
+              <a:t>. (소수점 둘째 자리까지 표기)</a:t>
+            </a:r>
+            <a:endParaRPr lang="en-US" altLang="ko-KR" dirty="0">
+              <a:latin typeface="휴먼모음T" panose="02030504000101010101" pitchFamily="18" charset="-127"/>
+              <a:ea typeface="휴먼모음T" panose="02030504000101010101" pitchFamily="18" charset="-127"/>
+            </a:endParaRPr>
+          </a:p>
+          <a:p>
+            <a:pPr lvl="0" eaLnBrk="0" fontAlgn="base" hangingPunct="0">
+              <a:spcBef>
+                <a:spcPct val="0"/>
+              </a:spcBef>
+              <a:spcAft>
+                <a:spcPct val="0"/>
+              </a:spcAft>
+            </a:pPr>
+            <a:endParaRPr lang="ko-KR" altLang="ko-KR" dirty="0">
+              <a:latin typeface="휴먼모음T" panose="02030504000101010101" pitchFamily="18" charset="-127"/>
+              <a:ea typeface="휴먼모음T" panose="02030504000101010101" pitchFamily="18" charset="-127"/>
+            </a:endParaRPr>
+          </a:p>
+          <a:p>
+            <a:pPr marL="800100" lvl="1" indent="-342900" eaLnBrk="0" fontAlgn="base" hangingPunct="0">
+              <a:spcBef>
+                <a:spcPct val="0"/>
+              </a:spcBef>
+              <a:spcAft>
+                <a:spcPct val="0"/>
+              </a:spcAft>
+              <a:buFont typeface="+mj-lt"/>
+              <a:buAutoNum type="arabicPeriod"/>
+            </a:pPr>
+            <a:r>
+              <a:rPr lang="ko-KR" altLang="ko-KR" sz="1600" dirty="0">
+                <a:latin typeface="휴먼모음T" panose="02030504000101010101" pitchFamily="18" charset="-127"/>
+                <a:ea typeface="휴먼모음T" panose="02030504000101010101" pitchFamily="18" charset="-127"/>
+              </a:rPr>
+              <a:t>9</a:t>
+            </a:r>
+            <a:r>
+              <a:rPr lang="en-US" altLang="ko-KR" sz="1600" dirty="0">
+                <a:latin typeface="휴먼모음T" panose="02030504000101010101" pitchFamily="18" charset="-127"/>
+                <a:ea typeface="휴먼모음T" panose="02030504000101010101" pitchFamily="18" charset="-127"/>
+              </a:rPr>
+              <a:t>5</a:t>
+            </a:r>
+            <a:r>
+              <a:rPr lang="ko-KR" altLang="ko-KR" sz="1600" dirty="0">
+                <a:latin typeface="휴먼모음T" panose="02030504000101010101" pitchFamily="18" charset="-127"/>
+                <a:ea typeface="휴먼모음T" panose="02030504000101010101" pitchFamily="18" charset="-127"/>
+              </a:rPr>
+              <a:t>% 신뢰수준에서의 신뢰구간 (단, </a:t>
+            </a:r>
+            <a:r>
+              <a:rPr lang="ko-KR" altLang="ko-KR" sz="1600" dirty="0" err="1">
+                <a:latin typeface="휴먼모음T" panose="02030504000101010101" pitchFamily="18" charset="-127"/>
+                <a:ea typeface="휴먼모음T" panose="02030504000101010101" pitchFamily="18" charset="-127"/>
+              </a:rPr>
+              <a:t>scipy.stats를</a:t>
+            </a:r>
+            <a:r>
+              <a:rPr lang="ko-KR" altLang="ko-KR" sz="1600" dirty="0">
+                <a:latin typeface="휴먼모음T" panose="02030504000101010101" pitchFamily="18" charset="-127"/>
+                <a:ea typeface="휴먼모음T" panose="02030504000101010101" pitchFamily="18" charset="-127"/>
+              </a:rPr>
+              <a:t> 활용할 것)</a:t>
+            </a:r>
+            <a:endParaRPr lang="en-US" altLang="ko-KR" sz="1600" dirty="0">
+              <a:latin typeface="휴먼모음T" panose="02030504000101010101" pitchFamily="18" charset="-127"/>
+              <a:ea typeface="휴먼모음T" panose="02030504000101010101" pitchFamily="18" charset="-127"/>
+            </a:endParaRPr>
+          </a:p>
+          <a:p>
+            <a:pPr marL="800100" lvl="1" indent="-342900" eaLnBrk="0" fontAlgn="base" hangingPunct="0">
+              <a:spcBef>
+                <a:spcPct val="0"/>
+              </a:spcBef>
+              <a:spcAft>
+                <a:spcPct val="0"/>
+              </a:spcAft>
+              <a:buFont typeface="+mj-lt"/>
+              <a:buAutoNum type="arabicPeriod"/>
+            </a:pPr>
+            <a:r>
+              <a:rPr lang="ko-KR" altLang="ko-KR" sz="1600" dirty="0">
+                <a:latin typeface="휴먼모음T" panose="02030504000101010101" pitchFamily="18" charset="-127"/>
+                <a:ea typeface="휴먼모음T" panose="02030504000101010101" pitchFamily="18" charset="-127"/>
+              </a:rPr>
+              <a:t>만약 동일한 데이터로 99% 신뢰구간을 구한다면, 95% 때보다 구간의 너비(</a:t>
+            </a:r>
+            <a:r>
+              <a:rPr lang="ko-KR" altLang="ko-KR" sz="1600" dirty="0" err="1">
+                <a:latin typeface="휴먼모음T" panose="02030504000101010101" pitchFamily="18" charset="-127"/>
+                <a:ea typeface="휴먼모음T" panose="02030504000101010101" pitchFamily="18" charset="-127"/>
+              </a:rPr>
+              <a:t>Width</a:t>
+            </a:r>
+            <a:r>
+              <a:rPr lang="ko-KR" altLang="ko-KR" sz="1600" dirty="0">
+                <a:latin typeface="휴먼모음T" panose="02030504000101010101" pitchFamily="18" charset="-127"/>
+                <a:ea typeface="휴먼모음T" panose="02030504000101010101" pitchFamily="18" charset="-127"/>
+              </a:rPr>
+              <a:t>)는 어떻게 변하겠는가?</a:t>
+            </a:r>
+          </a:p>
+        </p:txBody>
+      </p:sp>
+    </p:spTree>
+    <p:extLst>
+      <p:ext uri="{BB962C8B-B14F-4D97-AF65-F5344CB8AC3E}">
+        <p14:creationId xmlns:p14="http://schemas.microsoft.com/office/powerpoint/2010/main" val="2915621413"/>
+      </p:ext>
+    </p:extLst>
+  </p:cSld>
+  <p:clrMapOvr>
+    <a:masterClrMapping/>
+  </p:clrMapOvr>
+  <mc:AlternateContent xmlns:mc="http://schemas.openxmlformats.org/markup-compatibility/2006" xmlns:p14="http://schemas.microsoft.com/office/powerpoint/2010/main">
+    <mc:Choice Requires="p14">
+      <p:transition spd="med" p14:dur="700">
+        <p:fade/>
+      </p:transition>
+    </mc:Choice>
+    <mc:Fallback xmlns="">
+      <p:transition spd="med">
+        <p:fade/>
+      </p:transition>
+    </mc:Fallback>
+  </mc:AlternateContent>
+</p:sld>
+</file>
+
+<file path=ppt/slides/slide19.xml><?xml version="1.0" encoding="utf-8"?>
 <p:sld xmlns:a="http://schemas.openxmlformats.org/drawingml/2006/main" xmlns:r="http://schemas.openxmlformats.org/officeDocument/2006/relationships" xmlns:p="http://schemas.openxmlformats.org/presentationml/2006/main">
   <p:cSld>
     <p:spTree>
@@ -5966,7 +8459,7 @@
             <a:pPr rtl="0"/>
             <a:fld id="{A3F31473-23EB-4724-8B59-FE6D21D89FA4}" type="slidenum">
               <a:rPr lang="en-US" altLang="ko-KR" noProof="0" smtClean="0"/>
-              <a:t>14</a:t>
+              <a:t>19</a:t>
             </a:fld>
             <a:endParaRPr lang="en-US" altLang="ko-KR" noProof="0" dirty="0"/>
           </a:p>
@@ -6028,8 +8521,8 @@
         </p:nvSpPr>
         <p:spPr>
           <a:xfrm>
-            <a:off x="8974732" y="2801878"/>
-            <a:ext cx="2952328" cy="2354491"/>
+            <a:off x="8735325" y="2590288"/>
+            <a:ext cx="2952328" cy="2641813"/>
           </a:xfrm>
           <a:prstGeom prst="rect">
             <a:avLst/>
@@ -6049,14 +8542,23 @@
               <a:buChar char="ü"/>
             </a:pPr>
             <a:r>
-              <a:rPr lang="en-US" altLang="ko-KR" sz="1400" b="1" dirty="0"/>
+              <a:rPr lang="en-US" altLang="ko-KR" sz="1600" dirty="0">
+                <a:latin typeface="휴먼모음T" panose="02030504000101010101" pitchFamily="18" charset="-127"/>
+                <a:ea typeface="휴먼모음T" panose="02030504000101010101" pitchFamily="18" charset="-127"/>
+              </a:rPr>
               <a:t>p-value</a:t>
             </a:r>
             <a:r>
-              <a:rPr lang="ko-KR" altLang="en-US" sz="1400" b="1" dirty="0"/>
+              <a:rPr lang="ko-KR" altLang="en-US" sz="1600" dirty="0">
+                <a:latin typeface="휴먼모음T" panose="02030504000101010101" pitchFamily="18" charset="-127"/>
+                <a:ea typeface="휴먼모음T" panose="02030504000101010101" pitchFamily="18" charset="-127"/>
+              </a:rPr>
               <a:t>는 실험 수행 결과의 극단성</a:t>
             </a:r>
-            <a:endParaRPr lang="en-US" altLang="ko-KR" sz="1400" b="1" dirty="0"/>
+            <a:endParaRPr lang="en-US" altLang="ko-KR" sz="1600" dirty="0">
+              <a:latin typeface="휴먼모음T" panose="02030504000101010101" pitchFamily="18" charset="-127"/>
+              <a:ea typeface="휴먼모음T" panose="02030504000101010101" pitchFamily="18" charset="-127"/>
+            </a:endParaRPr>
           </a:p>
           <a:p>
             <a:pPr marL="285750" indent="-285750">
@@ -6067,23 +8569,38 @@
               <a:buChar char="ü"/>
             </a:pPr>
             <a:r>
-              <a:rPr lang="ko-KR" altLang="en-US" sz="1400" b="1" dirty="0" err="1"/>
+              <a:rPr lang="ko-KR" altLang="en-US" sz="1600" dirty="0" err="1">
+                <a:latin typeface="휴먼모음T" panose="02030504000101010101" pitchFamily="18" charset="-127"/>
+                <a:ea typeface="휴먼모음T" panose="02030504000101010101" pitchFamily="18" charset="-127"/>
+              </a:rPr>
               <a:t>유의수준은</a:t>
             </a:r>
             <a:r>
-              <a:rPr lang="ko-KR" altLang="en-US" sz="1400" b="1" dirty="0"/>
+              <a:rPr lang="ko-KR" altLang="en-US" sz="1600" dirty="0">
+                <a:latin typeface="휴먼모음T" panose="02030504000101010101" pitchFamily="18" charset="-127"/>
+                <a:ea typeface="휴먼모음T" panose="02030504000101010101" pitchFamily="18" charset="-127"/>
+              </a:rPr>
               <a:t> 이를 평가할 기준</a:t>
             </a:r>
             <a:r>
-              <a:rPr lang="en-US" altLang="ko-KR" sz="1400" b="1" dirty="0"/>
+              <a:rPr lang="en-US" altLang="ko-KR" sz="1600" dirty="0">
+                <a:latin typeface="휴먼모음T" panose="02030504000101010101" pitchFamily="18" charset="-127"/>
+                <a:ea typeface="휴먼모음T" panose="02030504000101010101" pitchFamily="18" charset="-127"/>
+              </a:rPr>
               <a:t>(</a:t>
             </a:r>
             <a:r>
-              <a:rPr lang="ko-KR" altLang="en-US" sz="1400" b="1" dirty="0"/>
+              <a:rPr lang="ko-KR" altLang="en-US" sz="1600" dirty="0">
+                <a:latin typeface="휴먼모음T" panose="02030504000101010101" pitchFamily="18" charset="-127"/>
+                <a:ea typeface="휴먼모음T" panose="02030504000101010101" pitchFamily="18" charset="-127"/>
+              </a:rPr>
               <a:t>연구자가 설정</a:t>
             </a:r>
             <a:r>
-              <a:rPr lang="en-US" altLang="ko-KR" sz="1400" b="1" dirty="0"/>
+              <a:rPr lang="en-US" altLang="ko-KR" sz="1600" dirty="0">
+                <a:latin typeface="휴먼모음T" panose="02030504000101010101" pitchFamily="18" charset="-127"/>
+                <a:ea typeface="휴먼모음T" panose="02030504000101010101" pitchFamily="18" charset="-127"/>
+              </a:rPr>
               <a:t>)</a:t>
             </a:r>
           </a:p>
@@ -6096,15 +8613,24 @@
               <a:buChar char="ü"/>
             </a:pPr>
             <a:r>
-              <a:rPr lang="ko-KR" altLang="en-US" sz="1400" b="1" dirty="0"/>
+              <a:rPr lang="ko-KR" altLang="en-US" sz="1600" dirty="0">
+                <a:latin typeface="휴먼모음T" panose="02030504000101010101" pitchFamily="18" charset="-127"/>
+                <a:ea typeface="휴먼모음T" panose="02030504000101010101" pitchFamily="18" charset="-127"/>
+              </a:rPr>
               <a:t>두 값이 어떻게 비교되는 지에 따라 </a:t>
             </a:r>
             <a:r>
-              <a:rPr lang="ko-KR" altLang="en-US" sz="1400" b="1" dirty="0" err="1"/>
+              <a:rPr lang="ko-KR" altLang="en-US" sz="1600" dirty="0" err="1">
+                <a:latin typeface="휴먼모음T" panose="02030504000101010101" pitchFamily="18" charset="-127"/>
+                <a:ea typeface="휴먼모음T" panose="02030504000101010101" pitchFamily="18" charset="-127"/>
+              </a:rPr>
               <a:t>귀무가설을</a:t>
             </a:r>
             <a:r>
-              <a:rPr lang="ko-KR" altLang="en-US" sz="1400" b="1" dirty="0"/>
+              <a:rPr lang="ko-KR" altLang="en-US" sz="1600" dirty="0">
+                <a:latin typeface="휴먼모음T" panose="02030504000101010101" pitchFamily="18" charset="-127"/>
+                <a:ea typeface="휴먼모음T" panose="02030504000101010101" pitchFamily="18" charset="-127"/>
+              </a:rPr>
               <a:t> 기각할지 여부를 결정</a:t>
             </a:r>
           </a:p>
@@ -6669,6 +9195,1204 @@
   <p:cSld>
     <p:spTree>
       <p:nvGrpSpPr>
+        <p:cNvPr id="1" name="">
+          <a:extLst>
+            <a:ext uri="{FF2B5EF4-FFF2-40B4-BE49-F238E27FC236}">
+              <a16:creationId xmlns:a16="http://schemas.microsoft.com/office/drawing/2014/main" id="{7690E2C1-BB1A-4FCC-4EBC-8B540F598F5F}"/>
+            </a:ext>
+          </a:extLst>
+        </p:cNvPr>
+        <p:cNvGrpSpPr/>
+        <p:nvPr/>
+      </p:nvGrpSpPr>
+      <p:grpSpPr>
+        <a:xfrm>
+          <a:off x="0" y="0"/>
+          <a:ext cx="0" cy="0"/>
+          <a:chOff x="0" y="0"/>
+          <a:chExt cx="0" cy="0"/>
+        </a:xfrm>
+      </p:grpSpPr>
+      <p:sp>
+        <p:nvSpPr>
+          <p:cNvPr id="8" name="슬라이드 번호 개체 틀 7">
+            <a:extLst>
+              <a:ext uri="{FF2B5EF4-FFF2-40B4-BE49-F238E27FC236}">
+                <a16:creationId xmlns:a16="http://schemas.microsoft.com/office/drawing/2014/main" id="{4EF241B0-03F6-4174-6351-DEA7C3022824}"/>
+              </a:ext>
+            </a:extLst>
+          </p:cNvPr>
+          <p:cNvSpPr>
+            <a:spLocks noGrp="1"/>
+          </p:cNvSpPr>
+          <p:nvPr>
+            <p:ph type="sldNum" sz="quarter" idx="12"/>
+          </p:nvPr>
+        </p:nvSpPr>
+        <p:spPr/>
+        <p:txBody>
+          <a:bodyPr/>
+          <a:lstStyle/>
+          <a:p>
+            <a:pPr rtl="0"/>
+            <a:fld id="{A3F31473-23EB-4724-8B59-FE6D21D89FA4}" type="slidenum">
+              <a:rPr lang="en-US" altLang="ko-KR" noProof="0" smtClean="0"/>
+              <a:t>2</a:t>
+            </a:fld>
+            <a:endParaRPr lang="en-US" altLang="ko-KR" noProof="0" dirty="0"/>
+          </a:p>
+        </p:txBody>
+      </p:sp>
+      <p:sp>
+        <p:nvSpPr>
+          <p:cNvPr id="3" name="TextBox 2">
+            <a:extLst>
+              <a:ext uri="{FF2B5EF4-FFF2-40B4-BE49-F238E27FC236}">
+                <a16:creationId xmlns:a16="http://schemas.microsoft.com/office/drawing/2014/main" id="{9969E69D-4C2D-C812-DDC5-4721F324AC9B}"/>
+              </a:ext>
+            </a:extLst>
+          </p:cNvPr>
+          <p:cNvSpPr txBox="1"/>
+          <p:nvPr/>
+        </p:nvSpPr>
+        <p:spPr>
+          <a:xfrm>
+            <a:off x="591295" y="423483"/>
+            <a:ext cx="2088232" cy="856388"/>
+          </a:xfrm>
+          <a:prstGeom prst="rect">
+            <a:avLst/>
+          </a:prstGeom>
+          <a:noFill/>
+        </p:spPr>
+        <p:txBody>
+          <a:bodyPr wrap="square">
+            <a:spAutoFit/>
+          </a:bodyPr>
+          <a:lstStyle/>
+          <a:p>
+            <a:pPr marL="285750" indent="-285750">
+              <a:lnSpc>
+                <a:spcPct val="250000"/>
+              </a:lnSpc>
+              <a:buFont typeface="Wingdings" panose="05000000000000000000" pitchFamily="2" charset="2"/>
+              <a:buChar char="v"/>
+            </a:pPr>
+            <a:r>
+              <a:rPr lang="ko-KR" altLang="en-US" sz="2400" dirty="0">
+                <a:latin typeface="한컴 말랑말랑 Bold" panose="020F0803000000000000" pitchFamily="50" charset="-127"/>
+                <a:ea typeface="한컴 말랑말랑 Bold" panose="020F0803000000000000" pitchFamily="50" charset="-127"/>
+              </a:rPr>
+              <a:t> 점 추정</a:t>
+            </a:r>
+            <a:endParaRPr lang="en-US" altLang="ko-KR" sz="2400" dirty="0">
+              <a:latin typeface="한컴 말랑말랑 Bold" panose="020F0803000000000000" pitchFamily="50" charset="-127"/>
+              <a:ea typeface="한컴 말랑말랑 Bold" panose="020F0803000000000000" pitchFamily="50" charset="-127"/>
+            </a:endParaRPr>
+          </a:p>
+        </p:txBody>
+      </p:sp>
+      <p:pic>
+        <p:nvPicPr>
+          <p:cNvPr id="1028" name="Picture 4" descr="물에 노란색과 흰색 물고기">
+            <a:extLst>
+              <a:ext uri="{FF2B5EF4-FFF2-40B4-BE49-F238E27FC236}">
+                <a16:creationId xmlns:a16="http://schemas.microsoft.com/office/drawing/2014/main" id="{FF6962AE-334A-73B8-9E42-5DAA4627E288}"/>
+              </a:ext>
+            </a:extLst>
+          </p:cNvPr>
+          <p:cNvPicPr>
+            <a:picLocks noChangeAspect="1" noChangeArrowheads="1"/>
+          </p:cNvPicPr>
+          <p:nvPr/>
+        </p:nvPicPr>
+        <p:blipFill>
+          <a:blip r:embed="rId3" cstate="print">
+            <a:extLst>
+              <a:ext uri="{28A0092B-C50C-407E-A947-70E740481C1C}">
+                <a14:useLocalDpi xmlns:a14="http://schemas.microsoft.com/office/drawing/2010/main" val="0"/>
+              </a:ext>
+            </a:extLst>
+          </a:blip>
+          <a:srcRect/>
+          <a:stretch>
+            <a:fillRect/>
+          </a:stretch>
+        </p:blipFill>
+        <p:spPr bwMode="auto">
+          <a:xfrm>
+            <a:off x="1226793" y="1382526"/>
+            <a:ext cx="2905468" cy="4358202"/>
+          </a:xfrm>
+          <a:prstGeom prst="rect">
+            <a:avLst/>
+          </a:prstGeom>
+          <a:noFill/>
+          <a:extLst>
+            <a:ext uri="{909E8E84-426E-40DD-AFC4-6F175D3DCCD1}">
+              <a14:hiddenFill xmlns:a14="http://schemas.microsoft.com/office/drawing/2010/main">
+                <a:solidFill>
+                  <a:srgbClr val="FFFFFF"/>
+                </a:solidFill>
+              </a14:hiddenFill>
+            </a:ext>
+          </a:extLst>
+        </p:spPr>
+      </p:pic>
+      <p:sp>
+        <p:nvSpPr>
+          <p:cNvPr id="2" name="TextBox 1">
+            <a:extLst>
+              <a:ext uri="{FF2B5EF4-FFF2-40B4-BE49-F238E27FC236}">
+                <a16:creationId xmlns:a16="http://schemas.microsoft.com/office/drawing/2014/main" id="{ED8E5E32-8CC6-6668-EE41-22B84BF8E615}"/>
+              </a:ext>
+            </a:extLst>
+          </p:cNvPr>
+          <p:cNvSpPr txBox="1"/>
+          <p:nvPr/>
+        </p:nvSpPr>
+        <p:spPr>
+          <a:xfrm>
+            <a:off x="6166420" y="423483"/>
+            <a:ext cx="2160240" cy="856388"/>
+          </a:xfrm>
+          <a:prstGeom prst="rect">
+            <a:avLst/>
+          </a:prstGeom>
+          <a:noFill/>
+        </p:spPr>
+        <p:txBody>
+          <a:bodyPr wrap="square">
+            <a:spAutoFit/>
+          </a:bodyPr>
+          <a:lstStyle/>
+          <a:p>
+            <a:pPr marL="285750" indent="-285750">
+              <a:lnSpc>
+                <a:spcPct val="250000"/>
+              </a:lnSpc>
+              <a:buFont typeface="Wingdings" panose="05000000000000000000" pitchFamily="2" charset="2"/>
+              <a:buChar char="v"/>
+            </a:pPr>
+            <a:r>
+              <a:rPr lang="ko-KR" altLang="en-US" sz="2400" dirty="0">
+                <a:latin typeface="한컴 말랑말랑 Bold" panose="020F0803000000000000" pitchFamily="50" charset="-127"/>
+                <a:ea typeface="한컴 말랑말랑 Bold" panose="020F0803000000000000" pitchFamily="50" charset="-127"/>
+              </a:rPr>
+              <a:t>구간 추정</a:t>
+            </a:r>
+          </a:p>
+        </p:txBody>
+      </p:sp>
+      <p:pic>
+        <p:nvPicPr>
+          <p:cNvPr id="1032" name="Picture 8" descr="물 속에 서서 호수 옆에서 그물을 잡고 낚시를 하는 행복한 어린 소년.">
+            <a:extLst>
+              <a:ext uri="{FF2B5EF4-FFF2-40B4-BE49-F238E27FC236}">
+                <a16:creationId xmlns:a16="http://schemas.microsoft.com/office/drawing/2014/main" id="{DC13672B-894D-42FF-3D66-D00525BE11B4}"/>
+              </a:ext>
+            </a:extLst>
+          </p:cNvPr>
+          <p:cNvPicPr>
+            <a:picLocks noChangeAspect="1" noChangeArrowheads="1"/>
+          </p:cNvPicPr>
+          <p:nvPr/>
+        </p:nvPicPr>
+        <p:blipFill>
+          <a:blip r:embed="rId4" cstate="print">
+            <a:extLst>
+              <a:ext uri="{28A0092B-C50C-407E-A947-70E740481C1C}">
+                <a14:useLocalDpi xmlns:a14="http://schemas.microsoft.com/office/drawing/2010/main" val="0"/>
+              </a:ext>
+            </a:extLst>
+          </a:blip>
+          <a:srcRect/>
+          <a:stretch>
+            <a:fillRect/>
+          </a:stretch>
+        </p:blipFill>
+        <p:spPr bwMode="auto">
+          <a:xfrm>
+            <a:off x="7102524" y="1412776"/>
+            <a:ext cx="4297712" cy="2996952"/>
+          </a:xfrm>
+          <a:prstGeom prst="rect">
+            <a:avLst/>
+          </a:prstGeom>
+          <a:noFill/>
+          <a:extLst>
+            <a:ext uri="{909E8E84-426E-40DD-AFC4-6F175D3DCCD1}">
+              <a14:hiddenFill xmlns:a14="http://schemas.microsoft.com/office/drawing/2010/main">
+                <a:solidFill>
+                  <a:srgbClr val="FFFFFF"/>
+                </a:solidFill>
+              </a14:hiddenFill>
+            </a:ext>
+          </a:extLst>
+        </p:spPr>
+      </p:pic>
+    </p:spTree>
+    <p:extLst>
+      <p:ext uri="{BB962C8B-B14F-4D97-AF65-F5344CB8AC3E}">
+        <p14:creationId xmlns:p14="http://schemas.microsoft.com/office/powerpoint/2010/main" val="810907724"/>
+      </p:ext>
+    </p:extLst>
+  </p:cSld>
+  <p:clrMapOvr>
+    <a:masterClrMapping/>
+  </p:clrMapOvr>
+  <mc:AlternateContent xmlns:mc="http://schemas.openxmlformats.org/markup-compatibility/2006" xmlns:p14="http://schemas.microsoft.com/office/powerpoint/2010/main">
+    <mc:Choice Requires="p14">
+      <p:transition spd="med" p14:dur="700">
+        <p:fade/>
+      </p:transition>
+    </mc:Choice>
+    <mc:Fallback xmlns="">
+      <p:transition spd="med">
+        <p:fade/>
+      </p:transition>
+    </mc:Fallback>
+  </mc:AlternateContent>
+</p:sld>
+</file>
+
+<file path=ppt/slides/slide20.xml><?xml version="1.0" encoding="utf-8"?>
+<p:sld xmlns:a="http://schemas.openxmlformats.org/drawingml/2006/main" xmlns:r="http://schemas.openxmlformats.org/officeDocument/2006/relationships" xmlns:p="http://schemas.openxmlformats.org/presentationml/2006/main">
+  <p:cSld>
+    <p:spTree>
+      <p:nvGrpSpPr>
+        <p:cNvPr id="1" name="">
+          <a:extLst>
+            <a:ext uri="{FF2B5EF4-FFF2-40B4-BE49-F238E27FC236}">
+              <a16:creationId xmlns:a16="http://schemas.microsoft.com/office/drawing/2014/main" id="{77683651-8592-BC92-0FEB-A21678516FD1}"/>
+            </a:ext>
+          </a:extLst>
+        </p:cNvPr>
+        <p:cNvGrpSpPr/>
+        <p:nvPr/>
+      </p:nvGrpSpPr>
+      <p:grpSpPr>
+        <a:xfrm>
+          <a:off x="0" y="0"/>
+          <a:ext cx="0" cy="0"/>
+          <a:chOff x="0" y="0"/>
+          <a:chExt cx="0" cy="0"/>
+        </a:xfrm>
+      </p:grpSpPr>
+      <p:sp>
+        <p:nvSpPr>
+          <p:cNvPr id="8" name="슬라이드 번호 개체 틀 7">
+            <a:extLst>
+              <a:ext uri="{FF2B5EF4-FFF2-40B4-BE49-F238E27FC236}">
+                <a16:creationId xmlns:a16="http://schemas.microsoft.com/office/drawing/2014/main" id="{2DB9E036-08D3-F313-6005-D3CC1C479848}"/>
+              </a:ext>
+            </a:extLst>
+          </p:cNvPr>
+          <p:cNvSpPr>
+            <a:spLocks noGrp="1"/>
+          </p:cNvSpPr>
+          <p:nvPr>
+            <p:ph type="sldNum" sz="quarter" idx="12"/>
+          </p:nvPr>
+        </p:nvSpPr>
+        <p:spPr/>
+        <p:txBody>
+          <a:bodyPr/>
+          <a:lstStyle/>
+          <a:p>
+            <a:pPr rtl="0"/>
+            <a:fld id="{A3F31473-23EB-4724-8B59-FE6D21D89FA4}" type="slidenum">
+              <a:rPr lang="en-US" altLang="ko-KR" noProof="0" smtClean="0"/>
+              <a:t>20</a:t>
+            </a:fld>
+            <a:endParaRPr lang="en-US" altLang="ko-KR" noProof="0" dirty="0"/>
+          </a:p>
+        </p:txBody>
+      </p:sp>
+      <p:sp>
+        <p:nvSpPr>
+          <p:cNvPr id="5" name="TextBox 4">
+            <a:extLst>
+              <a:ext uri="{FF2B5EF4-FFF2-40B4-BE49-F238E27FC236}">
+                <a16:creationId xmlns:a16="http://schemas.microsoft.com/office/drawing/2014/main" id="{5704E12C-BFC2-1F82-72D3-5DAEDC5B6D54}"/>
+              </a:ext>
+            </a:extLst>
+          </p:cNvPr>
+          <p:cNvSpPr txBox="1"/>
+          <p:nvPr/>
+        </p:nvSpPr>
+        <p:spPr>
+          <a:xfrm>
+            <a:off x="117748" y="260648"/>
+            <a:ext cx="2592288" cy="584775"/>
+          </a:xfrm>
+          <a:prstGeom prst="rect">
+            <a:avLst/>
+          </a:prstGeom>
+          <a:noFill/>
+        </p:spPr>
+        <p:txBody>
+          <a:bodyPr wrap="square" rtlCol="0">
+            <a:spAutoFit/>
+          </a:bodyPr>
+          <a:lstStyle/>
+          <a:p>
+            <a:r>
+              <a:rPr lang="ko-KR" altLang="en-US" sz="3200" b="1"/>
+              <a:t>문제 풀이</a:t>
+            </a:r>
+          </a:p>
+        </p:txBody>
+      </p:sp>
+      <p:sp>
+        <p:nvSpPr>
+          <p:cNvPr id="3" name="Rectangle 1">
+            <a:extLst>
+              <a:ext uri="{FF2B5EF4-FFF2-40B4-BE49-F238E27FC236}">
+                <a16:creationId xmlns:a16="http://schemas.microsoft.com/office/drawing/2014/main" id="{35A8D74C-0F5C-23EF-5F89-76BBB7EF55DC}"/>
+              </a:ext>
+            </a:extLst>
+          </p:cNvPr>
+          <p:cNvSpPr>
+            <a:spLocks noChangeArrowheads="1"/>
+          </p:cNvSpPr>
+          <p:nvPr/>
+        </p:nvSpPr>
+        <p:spPr bwMode="auto">
+          <a:xfrm>
+            <a:off x="316302" y="1048852"/>
+            <a:ext cx="11017224" cy="1487651"/>
+          </a:xfrm>
+          <a:prstGeom prst="rect">
+            <a:avLst/>
+          </a:prstGeom>
+          <a:solidFill>
+            <a:schemeClr val="bg1">
+              <a:lumMod val="85000"/>
+            </a:schemeClr>
+          </a:solidFill>
+          <a:ln>
+            <a:noFill/>
+          </a:ln>
+          <a:effectLst/>
+        </p:spPr>
+        <p:txBody>
+          <a:bodyPr vert="horz" wrap="square" lIns="91440" tIns="0" rIns="91440" bIns="45720" numCol="1" anchor="ctr" anchorCtr="0" compatLnSpc="1">
+            <a:prstTxWarp prst="textNoShape">
+              <a:avLst/>
+            </a:prstTxWarp>
+            <a:spAutoFit/>
+          </a:bodyPr>
+          <a:lstStyle/>
+          <a:p>
+            <a:pPr marL="285750" marR="0" lvl="0" indent="-285750" algn="l" defTabSz="914400" rtl="0" eaLnBrk="0" fontAlgn="base" latinLnBrk="0" hangingPunct="0">
+              <a:lnSpc>
+                <a:spcPct val="150000"/>
+              </a:lnSpc>
+              <a:spcBef>
+                <a:spcPct val="0"/>
+              </a:spcBef>
+              <a:spcAft>
+                <a:spcPct val="0"/>
+              </a:spcAft>
+              <a:buClrTx/>
+              <a:buSzTx/>
+              <a:buFont typeface="Wingdings" panose="05000000000000000000" pitchFamily="2" charset="2"/>
+              <a:buChar char="v"/>
+              <a:tabLst/>
+            </a:pPr>
+            <a:r>
+              <a:rPr lang="ko-KR" altLang="ko-KR" sz="1600" dirty="0">
+                <a:latin typeface="휴먼모음T" panose="02030504000101010101" pitchFamily="18" charset="-127"/>
+                <a:ea typeface="휴먼모음T" panose="02030504000101010101" pitchFamily="18" charset="-127"/>
+              </a:rPr>
+              <a:t>"이 동전, 수상하다?“</a:t>
+            </a:r>
+            <a:r>
+              <a:rPr lang="en-US" altLang="ko-KR" sz="1600" dirty="0">
+                <a:latin typeface="휴먼모음T" panose="02030504000101010101" pitchFamily="18" charset="-127"/>
+                <a:ea typeface="휴먼모음T" panose="02030504000101010101" pitchFamily="18" charset="-127"/>
+              </a:rPr>
+              <a:t> </a:t>
+            </a:r>
+          </a:p>
+          <a:p>
+            <a:pPr marL="285750" marR="0" lvl="0" indent="-285750" algn="l" defTabSz="914400" rtl="0" eaLnBrk="0" fontAlgn="base" latinLnBrk="0" hangingPunct="0">
+              <a:lnSpc>
+                <a:spcPct val="150000"/>
+              </a:lnSpc>
+              <a:spcBef>
+                <a:spcPct val="0"/>
+              </a:spcBef>
+              <a:spcAft>
+                <a:spcPct val="0"/>
+              </a:spcAft>
+              <a:buClrTx/>
+              <a:buSzTx/>
+              <a:buFont typeface="Wingdings" panose="05000000000000000000" pitchFamily="2" charset="2"/>
+              <a:buChar char="v"/>
+              <a:tabLst/>
+            </a:pPr>
+            <a:r>
+              <a:rPr lang="ko-KR" altLang="ko-KR" sz="1600" dirty="0">
+                <a:latin typeface="휴먼모음T" panose="02030504000101010101" pitchFamily="18" charset="-127"/>
+                <a:ea typeface="휴먼모음T" panose="02030504000101010101" pitchFamily="18" charset="-127"/>
+              </a:rPr>
+              <a:t>어떤 사람이 동전을 10번 던졌는데, 앞면이 </a:t>
+            </a:r>
+            <a:r>
+              <a:rPr lang="en-US" altLang="ko-KR" sz="1600" dirty="0">
+                <a:latin typeface="휴먼모음T" panose="02030504000101010101" pitchFamily="18" charset="-127"/>
+                <a:ea typeface="휴먼모음T" panose="02030504000101010101" pitchFamily="18" charset="-127"/>
+              </a:rPr>
+              <a:t>8</a:t>
+            </a:r>
+            <a:r>
+              <a:rPr lang="ko-KR" altLang="ko-KR" sz="1600" dirty="0">
+                <a:latin typeface="휴먼모음T" panose="02030504000101010101" pitchFamily="18" charset="-127"/>
+                <a:ea typeface="휴먼모음T" panose="02030504000101010101" pitchFamily="18" charset="-127"/>
+              </a:rPr>
+              <a:t>번 나왔습니다.</a:t>
+            </a:r>
+            <a:r>
+              <a:rPr lang="en-US" altLang="ko-KR" sz="1600" dirty="0">
+                <a:latin typeface="휴먼모음T" panose="02030504000101010101" pitchFamily="18" charset="-127"/>
+                <a:ea typeface="휴먼모음T" panose="02030504000101010101" pitchFamily="18" charset="-127"/>
+              </a:rPr>
+              <a:t> </a:t>
+            </a:r>
+            <a:r>
+              <a:rPr lang="ko-KR" altLang="ko-KR" sz="1600" dirty="0">
+                <a:latin typeface="휴먼모음T" panose="02030504000101010101" pitchFamily="18" charset="-127"/>
+                <a:ea typeface="휴먼모음T" panose="02030504000101010101" pitchFamily="18" charset="-127"/>
+              </a:rPr>
+              <a:t>"정상적인 동전에서 이런 일이 일어날 확률(</a:t>
+            </a:r>
+            <a:r>
+              <a:rPr lang="ko-KR" altLang="ko-KR" sz="1600" dirty="0" err="1">
+                <a:latin typeface="휴먼모음T" panose="02030504000101010101" pitchFamily="18" charset="-127"/>
+                <a:ea typeface="휴먼모음T" panose="02030504000101010101" pitchFamily="18" charset="-127"/>
+              </a:rPr>
+              <a:t>P-value</a:t>
+            </a:r>
+            <a:r>
+              <a:rPr lang="ko-KR" altLang="ko-KR" sz="1600" dirty="0">
+                <a:latin typeface="휴먼모음T" panose="02030504000101010101" pitchFamily="18" charset="-127"/>
+                <a:ea typeface="휴먼모음T" panose="02030504000101010101" pitchFamily="18" charset="-127"/>
+              </a:rPr>
+              <a:t>)은 얼마일까?“</a:t>
+            </a:r>
+            <a:endParaRPr lang="en-US" altLang="ko-KR" sz="1600" dirty="0">
+              <a:latin typeface="휴먼모음T" panose="02030504000101010101" pitchFamily="18" charset="-127"/>
+              <a:ea typeface="휴먼모음T" panose="02030504000101010101" pitchFamily="18" charset="-127"/>
+            </a:endParaRPr>
+          </a:p>
+          <a:p>
+            <a:pPr marL="285750" marR="0" lvl="0" indent="-285750" algn="l" defTabSz="914400" rtl="0" eaLnBrk="0" fontAlgn="base" latinLnBrk="0" hangingPunct="0">
+              <a:lnSpc>
+                <a:spcPct val="150000"/>
+              </a:lnSpc>
+              <a:spcBef>
+                <a:spcPct val="0"/>
+              </a:spcBef>
+              <a:spcAft>
+                <a:spcPct val="0"/>
+              </a:spcAft>
+              <a:buClrTx/>
+              <a:buSzTx/>
+              <a:buFont typeface="Wingdings" panose="05000000000000000000" pitchFamily="2" charset="2"/>
+              <a:buChar char="v"/>
+              <a:tabLst/>
+            </a:pPr>
+            <a:r>
+              <a:rPr lang="ko-KR" altLang="en-US" sz="1600" dirty="0">
+                <a:latin typeface="휴먼모음T" panose="02030504000101010101" pitchFamily="18" charset="-127"/>
+                <a:ea typeface="휴먼모음T" panose="02030504000101010101" pitchFamily="18" charset="-127"/>
+              </a:rPr>
+              <a:t>당신은 아 동전이 정상이 아니라고 얼마의 확률로 주장할 것인가</a:t>
+            </a:r>
+            <a:r>
+              <a:rPr lang="en-US" altLang="ko-KR" sz="1600" dirty="0">
+                <a:latin typeface="휴먼모음T" panose="02030504000101010101" pitchFamily="18" charset="-127"/>
+                <a:ea typeface="휴먼모음T" panose="02030504000101010101" pitchFamily="18" charset="-127"/>
+              </a:rPr>
+              <a:t>?</a:t>
+            </a:r>
+            <a:endParaRPr lang="ko-KR" altLang="ko-KR" sz="1600" dirty="0">
+              <a:latin typeface="휴먼모음T" panose="02030504000101010101" pitchFamily="18" charset="-127"/>
+              <a:ea typeface="휴먼모음T" panose="02030504000101010101" pitchFamily="18" charset="-127"/>
+            </a:endParaRPr>
+          </a:p>
+        </p:txBody>
+      </p:sp>
+      <p:sp>
+        <p:nvSpPr>
+          <p:cNvPr id="7" name="TextBox 6">
+            <a:extLst>
+              <a:ext uri="{FF2B5EF4-FFF2-40B4-BE49-F238E27FC236}">
+                <a16:creationId xmlns:a16="http://schemas.microsoft.com/office/drawing/2014/main" id="{8A543D9F-DFD3-3BBC-D8BC-96D1D04B0DFE}"/>
+              </a:ext>
+            </a:extLst>
+          </p:cNvPr>
+          <p:cNvSpPr txBox="1"/>
+          <p:nvPr/>
+        </p:nvSpPr>
+        <p:spPr>
+          <a:xfrm>
+            <a:off x="6526461" y="2772722"/>
+            <a:ext cx="2376264" cy="3323987"/>
+          </a:xfrm>
+          <a:prstGeom prst="rect">
+            <a:avLst/>
+          </a:prstGeom>
+          <a:noFill/>
+        </p:spPr>
+        <p:txBody>
+          <a:bodyPr wrap="square">
+            <a:spAutoFit/>
+          </a:bodyPr>
+          <a:lstStyle/>
+          <a:p>
+            <a:r>
+              <a:rPr lang="ko-KR" altLang="en-US" sz="1400" dirty="0">
+                <a:latin typeface="휴먼모음T" panose="02030504000101010101" pitchFamily="18" charset="-127"/>
+                <a:ea typeface="휴먼모음T" panose="02030504000101010101" pitchFamily="18" charset="-127"/>
+              </a:rPr>
+              <a:t>동전 앞면 출현과 </a:t>
+            </a:r>
+            <a:r>
+              <a:rPr lang="ko-KR" altLang="en-US" sz="1400" b="0" i="0" dirty="0">
+                <a:effectLst/>
+                <a:latin typeface="휴먼모음T" panose="02030504000101010101" pitchFamily="18" charset="-127"/>
+                <a:ea typeface="휴먼모음T" panose="02030504000101010101" pitchFamily="18" charset="-127"/>
+              </a:rPr>
+              <a:t>비율</a:t>
+            </a:r>
+            <a:r>
+              <a:rPr lang="en-US" altLang="ko-KR" sz="1400" b="0" i="0" dirty="0">
+                <a:effectLst/>
+                <a:latin typeface="휴먼모음T" panose="02030504000101010101" pitchFamily="18" charset="-127"/>
+                <a:ea typeface="휴먼모음T" panose="02030504000101010101" pitchFamily="18" charset="-127"/>
+              </a:rPr>
+              <a:t>:</a:t>
+            </a:r>
+          </a:p>
+          <a:p>
+            <a:r>
+              <a:rPr lang="en-US" altLang="ko-KR" sz="1400" b="0" i="0" dirty="0">
+                <a:effectLst/>
+                <a:latin typeface="휴먼모음T" panose="02030504000101010101" pitchFamily="18" charset="-127"/>
+                <a:ea typeface="휴먼모음T" panose="02030504000101010101" pitchFamily="18" charset="-127"/>
+              </a:rPr>
+              <a:t> </a:t>
+            </a:r>
+          </a:p>
+          <a:p>
+            <a:r>
+              <a:rPr lang="en-US" altLang="ko-KR" sz="1400" b="0" i="0" dirty="0">
+                <a:effectLst/>
+                <a:latin typeface="휴먼모음T" panose="02030504000101010101" pitchFamily="18" charset="-127"/>
+                <a:ea typeface="휴먼모음T" panose="02030504000101010101" pitchFamily="18" charset="-127"/>
+              </a:rPr>
+              <a:t> 0 0.0010 </a:t>
+            </a:r>
+          </a:p>
+          <a:p>
+            <a:r>
+              <a:rPr lang="en-US" altLang="ko-KR" sz="1400" b="0" i="0" dirty="0">
+                <a:effectLst/>
+                <a:latin typeface="휴먼모음T" panose="02030504000101010101" pitchFamily="18" charset="-127"/>
+                <a:ea typeface="휴먼모음T" panose="02030504000101010101" pitchFamily="18" charset="-127"/>
+              </a:rPr>
+              <a:t> 1 0.0120 </a:t>
+            </a:r>
+          </a:p>
+          <a:p>
+            <a:r>
+              <a:rPr lang="en-US" altLang="ko-KR" sz="1400" b="0" i="0" dirty="0">
+                <a:effectLst/>
+                <a:latin typeface="휴먼모음T" panose="02030504000101010101" pitchFamily="18" charset="-127"/>
+                <a:ea typeface="휴먼모음T" panose="02030504000101010101" pitchFamily="18" charset="-127"/>
+              </a:rPr>
+              <a:t> 2 0.0500 </a:t>
+            </a:r>
+          </a:p>
+          <a:p>
+            <a:r>
+              <a:rPr lang="en-US" altLang="ko-KR" sz="1400" b="0" i="0" dirty="0">
+                <a:effectLst/>
+                <a:latin typeface="휴먼모음T" panose="02030504000101010101" pitchFamily="18" charset="-127"/>
+                <a:ea typeface="휴먼모음T" panose="02030504000101010101" pitchFamily="18" charset="-127"/>
+              </a:rPr>
+              <a:t> 3 0.1240 </a:t>
+            </a:r>
+          </a:p>
+          <a:p>
+            <a:r>
+              <a:rPr lang="en-US" altLang="ko-KR" sz="1400" b="0" i="0" dirty="0">
+                <a:effectLst/>
+                <a:latin typeface="휴먼모음T" panose="02030504000101010101" pitchFamily="18" charset="-127"/>
+                <a:ea typeface="휴먼모음T" panose="02030504000101010101" pitchFamily="18" charset="-127"/>
+              </a:rPr>
+              <a:t> 4 0.1980 </a:t>
+            </a:r>
+          </a:p>
+          <a:p>
+            <a:r>
+              <a:rPr lang="en-US" altLang="ko-KR" sz="1400" b="0" i="0" dirty="0">
+                <a:effectLst/>
+                <a:latin typeface="휴먼모음T" panose="02030504000101010101" pitchFamily="18" charset="-127"/>
+                <a:ea typeface="휴먼모음T" panose="02030504000101010101" pitchFamily="18" charset="-127"/>
+              </a:rPr>
+              <a:t> 5 0.2390 </a:t>
+            </a:r>
+          </a:p>
+          <a:p>
+            <a:r>
+              <a:rPr lang="en-US" altLang="ko-KR" sz="1400" b="0" i="0" dirty="0">
+                <a:effectLst/>
+                <a:latin typeface="휴먼모음T" panose="02030504000101010101" pitchFamily="18" charset="-127"/>
+                <a:ea typeface="휴먼모음T" panose="02030504000101010101" pitchFamily="18" charset="-127"/>
+              </a:rPr>
+              <a:t> 6 0.2230 </a:t>
+            </a:r>
+          </a:p>
+          <a:p>
+            <a:r>
+              <a:rPr lang="en-US" altLang="ko-KR" sz="1400" b="0" i="0" dirty="0">
+                <a:effectLst/>
+                <a:latin typeface="휴먼모음T" panose="02030504000101010101" pitchFamily="18" charset="-127"/>
+                <a:ea typeface="휴먼모음T" panose="02030504000101010101" pitchFamily="18" charset="-127"/>
+              </a:rPr>
+              <a:t> 7 0.1050 </a:t>
+            </a:r>
+          </a:p>
+          <a:p>
+            <a:r>
+              <a:rPr lang="en-US" altLang="ko-KR" sz="1400" b="0" i="0" dirty="0">
+                <a:solidFill>
+                  <a:srgbClr val="FF0000"/>
+                </a:solidFill>
+                <a:effectLst/>
+                <a:latin typeface="휴먼모음T" panose="02030504000101010101" pitchFamily="18" charset="-127"/>
+                <a:ea typeface="휴먼모음T" panose="02030504000101010101" pitchFamily="18" charset="-127"/>
+              </a:rPr>
+              <a:t> 8 0.0400 </a:t>
+            </a:r>
+          </a:p>
+          <a:p>
+            <a:r>
+              <a:rPr lang="en-US" altLang="ko-KR" sz="1400" b="0" i="0" dirty="0">
+                <a:solidFill>
+                  <a:srgbClr val="FF0000"/>
+                </a:solidFill>
+                <a:effectLst/>
+                <a:latin typeface="휴먼모음T" panose="02030504000101010101" pitchFamily="18" charset="-127"/>
+                <a:ea typeface="휴먼모음T" panose="02030504000101010101" pitchFamily="18" charset="-127"/>
+              </a:rPr>
+              <a:t> 9 0.0070 </a:t>
+            </a:r>
+          </a:p>
+          <a:p>
+            <a:r>
+              <a:rPr lang="en-US" altLang="ko-KR" sz="1400" b="0" i="0" dirty="0">
+                <a:solidFill>
+                  <a:srgbClr val="FF0000"/>
+                </a:solidFill>
+                <a:effectLst/>
+                <a:latin typeface="휴먼모음T" panose="02030504000101010101" pitchFamily="18" charset="-127"/>
+                <a:ea typeface="휴먼모음T" panose="02030504000101010101" pitchFamily="18" charset="-127"/>
+              </a:rPr>
+              <a:t>10 0.0010</a:t>
+            </a:r>
+          </a:p>
+          <a:p>
+            <a:endParaRPr lang="en-US" altLang="ko-KR" sz="1400" dirty="0">
+              <a:solidFill>
+                <a:srgbClr val="FF0000"/>
+              </a:solidFill>
+              <a:latin typeface="휴먼모음T" panose="02030504000101010101" pitchFamily="18" charset="-127"/>
+              <a:ea typeface="휴먼모음T" panose="02030504000101010101" pitchFamily="18" charset="-127"/>
+            </a:endParaRPr>
+          </a:p>
+          <a:p>
+            <a:r>
+              <a:rPr lang="ko-KR" altLang="en-US" sz="1400" dirty="0">
+                <a:latin typeface="휴먼모음T" panose="02030504000101010101" pitchFamily="18" charset="-127"/>
+                <a:ea typeface="휴먼모음T" panose="02030504000101010101" pitchFamily="18" charset="-127"/>
+              </a:rPr>
+              <a:t>비율을 다 더하면 </a:t>
+            </a:r>
+            <a:r>
+              <a:rPr lang="en-US" altLang="ko-KR" sz="1400" dirty="0">
+                <a:latin typeface="휴먼모음T" panose="02030504000101010101" pitchFamily="18" charset="-127"/>
+                <a:ea typeface="휴먼모음T" panose="02030504000101010101" pitchFamily="18" charset="-127"/>
+              </a:rPr>
+              <a:t>1.00</a:t>
+            </a:r>
+            <a:endParaRPr lang="ko-KR" altLang="en-US" sz="1400" dirty="0">
+              <a:latin typeface="휴먼모음T" panose="02030504000101010101" pitchFamily="18" charset="-127"/>
+              <a:ea typeface="휴먼모음T" panose="02030504000101010101" pitchFamily="18" charset="-127"/>
+            </a:endParaRPr>
+          </a:p>
+        </p:txBody>
+      </p:sp>
+      <p:pic>
+        <p:nvPicPr>
+          <p:cNvPr id="5125" name="Picture 5">
+            <a:extLst>
+              <a:ext uri="{FF2B5EF4-FFF2-40B4-BE49-F238E27FC236}">
+                <a16:creationId xmlns:a16="http://schemas.microsoft.com/office/drawing/2014/main" id="{3C765005-FE41-0C4E-3F64-1257638E1B86}"/>
+              </a:ext>
+            </a:extLst>
+          </p:cNvPr>
+          <p:cNvPicPr>
+            <a:picLocks noChangeAspect="1" noChangeArrowheads="1"/>
+          </p:cNvPicPr>
+          <p:nvPr/>
+        </p:nvPicPr>
+        <p:blipFill>
+          <a:blip r:embed="rId3">
+            <a:extLst>
+              <a:ext uri="{28A0092B-C50C-407E-A947-70E740481C1C}">
+                <a14:useLocalDpi xmlns:a14="http://schemas.microsoft.com/office/drawing/2010/main" val="0"/>
+              </a:ext>
+            </a:extLst>
+          </a:blip>
+          <a:srcRect/>
+          <a:stretch>
+            <a:fillRect/>
+          </a:stretch>
+        </p:blipFill>
+        <p:spPr bwMode="auto">
+          <a:xfrm>
+            <a:off x="316302" y="2755721"/>
+            <a:ext cx="5603155" cy="3600630"/>
+          </a:xfrm>
+          <a:prstGeom prst="rect">
+            <a:avLst/>
+          </a:prstGeom>
+          <a:noFill/>
+          <a:extLst>
+            <a:ext uri="{909E8E84-426E-40DD-AFC4-6F175D3DCCD1}">
+              <a14:hiddenFill xmlns:a14="http://schemas.microsoft.com/office/drawing/2010/main">
+                <a:solidFill>
+                  <a:srgbClr val="FFFFFF"/>
+                </a:solidFill>
+              </a14:hiddenFill>
+            </a:ext>
+          </a:extLst>
+        </p:spPr>
+      </p:pic>
+      <p:sp>
+        <p:nvSpPr>
+          <p:cNvPr id="9" name="화살표: 오른쪽 8">
+            <a:extLst>
+              <a:ext uri="{FF2B5EF4-FFF2-40B4-BE49-F238E27FC236}">
+                <a16:creationId xmlns:a16="http://schemas.microsoft.com/office/drawing/2014/main" id="{3DEAD083-D828-6D4D-C882-C46563CFEC18}"/>
+              </a:ext>
+            </a:extLst>
+          </p:cNvPr>
+          <p:cNvSpPr/>
+          <p:nvPr/>
+        </p:nvSpPr>
+        <p:spPr>
+          <a:xfrm rot="16200000">
+            <a:off x="4114192" y="6230337"/>
+            <a:ext cx="468052" cy="252028"/>
+          </a:xfrm>
+          <a:prstGeom prst="rightArrow">
+            <a:avLst/>
+          </a:prstGeom>
+          <a:solidFill>
+            <a:srgbClr val="FF0000"/>
+          </a:solidFill>
+          <a:ln>
+            <a:solidFill>
+              <a:srgbClr val="FF0000"/>
+            </a:solidFill>
+          </a:ln>
+        </p:spPr>
+        <p:style>
+          <a:lnRef idx="2">
+            <a:schemeClr val="accent1">
+              <a:shade val="15000"/>
+            </a:schemeClr>
+          </a:lnRef>
+          <a:fillRef idx="1">
+            <a:schemeClr val="accent1"/>
+          </a:fillRef>
+          <a:effectRef idx="0">
+            <a:schemeClr val="accent1"/>
+          </a:effectRef>
+          <a:fontRef idx="minor">
+            <a:schemeClr val="lt1"/>
+          </a:fontRef>
+        </p:style>
+        <p:txBody>
+          <a:bodyPr rtlCol="0" anchor="ctr"/>
+          <a:lstStyle/>
+          <a:p>
+            <a:pPr algn="ctr"/>
+            <a:endParaRPr lang="ko-KR" altLang="en-US"/>
+          </a:p>
+        </p:txBody>
+      </p:sp>
+    </p:spTree>
+    <p:extLst>
+      <p:ext uri="{BB962C8B-B14F-4D97-AF65-F5344CB8AC3E}">
+        <p14:creationId xmlns:p14="http://schemas.microsoft.com/office/powerpoint/2010/main" val="2071934045"/>
+      </p:ext>
+    </p:extLst>
+  </p:cSld>
+  <p:clrMapOvr>
+    <a:masterClrMapping/>
+  </p:clrMapOvr>
+  <mc:AlternateContent xmlns:mc="http://schemas.openxmlformats.org/markup-compatibility/2006" xmlns:p14="http://schemas.microsoft.com/office/powerpoint/2010/main">
+    <mc:Choice Requires="p14">
+      <p:transition spd="med" p14:dur="700">
+        <p:fade/>
+      </p:transition>
+    </mc:Choice>
+    <mc:Fallback xmlns="">
+      <p:transition spd="med">
+        <p:fade/>
+      </p:transition>
+    </mc:Fallback>
+  </mc:AlternateContent>
+</p:sld>
+</file>
+
+<file path=ppt/slides/slide3.xml><?xml version="1.0" encoding="utf-8"?>
+<p:sld xmlns:a="http://schemas.openxmlformats.org/drawingml/2006/main" xmlns:r="http://schemas.openxmlformats.org/officeDocument/2006/relationships" xmlns:p="http://schemas.openxmlformats.org/presentationml/2006/main">
+  <p:cSld>
+    <p:spTree>
+      <p:nvGrpSpPr>
+        <p:cNvPr id="1" name="">
+          <a:extLst>
+            <a:ext uri="{FF2B5EF4-FFF2-40B4-BE49-F238E27FC236}">
+              <a16:creationId xmlns:a16="http://schemas.microsoft.com/office/drawing/2014/main" id="{C6226249-DF82-F305-751E-127F3A71C29B}"/>
+            </a:ext>
+          </a:extLst>
+        </p:cNvPr>
+        <p:cNvGrpSpPr/>
+        <p:nvPr/>
+      </p:nvGrpSpPr>
+      <p:grpSpPr>
+        <a:xfrm>
+          <a:off x="0" y="0"/>
+          <a:ext cx="0" cy="0"/>
+          <a:chOff x="0" y="0"/>
+          <a:chExt cx="0" cy="0"/>
+        </a:xfrm>
+      </p:grpSpPr>
+      <p:sp>
+        <p:nvSpPr>
+          <p:cNvPr id="3" name="직사각형 2">
+            <a:extLst>
+              <a:ext uri="{FF2B5EF4-FFF2-40B4-BE49-F238E27FC236}">
+                <a16:creationId xmlns:a16="http://schemas.microsoft.com/office/drawing/2014/main" id="{65A9C867-CB37-476A-DE58-40E42281C49F}"/>
+              </a:ext>
+            </a:extLst>
+          </p:cNvPr>
+          <p:cNvSpPr/>
+          <p:nvPr/>
+        </p:nvSpPr>
+        <p:spPr>
+          <a:xfrm>
+            <a:off x="598421" y="1484784"/>
+            <a:ext cx="8136904" cy="674850"/>
+          </a:xfrm>
+          <a:prstGeom prst="rect">
+            <a:avLst/>
+          </a:prstGeom>
+          <a:solidFill>
+            <a:schemeClr val="bg1">
+              <a:lumMod val="85000"/>
+            </a:schemeClr>
+          </a:solidFill>
+          <a:ln>
+            <a:noFill/>
+          </a:ln>
+        </p:spPr>
+        <p:style>
+          <a:lnRef idx="2">
+            <a:schemeClr val="accent1">
+              <a:shade val="15000"/>
+            </a:schemeClr>
+          </a:lnRef>
+          <a:fillRef idx="1">
+            <a:schemeClr val="accent1"/>
+          </a:fillRef>
+          <a:effectRef idx="0">
+            <a:schemeClr val="accent1"/>
+          </a:effectRef>
+          <a:fontRef idx="minor">
+            <a:schemeClr val="lt1"/>
+          </a:fontRef>
+        </p:style>
+        <p:txBody>
+          <a:bodyPr rtlCol="0" anchor="ctr"/>
+          <a:lstStyle/>
+          <a:p>
+            <a:pPr algn="ctr"/>
+            <a:endParaRPr lang="ko-KR" altLang="en-US" dirty="0"/>
+          </a:p>
+        </p:txBody>
+      </p:sp>
+      <p:sp>
+        <p:nvSpPr>
+          <p:cNvPr id="8" name="슬라이드 번호 개체 틀 7">
+            <a:extLst>
+              <a:ext uri="{FF2B5EF4-FFF2-40B4-BE49-F238E27FC236}">
+                <a16:creationId xmlns:a16="http://schemas.microsoft.com/office/drawing/2014/main" id="{78B211BD-7338-379D-8BC3-3149D048B4DD}"/>
+              </a:ext>
+            </a:extLst>
+          </p:cNvPr>
+          <p:cNvSpPr>
+            <a:spLocks noGrp="1"/>
+          </p:cNvSpPr>
+          <p:nvPr>
+            <p:ph type="sldNum" sz="quarter" idx="12"/>
+          </p:nvPr>
+        </p:nvSpPr>
+        <p:spPr/>
+        <p:txBody>
+          <a:bodyPr/>
+          <a:lstStyle/>
+          <a:p>
+            <a:pPr rtl="0"/>
+            <a:fld id="{A3F31473-23EB-4724-8B59-FE6D21D89FA4}" type="slidenum">
+              <a:rPr lang="en-US" altLang="ko-KR" noProof="0" smtClean="0"/>
+              <a:t>3</a:t>
+            </a:fld>
+            <a:endParaRPr lang="en-US" altLang="ko-KR" noProof="0" dirty="0"/>
+          </a:p>
+        </p:txBody>
+      </p:sp>
+      <p:sp>
+        <p:nvSpPr>
+          <p:cNvPr id="2" name="TextBox 1">
+            <a:extLst>
+              <a:ext uri="{FF2B5EF4-FFF2-40B4-BE49-F238E27FC236}">
+                <a16:creationId xmlns:a16="http://schemas.microsoft.com/office/drawing/2014/main" id="{86786082-2314-C632-A520-B7C165520AFC}"/>
+              </a:ext>
+            </a:extLst>
+          </p:cNvPr>
+          <p:cNvSpPr txBox="1"/>
+          <p:nvPr/>
+        </p:nvSpPr>
+        <p:spPr>
+          <a:xfrm>
+            <a:off x="1629916" y="147612"/>
+            <a:ext cx="8928992" cy="4691669"/>
+          </a:xfrm>
+          <a:prstGeom prst="rect">
+            <a:avLst/>
+          </a:prstGeom>
+          <a:noFill/>
+        </p:spPr>
+        <p:txBody>
+          <a:bodyPr wrap="square" rtlCol="0">
+            <a:spAutoFit/>
+          </a:bodyPr>
+          <a:lstStyle/>
+          <a:p>
+            <a:pPr>
+              <a:lnSpc>
+                <a:spcPct val="200000"/>
+              </a:lnSpc>
+              <a:spcBef>
+                <a:spcPts val="600"/>
+              </a:spcBef>
+            </a:pPr>
+            <a:r>
+              <a:rPr lang="ko-KR" altLang="en-US" sz="4000" b="1" dirty="0">
+                <a:latin typeface="한컴 말랑말랑 Bold" panose="020F0803000000000000" pitchFamily="50" charset="-127"/>
+                <a:ea typeface="한컴 말랑말랑 Bold" panose="020F0803000000000000" pitchFamily="50" charset="-127"/>
+              </a:rPr>
+              <a:t>목차</a:t>
+            </a:r>
+            <a:endParaRPr lang="en-US" altLang="ko-KR" sz="4000" b="1" dirty="0">
+              <a:latin typeface="한컴 말랑말랑 Bold" panose="020F0803000000000000" pitchFamily="50" charset="-127"/>
+              <a:ea typeface="한컴 말랑말랑 Bold" panose="020F0803000000000000" pitchFamily="50" charset="-127"/>
+            </a:endParaRPr>
+          </a:p>
+          <a:p>
+            <a:pPr marL="514350" indent="-514350">
+              <a:lnSpc>
+                <a:spcPct val="200000"/>
+              </a:lnSpc>
+              <a:spcBef>
+                <a:spcPts val="600"/>
+              </a:spcBef>
+              <a:buAutoNum type="arabicPeriod"/>
+            </a:pPr>
+            <a:r>
+              <a:rPr lang="ko-KR" altLang="en-US" sz="2000" b="1" dirty="0">
+                <a:latin typeface="한컴 말랑말랑 Bold" panose="020F0803000000000000" pitchFamily="50" charset="-127"/>
+                <a:ea typeface="한컴 말랑말랑 Bold" panose="020F0803000000000000" pitchFamily="50" charset="-127"/>
+              </a:rPr>
+              <a:t>추정</a:t>
+            </a:r>
+            <a:r>
+              <a:rPr lang="en-US" altLang="ko-KR" sz="2000" b="1" dirty="0">
+                <a:latin typeface="한컴 말랑말랑 Bold" panose="020F0803000000000000" pitchFamily="50" charset="-127"/>
+                <a:ea typeface="한컴 말랑말랑 Bold" panose="020F0803000000000000" pitchFamily="50" charset="-127"/>
+              </a:rPr>
+              <a:t>(Estimation)</a:t>
+            </a:r>
+          </a:p>
+          <a:p>
+            <a:pPr marL="514350" indent="-514350">
+              <a:lnSpc>
+                <a:spcPct val="200000"/>
+              </a:lnSpc>
+              <a:spcBef>
+                <a:spcPts val="600"/>
+              </a:spcBef>
+              <a:buAutoNum type="arabicPeriod"/>
+            </a:pPr>
+            <a:r>
+              <a:rPr lang="ko-KR" altLang="en-US" sz="2000" b="1" dirty="0">
+                <a:latin typeface="한컴 말랑말랑 Bold" panose="020F0803000000000000" pitchFamily="50" charset="-127"/>
+                <a:ea typeface="한컴 말랑말랑 Bold" panose="020F0803000000000000" pitchFamily="50" charset="-127"/>
+              </a:rPr>
+              <a:t>점</a:t>
+            </a:r>
+            <a:r>
+              <a:rPr lang="en-US" altLang="ko-KR" sz="2000" b="1" dirty="0">
+                <a:latin typeface="한컴 말랑말랑 Bold" panose="020F0803000000000000" pitchFamily="50" charset="-127"/>
+                <a:ea typeface="한컴 말랑말랑 Bold" panose="020F0803000000000000" pitchFamily="50" charset="-127"/>
+              </a:rPr>
+              <a:t> </a:t>
+            </a:r>
+            <a:r>
+              <a:rPr lang="ko-KR" altLang="en-US" sz="2000" b="1" dirty="0">
+                <a:latin typeface="한컴 말랑말랑 Bold" panose="020F0803000000000000" pitchFamily="50" charset="-127"/>
+                <a:ea typeface="한컴 말랑말랑 Bold" panose="020F0803000000000000" pitchFamily="50" charset="-127"/>
+              </a:rPr>
+              <a:t>추정</a:t>
+            </a:r>
+            <a:r>
+              <a:rPr lang="en-US" altLang="ko-KR" sz="2000" b="1" dirty="0">
+                <a:latin typeface="한컴 말랑말랑 Bold" panose="020F0803000000000000" pitchFamily="50" charset="-127"/>
+                <a:ea typeface="한컴 말랑말랑 Bold" panose="020F0803000000000000" pitchFamily="50" charset="-127"/>
+              </a:rPr>
+              <a:t>(Point Estimation)</a:t>
+            </a:r>
+          </a:p>
+          <a:p>
+            <a:pPr marL="514350" indent="-514350">
+              <a:lnSpc>
+                <a:spcPct val="200000"/>
+              </a:lnSpc>
+              <a:spcBef>
+                <a:spcPts val="600"/>
+              </a:spcBef>
+              <a:buAutoNum type="arabicPeriod"/>
+            </a:pPr>
+            <a:r>
+              <a:rPr lang="ko-KR" altLang="en-US" sz="2000" b="1" dirty="0">
+                <a:latin typeface="한컴 말랑말랑 Bold" panose="020F0803000000000000" pitchFamily="50" charset="-127"/>
+                <a:ea typeface="한컴 말랑말랑 Bold" panose="020F0803000000000000" pitchFamily="50" charset="-127"/>
+              </a:rPr>
+              <a:t>구간</a:t>
+            </a:r>
+            <a:r>
+              <a:rPr lang="en-US" altLang="ko-KR" sz="2000" b="1" dirty="0">
+                <a:latin typeface="한컴 말랑말랑 Bold" panose="020F0803000000000000" pitchFamily="50" charset="-127"/>
+                <a:ea typeface="한컴 말랑말랑 Bold" panose="020F0803000000000000" pitchFamily="50" charset="-127"/>
+              </a:rPr>
+              <a:t> </a:t>
+            </a:r>
+            <a:r>
+              <a:rPr lang="ko-KR" altLang="en-US" sz="2000" b="1" dirty="0">
+                <a:latin typeface="한컴 말랑말랑 Bold" panose="020F0803000000000000" pitchFamily="50" charset="-127"/>
+                <a:ea typeface="한컴 말랑말랑 Bold" panose="020F0803000000000000" pitchFamily="50" charset="-127"/>
+              </a:rPr>
+              <a:t>추정</a:t>
+            </a:r>
+            <a:r>
+              <a:rPr lang="en-US" altLang="ko-KR" sz="2000" b="1" dirty="0">
+                <a:latin typeface="한컴 말랑말랑 Bold" panose="020F0803000000000000" pitchFamily="50" charset="-127"/>
+                <a:ea typeface="한컴 말랑말랑 Bold" panose="020F0803000000000000" pitchFamily="50" charset="-127"/>
+              </a:rPr>
+              <a:t>(Interval Estimation)</a:t>
+            </a:r>
+          </a:p>
+          <a:p>
+            <a:pPr marL="514350" indent="-514350">
+              <a:lnSpc>
+                <a:spcPct val="200000"/>
+              </a:lnSpc>
+              <a:spcBef>
+                <a:spcPts val="600"/>
+              </a:spcBef>
+              <a:buAutoNum type="arabicPeriod"/>
+            </a:pPr>
+            <a:r>
+              <a:rPr lang="ko-KR" altLang="en-US" sz="2000" b="1" dirty="0">
+                <a:latin typeface="한컴 말랑말랑 Bold" panose="020F0803000000000000" pitchFamily="50" charset="-127"/>
+                <a:ea typeface="한컴 말랑말랑 Bold" panose="020F0803000000000000" pitchFamily="50" charset="-127"/>
+              </a:rPr>
+              <a:t>신뢰구간</a:t>
+            </a:r>
+            <a:r>
+              <a:rPr lang="en-US" altLang="ko-KR" sz="2000" b="1" dirty="0">
+                <a:latin typeface="한컴 말랑말랑 Bold" panose="020F0803000000000000" pitchFamily="50" charset="-127"/>
+                <a:ea typeface="한컴 말랑말랑 Bold" panose="020F0803000000000000" pitchFamily="50" charset="-127"/>
+              </a:rPr>
+              <a:t>(Confidence Interval)</a:t>
+            </a:r>
+          </a:p>
+          <a:p>
+            <a:pPr marL="514350" indent="-514350">
+              <a:lnSpc>
+                <a:spcPct val="200000"/>
+              </a:lnSpc>
+              <a:spcBef>
+                <a:spcPts val="600"/>
+              </a:spcBef>
+              <a:buAutoNum type="arabicPeriod"/>
+            </a:pPr>
+            <a:endParaRPr lang="en-US" altLang="ko-KR" sz="2000" b="1" dirty="0">
+              <a:latin typeface="한컴 말랑말랑 Bold" panose="020F0803000000000000" pitchFamily="50" charset="-127"/>
+              <a:ea typeface="한컴 말랑말랑 Bold" panose="020F0803000000000000" pitchFamily="50" charset="-127"/>
+            </a:endParaRPr>
+          </a:p>
+        </p:txBody>
+      </p:sp>
+    </p:spTree>
+    <p:extLst>
+      <p:ext uri="{BB962C8B-B14F-4D97-AF65-F5344CB8AC3E}">
+        <p14:creationId xmlns:p14="http://schemas.microsoft.com/office/powerpoint/2010/main" val="2194691769"/>
+      </p:ext>
+    </p:extLst>
+  </p:cSld>
+  <p:clrMapOvr>
+    <a:masterClrMapping/>
+  </p:clrMapOvr>
+  <mc:AlternateContent xmlns:mc="http://schemas.openxmlformats.org/markup-compatibility/2006" xmlns:p14="http://schemas.microsoft.com/office/powerpoint/2010/main">
+    <mc:Choice Requires="p14">
+      <p:transition spd="med" p14:dur="700">
+        <p:fade/>
+      </p:transition>
+    </mc:Choice>
+    <mc:Fallback xmlns="">
+      <p:transition spd="med">
+        <p:fade/>
+      </p:transition>
+    </mc:Fallback>
+  </mc:AlternateContent>
+</p:sld>
+</file>
+
+<file path=ppt/slides/slide4.xml><?xml version="1.0" encoding="utf-8"?>
+<p:sld xmlns:a="http://schemas.openxmlformats.org/drawingml/2006/main" xmlns:r="http://schemas.openxmlformats.org/officeDocument/2006/relationships" xmlns:p="http://schemas.openxmlformats.org/presentationml/2006/main">
+  <p:cSld>
+    <p:spTree>
+      <p:nvGrpSpPr>
         <p:cNvPr id="1" name=""/>
         <p:cNvGrpSpPr/>
         <p:nvPr/>
@@ -6699,7 +10423,7 @@
             <a:pPr rtl="0"/>
             <a:fld id="{A3F31473-23EB-4724-8B59-FE6D21D89FA4}" type="slidenum">
               <a:rPr lang="en-US" altLang="ko-KR" noProof="0" smtClean="0"/>
-              <a:t>2</a:t>
+              <a:t>4</a:t>
             </a:fld>
             <a:endParaRPr lang="en-US" altLang="ko-KR" noProof="0" dirty="0"/>
           </a:p>
@@ -6917,7 +10641,7 @@
 </p:sld>
 </file>
 
-<file path=ppt/slides/slide3.xml><?xml version="1.0" encoding="utf-8"?>
+<file path=ppt/slides/slide5.xml><?xml version="1.0" encoding="utf-8"?>
 <p:sld xmlns:a="http://schemas.openxmlformats.org/drawingml/2006/main" xmlns:r="http://schemas.openxmlformats.org/officeDocument/2006/relationships" xmlns:p="http://schemas.openxmlformats.org/presentationml/2006/main">
   <p:cSld>
     <p:spTree>
@@ -6952,7 +10676,7 @@
             <a:pPr rtl="0"/>
             <a:fld id="{A3F31473-23EB-4724-8B59-FE6D21D89FA4}" type="slidenum">
               <a:rPr lang="en-US" altLang="ko-KR" noProof="0" smtClean="0"/>
-              <a:t>3</a:t>
+              <a:t>5</a:t>
             </a:fld>
             <a:endParaRPr lang="en-US" altLang="ko-KR" noProof="0" dirty="0"/>
           </a:p>
@@ -7007,7 +10731,7 @@
 </p:sld>
 </file>
 
-<file path=ppt/slides/slide4.xml><?xml version="1.0" encoding="utf-8"?>
+<file path=ppt/slides/slide6.xml><?xml version="1.0" encoding="utf-8"?>
 <p:sld xmlns:a="http://schemas.openxmlformats.org/drawingml/2006/main" xmlns:r="http://schemas.openxmlformats.org/officeDocument/2006/relationships" xmlns:p="http://schemas.openxmlformats.org/presentationml/2006/main">
   <p:cSld>
     <p:spTree>
@@ -7042,7 +10766,7 @@
             <a:pPr rtl="0"/>
             <a:fld id="{A3F31473-23EB-4724-8B59-FE6D21D89FA4}" type="slidenum">
               <a:rPr lang="en-US" altLang="ko-KR" noProof="0" smtClean="0"/>
-              <a:t>4</a:t>
+              <a:t>6</a:t>
             </a:fld>
             <a:endParaRPr lang="en-US" altLang="ko-KR" noProof="0" dirty="0"/>
           </a:p>
@@ -7097,7 +10821,7 @@
 </p:sld>
 </file>
 
-<file path=ppt/slides/slide5.xml><?xml version="1.0" encoding="utf-8"?>
+<file path=ppt/slides/slide7.xml><?xml version="1.0" encoding="utf-8"?>
 <p:sld xmlns:a="http://schemas.openxmlformats.org/drawingml/2006/main" xmlns:r="http://schemas.openxmlformats.org/officeDocument/2006/relationships" xmlns:p="http://schemas.openxmlformats.org/presentationml/2006/main">
   <p:cSld>
     <p:spTree>
@@ -7132,7 +10856,7 @@
             <a:pPr rtl="0"/>
             <a:fld id="{A3F31473-23EB-4724-8B59-FE6D21D89FA4}" type="slidenum">
               <a:rPr lang="en-US" altLang="ko-KR" noProof="0" smtClean="0"/>
-              <a:t>5</a:t>
+              <a:t>7</a:t>
             </a:fld>
             <a:endParaRPr lang="en-US" altLang="ko-KR" noProof="0" dirty="0"/>
           </a:p>
@@ -7187,7 +10911,7 @@
 </p:sld>
 </file>
 
-<file path=ppt/slides/slide6.xml><?xml version="1.0" encoding="utf-8"?>
+<file path=ppt/slides/slide8.xml><?xml version="1.0" encoding="utf-8"?>
 <p:sld xmlns:a="http://schemas.openxmlformats.org/drawingml/2006/main" xmlns:r="http://schemas.openxmlformats.org/officeDocument/2006/relationships" xmlns:p="http://schemas.openxmlformats.org/presentationml/2006/main">
   <p:cSld>
     <p:spTree>
@@ -7222,7 +10946,7 @@
             <a:pPr rtl="0"/>
             <a:fld id="{A3F31473-23EB-4724-8B59-FE6D21D89FA4}" type="slidenum">
               <a:rPr lang="en-US" altLang="ko-KR" noProof="0" smtClean="0"/>
-              <a:t>6</a:t>
+              <a:t>8</a:t>
             </a:fld>
             <a:endParaRPr lang="en-US" altLang="ko-KR" noProof="0" dirty="0"/>
           </a:p>
@@ -7363,7 +11087,7 @@
 </p:sld>
 </file>
 
-<file path=ppt/slides/slide7.xml><?xml version="1.0" encoding="utf-8"?>
+<file path=ppt/slides/slide9.xml><?xml version="1.0" encoding="utf-8"?>
 <p:sld xmlns:a="http://schemas.openxmlformats.org/drawingml/2006/main" xmlns:r="http://schemas.openxmlformats.org/officeDocument/2006/relationships" xmlns:p="http://schemas.openxmlformats.org/presentationml/2006/main">
   <p:cSld>
     <p:spTree>
@@ -7410,7 +11134,7 @@
             <a:pPr rtl="0"/>
             <a:fld id="{A3F31473-23EB-4724-8B59-FE6D21D89FA4}" type="slidenum">
               <a:rPr lang="en-US" altLang="ko-KR" noProof="0" smtClean="0"/>
-              <a:t>7</a:t>
+              <a:t>9</a:t>
             </a:fld>
             <a:endParaRPr lang="en-US" altLang="ko-KR" noProof="0" dirty="0"/>
           </a:p>
@@ -7639,237 +11363,6 @@
     <p:extLst>
       <p:ext uri="{BB962C8B-B14F-4D97-AF65-F5344CB8AC3E}">
         <p14:creationId xmlns:p14="http://schemas.microsoft.com/office/powerpoint/2010/main" val="2011196701"/>
-      </p:ext>
-    </p:extLst>
-  </p:cSld>
-  <p:clrMapOvr>
-    <a:masterClrMapping/>
-  </p:clrMapOvr>
-  <mc:AlternateContent xmlns:mc="http://schemas.openxmlformats.org/markup-compatibility/2006" xmlns:p14="http://schemas.microsoft.com/office/powerpoint/2010/main">
-    <mc:Choice Requires="p14">
-      <p:transition spd="med" p14:dur="700">
-        <p:fade/>
-      </p:transition>
-    </mc:Choice>
-    <mc:Fallback xmlns="">
-      <p:transition spd="med">
-        <p:fade/>
-      </p:transition>
-    </mc:Fallback>
-  </mc:AlternateContent>
-</p:sld>
-</file>
-
-<file path=ppt/slides/slide8.xml><?xml version="1.0" encoding="utf-8"?>
-<p:sld xmlns:a="http://schemas.openxmlformats.org/drawingml/2006/main" xmlns:r="http://schemas.openxmlformats.org/officeDocument/2006/relationships" xmlns:p="http://schemas.openxmlformats.org/presentationml/2006/main">
-  <p:cSld>
-    <p:spTree>
-      <p:nvGrpSpPr>
-        <p:cNvPr id="1" name=""/>
-        <p:cNvGrpSpPr/>
-        <p:nvPr/>
-      </p:nvGrpSpPr>
-      <p:grpSpPr>
-        <a:xfrm>
-          <a:off x="0" y="0"/>
-          <a:ext cx="0" cy="0"/>
-          <a:chOff x="0" y="0"/>
-          <a:chExt cx="0" cy="0"/>
-        </a:xfrm>
-      </p:grpSpPr>
-      <p:sp>
-        <p:nvSpPr>
-          <p:cNvPr id="8" name="슬라이드 번호 개체 틀 7"/>
-          <p:cNvSpPr>
-            <a:spLocks noGrp="1"/>
-          </p:cNvSpPr>
-          <p:nvPr>
-            <p:ph type="sldNum" sz="quarter" idx="12"/>
-          </p:nvPr>
-        </p:nvSpPr>
-        <p:spPr/>
-        <p:txBody>
-          <a:bodyPr/>
-          <a:lstStyle/>
-          <a:p>
-            <a:pPr rtl="0"/>
-            <a:fld id="{A3F31473-23EB-4724-8B59-FE6D21D89FA4}" type="slidenum">
-              <a:rPr lang="en-US" altLang="ko-KR" noProof="0" smtClean="0"/>
-              <a:t>8</a:t>
-            </a:fld>
-            <a:endParaRPr lang="en-US" altLang="ko-KR" noProof="0" dirty="0"/>
-          </a:p>
-        </p:txBody>
-      </p:sp>
-      <p:pic>
-        <p:nvPicPr>
-          <p:cNvPr id="2" name="그림 1"/>
-          <p:cNvPicPr>
-            <a:picLocks noChangeAspect="1"/>
-          </p:cNvPicPr>
-          <p:nvPr/>
-        </p:nvPicPr>
-        <p:blipFill>
-          <a:blip r:embed="rId3"/>
-          <a:stretch>
-            <a:fillRect/>
-          </a:stretch>
-        </p:blipFill>
-        <p:spPr>
-          <a:xfrm>
-            <a:off x="2349996" y="836712"/>
-            <a:ext cx="8159176" cy="5519639"/>
-          </a:xfrm>
-          <a:prstGeom prst="rect">
-            <a:avLst/>
-          </a:prstGeom>
-        </p:spPr>
-      </p:pic>
-    </p:spTree>
-    <p:extLst>
-      <p:ext uri="{BB962C8B-B14F-4D97-AF65-F5344CB8AC3E}">
-        <p14:creationId xmlns:p14="http://schemas.microsoft.com/office/powerpoint/2010/main" val="3590809602"/>
-      </p:ext>
-    </p:extLst>
-  </p:cSld>
-  <p:clrMapOvr>
-    <a:masterClrMapping/>
-  </p:clrMapOvr>
-  <mc:AlternateContent xmlns:mc="http://schemas.openxmlformats.org/markup-compatibility/2006" xmlns:p14="http://schemas.microsoft.com/office/powerpoint/2010/main">
-    <mc:Choice Requires="p14">
-      <p:transition spd="med" p14:dur="700">
-        <p:fade/>
-      </p:transition>
-    </mc:Choice>
-    <mc:Fallback xmlns="">
-      <p:transition spd="med">
-        <p:fade/>
-      </p:transition>
-    </mc:Fallback>
-  </mc:AlternateContent>
-</p:sld>
-</file>
-
-<file path=ppt/slides/slide9.xml><?xml version="1.0" encoding="utf-8"?>
-<p:sld xmlns:a="http://schemas.openxmlformats.org/drawingml/2006/main" xmlns:r="http://schemas.openxmlformats.org/officeDocument/2006/relationships" xmlns:p="http://schemas.openxmlformats.org/presentationml/2006/main">
-  <p:cSld>
-    <p:spTree>
-      <p:nvGrpSpPr>
-        <p:cNvPr id="1" name=""/>
-        <p:cNvGrpSpPr/>
-        <p:nvPr/>
-      </p:nvGrpSpPr>
-      <p:grpSpPr>
-        <a:xfrm>
-          <a:off x="0" y="0"/>
-          <a:ext cx="0" cy="0"/>
-          <a:chOff x="0" y="0"/>
-          <a:chExt cx="0" cy="0"/>
-        </a:xfrm>
-      </p:grpSpPr>
-      <p:sp>
-        <p:nvSpPr>
-          <p:cNvPr id="8" name="슬라이드 번호 개체 틀 7"/>
-          <p:cNvSpPr>
-            <a:spLocks noGrp="1"/>
-          </p:cNvSpPr>
-          <p:nvPr>
-            <p:ph type="sldNum" sz="quarter" idx="12"/>
-          </p:nvPr>
-        </p:nvSpPr>
-        <p:spPr/>
-        <p:txBody>
-          <a:bodyPr/>
-          <a:lstStyle/>
-          <a:p>
-            <a:pPr rtl="0"/>
-            <a:fld id="{A3F31473-23EB-4724-8B59-FE6D21D89FA4}" type="slidenum">
-              <a:rPr lang="en-US" altLang="ko-KR" noProof="0" smtClean="0"/>
-              <a:t>9</a:t>
-            </a:fld>
-            <a:endParaRPr lang="en-US" altLang="ko-KR" noProof="0" dirty="0"/>
-          </a:p>
-        </p:txBody>
-      </p:sp>
-      <p:pic>
-        <p:nvPicPr>
-          <p:cNvPr id="2050" name="Picture 2" descr="https://wikidocs.net/images/page/163985/ci02.png"/>
-          <p:cNvPicPr>
-            <a:picLocks noChangeAspect="1" noChangeArrowheads="1"/>
-          </p:cNvPicPr>
-          <p:nvPr/>
-        </p:nvPicPr>
-        <p:blipFill>
-          <a:blip r:embed="rId3">
-            <a:extLst>
-              <a:ext uri="{28A0092B-C50C-407E-A947-70E740481C1C}">
-                <a14:useLocalDpi xmlns:a14="http://schemas.microsoft.com/office/drawing/2010/main" val="0"/>
-              </a:ext>
-            </a:extLst>
-          </a:blip>
-          <a:srcRect/>
-          <a:stretch>
-            <a:fillRect/>
-          </a:stretch>
-        </p:blipFill>
-        <p:spPr bwMode="auto">
-          <a:xfrm>
-            <a:off x="1718204" y="1484784"/>
-            <a:ext cx="8439150" cy="4105275"/>
-          </a:xfrm>
-          <a:prstGeom prst="rect">
-            <a:avLst/>
-          </a:prstGeom>
-          <a:noFill/>
-          <a:extLst>
-            <a:ext uri="{909E8E84-426E-40DD-AFC4-6F175D3DCCD1}">
-              <a14:hiddenFill xmlns:a14="http://schemas.microsoft.com/office/drawing/2010/main">
-                <a:solidFill>
-                  <a:srgbClr val="FFFFFF"/>
-                </a:solidFill>
-              </a14:hiddenFill>
-            </a:ext>
-          </a:extLst>
-        </p:spPr>
-      </p:pic>
-      <p:sp>
-        <p:nvSpPr>
-          <p:cNvPr id="2" name="직사각형 1"/>
-          <p:cNvSpPr/>
-          <p:nvPr/>
-        </p:nvSpPr>
-        <p:spPr>
-          <a:xfrm>
-            <a:off x="1629916" y="5661248"/>
-            <a:ext cx="2866490" cy="369332"/>
-          </a:xfrm>
-          <a:prstGeom prst="rect">
-            <a:avLst/>
-          </a:prstGeom>
-        </p:spPr>
-        <p:txBody>
-          <a:bodyPr wrap="none">
-            <a:spAutoFit/>
-          </a:bodyPr>
-          <a:lstStyle/>
-          <a:p>
-            <a:r>
-              <a:rPr lang="ko-KR" altLang="en-US" dirty="0">
-                <a:hlinkClick r:id="rId4"/>
-              </a:rPr>
-              <a:t>https://wikidocs.net/163985</a:t>
-            </a:r>
-            <a:r>
-              <a:rPr lang="ko-KR" altLang="en-US" dirty="0"/>
-              <a:t> </a:t>
-            </a:r>
-          </a:p>
-        </p:txBody>
-      </p:sp>
-    </p:spTree>
-    <p:extLst>
-      <p:ext uri="{BB962C8B-B14F-4D97-AF65-F5344CB8AC3E}">
-        <p14:creationId xmlns:p14="http://schemas.microsoft.com/office/powerpoint/2010/main" val="4127239139"/>
       </p:ext>
     </p:extLst>
   </p:cSld>
@@ -8692,26 +12185,6 @@
 </file>
 
 <file path=customXml/item1.xml><?xml version="1.0" encoding="utf-8"?>
-<?mso-contentType ?>
-<FormTemplates xmlns="http://schemas.microsoft.com/sharepoint/v3/contenttype/forms">
-  <Display>DocumentLibraryForm</Display>
-  <Edit>DocumentLibraryForm</Edit>
-  <New>DocumentLibraryForm</New>
-</FormTemplates>
-</file>
-
-<file path=customXml/item2.xml><?xml version="1.0" encoding="utf-8"?>
-<p:properties xmlns:p="http://schemas.microsoft.com/office/2006/metadata/properties" xmlns:xsi="http://www.w3.org/2001/XMLSchema-instance" xmlns:pc="http://schemas.microsoft.com/office/infopath/2007/PartnerControls">
-  <documentManagement>
-    <VSO_x0020_item_x0020_id xmlns="40262f94-9f35-4ac3-9a90-690165a166b7" xsi:nil="true"/>
-    <Assetid_x0020_ xmlns="40262f94-9f35-4ac3-9a90-690165a166b7" xsi:nil="true"/>
-    <Item_x0020_Details xmlns="40262f94-9f35-4ac3-9a90-690165a166b7" xsi:nil="true"/>
-    <Template_x0020_details xmlns="40262f94-9f35-4ac3-9a90-690165a166b7" xsi:nil="true"/>
-  </documentManagement>
-</p:properties>
-</file>
-
-<file path=customXml/item3.xml><?xml version="1.0" encoding="utf-8"?>
 <ct:contentTypeSchema xmlns:ct="http://schemas.microsoft.com/office/2006/metadata/contentType" xmlns:ma="http://schemas.microsoft.com/office/2006/metadata/properties/metaAttributes" ct:_="" ma:_="" ma:contentTypeName="Document" ma:contentTypeID="0x010100AA3F7D94069FF64A86F7DFF56D60E3BE" ma:contentTypeVersion="6" ma:contentTypeDescription="Create a new document." ma:contentTypeScope="" ma:versionID="c32302c77d4085ecf495bdddb7f5e889">
   <xsd:schema xmlns:xsd="http://www.w3.org/2001/XMLSchema" xmlns:xs="http://www.w3.org/2001/XMLSchema" xmlns:p="http://schemas.microsoft.com/office/2006/metadata/properties" xmlns:ns2="a4f35948-e619-41b3-aa29-22878b09cfd2" xmlns:ns3="40262f94-9f35-4ac3-9a90-690165a166b7" targetNamespace="http://schemas.microsoft.com/office/2006/metadata/properties" ma:root="true" ma:fieldsID="4ab5ae46be95f9d0be6107e8200be7a2" ns2:_="" ns3:_="">
     <xsd:import namespace="a4f35948-e619-41b3-aa29-22878b09cfd2"/>
@@ -8892,10 +12365,41 @@
 </ct:contentTypeSchema>
 </file>
 
+<file path=customXml/item2.xml><?xml version="1.0" encoding="utf-8"?>
+<p:properties xmlns:p="http://schemas.microsoft.com/office/2006/metadata/properties" xmlns:xsi="http://www.w3.org/2001/XMLSchema-instance" xmlns:pc="http://schemas.microsoft.com/office/infopath/2007/PartnerControls">
+  <documentManagement>
+    <VSO_x0020_item_x0020_id xmlns="40262f94-9f35-4ac3-9a90-690165a166b7" xsi:nil="true"/>
+    <Assetid_x0020_ xmlns="40262f94-9f35-4ac3-9a90-690165a166b7" xsi:nil="true"/>
+    <Item_x0020_Details xmlns="40262f94-9f35-4ac3-9a90-690165a166b7" xsi:nil="true"/>
+    <Template_x0020_details xmlns="40262f94-9f35-4ac3-9a90-690165a166b7" xsi:nil="true"/>
+  </documentManagement>
+</p:properties>
+</file>
+
+<file path=customXml/item3.xml><?xml version="1.0" encoding="utf-8"?>
+<?mso-contentType ?>
+<FormTemplates xmlns="http://schemas.microsoft.com/sharepoint/v3/contenttype/forms">
+  <Display>DocumentLibraryForm</Display>
+  <Edit>DocumentLibraryForm</Edit>
+  <New>DocumentLibraryForm</New>
+</FormTemplates>
+</file>
+
 <file path=customXml/itemProps1.xml><?xml version="1.0" encoding="utf-8"?>
-<ds:datastoreItem xmlns:ds="http://schemas.openxmlformats.org/officeDocument/2006/customXml" ds:itemID="{7F9B8BCC-BF24-4800-92E1-9F891BBB27E6}">
+<ds:datastoreItem xmlns:ds="http://schemas.openxmlformats.org/officeDocument/2006/customXml" ds:itemID="{5CCB2C71-1ED8-4540-B003-293B5E75C71F}">
   <ds:schemaRefs>
-    <ds:schemaRef ds:uri="http://schemas.microsoft.com/sharepoint/v3/contenttype/forms"/>
+    <ds:schemaRef ds:uri="http://schemas.microsoft.com/office/2006/metadata/contentType"/>
+    <ds:schemaRef ds:uri="http://schemas.microsoft.com/office/2006/metadata/properties/metaAttributes"/>
+    <ds:schemaRef ds:uri="http://www.w3.org/2001/XMLSchema"/>
+    <ds:schemaRef ds:uri="http://schemas.microsoft.com/office/2006/metadata/properties"/>
+    <ds:schemaRef ds:uri="a4f35948-e619-41b3-aa29-22878b09cfd2"/>
+    <ds:schemaRef ds:uri="40262f94-9f35-4ac3-9a90-690165a166b7"/>
+    <ds:schemaRef ds:uri="http://schemas.microsoft.com/office/2006/documentManagement/types"/>
+    <ds:schemaRef ds:uri="http://schemas.microsoft.com/office/infopath/2007/PartnerControls"/>
+    <ds:schemaRef ds:uri="http://schemas.openxmlformats.org/package/2006/metadata/core-properties"/>
+    <ds:schemaRef ds:uri="http://purl.org/dc/elements/1.1/"/>
+    <ds:schemaRef ds:uri="http://purl.org/dc/terms/"/>
+    <ds:schemaRef ds:uri="http://schemas.microsoft.com/internal/obd"/>
   </ds:schemaRefs>
 </ds:datastoreItem>
 </file>
@@ -8918,20 +12422,9 @@
 </file>
 
 <file path=customXml/itemProps3.xml><?xml version="1.0" encoding="utf-8"?>
-<ds:datastoreItem xmlns:ds="http://schemas.openxmlformats.org/officeDocument/2006/customXml" ds:itemID="{5CCB2C71-1ED8-4540-B003-293B5E75C71F}">
+<ds:datastoreItem xmlns:ds="http://schemas.openxmlformats.org/officeDocument/2006/customXml" ds:itemID="{7F9B8BCC-BF24-4800-92E1-9F891BBB27E6}">
   <ds:schemaRefs>
-    <ds:schemaRef ds:uri="http://schemas.microsoft.com/office/2006/metadata/contentType"/>
-    <ds:schemaRef ds:uri="http://schemas.microsoft.com/office/2006/metadata/properties/metaAttributes"/>
-    <ds:schemaRef ds:uri="http://www.w3.org/2001/XMLSchema"/>
-    <ds:schemaRef ds:uri="http://schemas.microsoft.com/office/2006/metadata/properties"/>
-    <ds:schemaRef ds:uri="a4f35948-e619-41b3-aa29-22878b09cfd2"/>
-    <ds:schemaRef ds:uri="40262f94-9f35-4ac3-9a90-690165a166b7"/>
-    <ds:schemaRef ds:uri="http://schemas.microsoft.com/office/2006/documentManagement/types"/>
-    <ds:schemaRef ds:uri="http://schemas.microsoft.com/office/infopath/2007/PartnerControls"/>
-    <ds:schemaRef ds:uri="http://schemas.openxmlformats.org/package/2006/metadata/core-properties"/>
-    <ds:schemaRef ds:uri="http://purl.org/dc/elements/1.1/"/>
-    <ds:schemaRef ds:uri="http://purl.org/dc/terms/"/>
-    <ds:schemaRef ds:uri="http://schemas.microsoft.com/internal/obd"/>
+    <ds:schemaRef ds:uri="http://schemas.microsoft.com/sharepoint/v3/contenttype/forms"/>
   </ds:schemaRefs>
 </ds:datastoreItem>
 </file>
--- a/3_Estimation.pptx
+++ b/3_Estimation.pptx
@@ -5,32 +5,33 @@
     <p:sldMasterId id="2147483648" r:id="rId4"/>
   </p:sldMasterIdLst>
   <p:notesMasterIdLst>
-    <p:notesMasterId r:id="rId25"/>
+    <p:notesMasterId r:id="rId26"/>
   </p:notesMasterIdLst>
   <p:handoutMasterIdLst>
-    <p:handoutMasterId r:id="rId26"/>
+    <p:handoutMasterId r:id="rId27"/>
   </p:handoutMasterIdLst>
   <p:sldIdLst>
     <p:sldId id="256" r:id="rId5"/>
     <p:sldId id="314" r:id="rId6"/>
-    <p:sldId id="361" r:id="rId7"/>
-    <p:sldId id="270" r:id="rId8"/>
-    <p:sldId id="271" r:id="rId9"/>
-    <p:sldId id="272" r:id="rId10"/>
-    <p:sldId id="273" r:id="rId11"/>
-    <p:sldId id="274" r:id="rId12"/>
-    <p:sldId id="282" r:id="rId13"/>
-    <p:sldId id="275" r:id="rId14"/>
-    <p:sldId id="280" r:id="rId15"/>
-    <p:sldId id="277" r:id="rId16"/>
-    <p:sldId id="362" r:id="rId17"/>
-    <p:sldId id="276" r:id="rId18"/>
-    <p:sldId id="363" r:id="rId19"/>
-    <p:sldId id="278" r:id="rId20"/>
-    <p:sldId id="279" r:id="rId21"/>
-    <p:sldId id="364" r:id="rId22"/>
-    <p:sldId id="281" r:id="rId23"/>
-    <p:sldId id="365" r:id="rId24"/>
+    <p:sldId id="366" r:id="rId7"/>
+    <p:sldId id="361" r:id="rId8"/>
+    <p:sldId id="270" r:id="rId9"/>
+    <p:sldId id="271" r:id="rId10"/>
+    <p:sldId id="272" r:id="rId11"/>
+    <p:sldId id="273" r:id="rId12"/>
+    <p:sldId id="274" r:id="rId13"/>
+    <p:sldId id="282" r:id="rId14"/>
+    <p:sldId id="275" r:id="rId15"/>
+    <p:sldId id="280" r:id="rId16"/>
+    <p:sldId id="277" r:id="rId17"/>
+    <p:sldId id="362" r:id="rId18"/>
+    <p:sldId id="276" r:id="rId19"/>
+    <p:sldId id="363" r:id="rId20"/>
+    <p:sldId id="278" r:id="rId21"/>
+    <p:sldId id="279" r:id="rId22"/>
+    <p:sldId id="364" r:id="rId23"/>
+    <p:sldId id="281" r:id="rId24"/>
+    <p:sldId id="365" r:id="rId25"/>
   </p:sldIdLst>
   <p:sldSz cx="12188825" cy="6858000"/>
   <p:notesSz cx="6858000" cy="9144000"/>
@@ -252,7 +253,7 @@
                 <a:latin typeface="맑은 고딕" panose="020B0503020000020004" pitchFamily="50" charset="-127"/>
                 <a:ea typeface="맑은 고딕" panose="020B0503020000020004" pitchFamily="50" charset="-127"/>
               </a:rPr>
-              <a:t>2026-03-16</a:t>
+              <a:t>2026-03-17</a:t>
             </a:fld>
             <a:endParaRPr lang="ko-KR" altLang="en-US" dirty="0">
               <a:latin typeface="맑은 고딕" panose="020B0503020000020004" pitchFamily="50" charset="-127"/>
@@ -439,7 +440,7 @@
             <a:fld id="{39DBE7D5-AA2D-4B26-8C69-8B60D39FD5EE}" type="datetime1">
               <a:rPr lang="ko-KR" altLang="en-US" smtClean="0"/>
               <a:pPr/>
-              <a:t>2026-03-16</a:t>
+              <a:t>2026-03-17</a:t>
             </a:fld>
             <a:endParaRPr lang="ko-KR" altLang="en-US" dirty="0"/>
           </a:p>
@@ -805,7 +806,13 @@
   <p:cSld>
     <p:spTree>
       <p:nvGrpSpPr>
-        <p:cNvPr id="1" name=""/>
+        <p:cNvPr id="1" name="">
+          <a:extLst>
+            <a:ext uri="{FF2B5EF4-FFF2-40B4-BE49-F238E27FC236}">
+              <a16:creationId xmlns:a16="http://schemas.microsoft.com/office/drawing/2014/main" id="{7FFE48B6-8181-F485-483D-74B530894E3E}"/>
+            </a:ext>
+          </a:extLst>
+        </p:cNvPr>
         <p:cNvGrpSpPr/>
         <p:nvPr/>
       </p:nvGrpSpPr>
@@ -819,7 +826,13 @@
       </p:grpSpPr>
       <p:sp>
         <p:nvSpPr>
-          <p:cNvPr id="2" name="슬라이드 이미지 개체 틀 1"/>
+          <p:cNvPr id="2" name="슬라이드 이미지 개체 틀 1">
+            <a:extLst>
+              <a:ext uri="{FF2B5EF4-FFF2-40B4-BE49-F238E27FC236}">
+                <a16:creationId xmlns:a16="http://schemas.microsoft.com/office/drawing/2014/main" id="{ABA4750D-9A32-1465-3219-6D24F3105F42}"/>
+              </a:ext>
+            </a:extLst>
+          </p:cNvPr>
           <p:cNvSpPr>
             <a:spLocks noGrp="1" noRot="1" noChangeAspect="1"/>
           </p:cNvSpPr>
@@ -831,7 +844,13 @@
       </p:sp>
       <p:sp>
         <p:nvSpPr>
-          <p:cNvPr id="3" name="슬라이드 노트 개체 틀 2"/>
+          <p:cNvPr id="3" name="슬라이드 노트 개체 틀 2">
+            <a:extLst>
+              <a:ext uri="{FF2B5EF4-FFF2-40B4-BE49-F238E27FC236}">
+                <a16:creationId xmlns:a16="http://schemas.microsoft.com/office/drawing/2014/main" id="{6E012341-B157-0FA0-B642-6A8375F85540}"/>
+              </a:ext>
+            </a:extLst>
+          </p:cNvPr>
           <p:cNvSpPr>
             <a:spLocks noGrp="1"/>
           </p:cNvSpPr>
@@ -850,7 +869,13 @@
       </p:sp>
       <p:sp>
         <p:nvSpPr>
-          <p:cNvPr id="4" name="슬라이드 번호 개체 틀 3"/>
+          <p:cNvPr id="4" name="슬라이드 번호 개체 틀 3">
+            <a:extLst>
+              <a:ext uri="{FF2B5EF4-FFF2-40B4-BE49-F238E27FC236}">
+                <a16:creationId xmlns:a16="http://schemas.microsoft.com/office/drawing/2014/main" id="{68637A8C-9EC5-48D4-4FED-AD011394FDE8}"/>
+              </a:ext>
+            </a:extLst>
+          </p:cNvPr>
           <p:cNvSpPr>
             <a:spLocks noGrp="1"/>
           </p:cNvSpPr>
@@ -875,7 +900,7 @@
     </p:spTree>
     <p:extLst>
       <p:ext uri="{BB962C8B-B14F-4D97-AF65-F5344CB8AC3E}">
-        <p14:creationId xmlns:p14="http://schemas.microsoft.com/office/powerpoint/2010/main" val="3628120198"/>
+        <p14:creationId xmlns:p14="http://schemas.microsoft.com/office/powerpoint/2010/main" val="151068689"/>
       </p:ext>
     </p:extLst>
   </p:cSld>
@@ -960,7 +985,7 @@
     </p:spTree>
     <p:extLst>
       <p:ext uri="{BB962C8B-B14F-4D97-AF65-F5344CB8AC3E}">
-        <p14:creationId xmlns:p14="http://schemas.microsoft.com/office/powerpoint/2010/main" val="1932367812"/>
+        <p14:creationId xmlns:p14="http://schemas.microsoft.com/office/powerpoint/2010/main" val="3628120198"/>
       </p:ext>
     </p:extLst>
   </p:cSld>
@@ -1045,6 +1070,91 @@
     </p:spTree>
     <p:extLst>
       <p:ext uri="{BB962C8B-B14F-4D97-AF65-F5344CB8AC3E}">
+        <p14:creationId xmlns:p14="http://schemas.microsoft.com/office/powerpoint/2010/main" val="1932367812"/>
+      </p:ext>
+    </p:extLst>
+  </p:cSld>
+  <p:clrMapOvr>
+    <a:masterClrMapping/>
+  </p:clrMapOvr>
+</p:notes>
+</file>
+
+<file path=ppt/notesSlides/notesSlide13.xml><?xml version="1.0" encoding="utf-8"?>
+<p:notes xmlns:a="http://schemas.openxmlformats.org/drawingml/2006/main" xmlns:r="http://schemas.openxmlformats.org/officeDocument/2006/relationships" xmlns:p="http://schemas.openxmlformats.org/presentationml/2006/main">
+  <p:cSld>
+    <p:spTree>
+      <p:nvGrpSpPr>
+        <p:cNvPr id="1" name=""/>
+        <p:cNvGrpSpPr/>
+        <p:nvPr/>
+      </p:nvGrpSpPr>
+      <p:grpSpPr>
+        <a:xfrm>
+          <a:off x="0" y="0"/>
+          <a:ext cx="0" cy="0"/>
+          <a:chOff x="0" y="0"/>
+          <a:chExt cx="0" cy="0"/>
+        </a:xfrm>
+      </p:grpSpPr>
+      <p:sp>
+        <p:nvSpPr>
+          <p:cNvPr id="2" name="슬라이드 이미지 개체 틀 1"/>
+          <p:cNvSpPr>
+            <a:spLocks noGrp="1" noRot="1" noChangeAspect="1"/>
+          </p:cNvSpPr>
+          <p:nvPr>
+            <p:ph type="sldImg"/>
+          </p:nvPr>
+        </p:nvSpPr>
+        <p:spPr/>
+      </p:sp>
+      <p:sp>
+        <p:nvSpPr>
+          <p:cNvPr id="3" name="슬라이드 노트 개체 틀 2"/>
+          <p:cNvSpPr>
+            <a:spLocks noGrp="1"/>
+          </p:cNvSpPr>
+          <p:nvPr>
+            <p:ph type="body" idx="1"/>
+          </p:nvPr>
+        </p:nvSpPr>
+        <p:spPr/>
+        <p:txBody>
+          <a:bodyPr/>
+          <a:lstStyle/>
+          <a:p>
+            <a:endParaRPr lang="ko-KR" altLang="en-US" dirty="0"/>
+          </a:p>
+        </p:txBody>
+      </p:sp>
+      <p:sp>
+        <p:nvSpPr>
+          <p:cNvPr id="4" name="슬라이드 번호 개체 틀 3"/>
+          <p:cNvSpPr>
+            <a:spLocks noGrp="1"/>
+          </p:cNvSpPr>
+          <p:nvPr>
+            <p:ph type="sldNum" sz="quarter" idx="10"/>
+          </p:nvPr>
+        </p:nvSpPr>
+        <p:spPr/>
+        <p:txBody>
+          <a:bodyPr/>
+          <a:lstStyle/>
+          <a:p>
+            <a:pPr rtl="0"/>
+            <a:fld id="{5FB91549-43BF-425A-AF25-75262019208C}" type="slidenum">
+              <a:rPr lang="en-US" altLang="ko-KR" smtClean="0"/>
+              <a:t>13</a:t>
+            </a:fld>
+            <a:endParaRPr lang="ko-KR" altLang="en-US" dirty="0"/>
+          </a:p>
+        </p:txBody>
+      </p:sp>
+    </p:spTree>
+    <p:extLst>
+      <p:ext uri="{BB962C8B-B14F-4D97-AF65-F5344CB8AC3E}">
         <p14:creationId xmlns:p14="http://schemas.microsoft.com/office/powerpoint/2010/main" val="1329391888"/>
       </p:ext>
     </p:extLst>
@@ -1055,7 +1165,7 @@
 </p:notes>
 </file>
 
-<file path=ppt/notesSlides/notesSlide13.xml><?xml version="1.0" encoding="utf-8"?>
+<file path=ppt/notesSlides/notesSlide14.xml><?xml version="1.0" encoding="utf-8"?>
 <p:notes xmlns:a="http://schemas.openxmlformats.org/drawingml/2006/main" xmlns:r="http://schemas.openxmlformats.org/officeDocument/2006/relationships" xmlns:p="http://schemas.openxmlformats.org/presentationml/2006/main">
   <p:cSld>
     <p:spTree>
@@ -1145,7 +1255,7 @@
             <a:pPr rtl="0"/>
             <a:fld id="{5FB91549-43BF-425A-AF25-75262019208C}" type="slidenum">
               <a:rPr lang="en-US" altLang="ko-KR" smtClean="0"/>
-              <a:t>13</a:t>
+              <a:t>14</a:t>
             </a:fld>
             <a:endParaRPr lang="ko-KR" altLang="en-US" dirty="0"/>
           </a:p>
@@ -1164,7 +1274,7 @@
 </p:notes>
 </file>
 
-<file path=ppt/notesSlides/notesSlide14.xml><?xml version="1.0" encoding="utf-8"?>
+<file path=ppt/notesSlides/notesSlide15.xml><?xml version="1.0" encoding="utf-8"?>
 <p:notes xmlns:a="http://schemas.openxmlformats.org/drawingml/2006/main" xmlns:r="http://schemas.openxmlformats.org/officeDocument/2006/relationships" xmlns:p="http://schemas.openxmlformats.org/presentationml/2006/main">
   <p:cSld>
     <p:spTree>
@@ -1230,7 +1340,7 @@
             <a:pPr rtl="0"/>
             <a:fld id="{5FB91549-43BF-425A-AF25-75262019208C}" type="slidenum">
               <a:rPr lang="en-US" altLang="ko-KR" smtClean="0"/>
-              <a:t>14</a:t>
+              <a:t>15</a:t>
             </a:fld>
             <a:endParaRPr lang="ko-KR" altLang="en-US" dirty="0"/>
           </a:p>
@@ -1249,7 +1359,7 @@
 </p:notes>
 </file>
 
-<file path=ppt/notesSlides/notesSlide15.xml><?xml version="1.0" encoding="utf-8"?>
+<file path=ppt/notesSlides/notesSlide16.xml><?xml version="1.0" encoding="utf-8"?>
 <p:notes xmlns:a="http://schemas.openxmlformats.org/drawingml/2006/main" xmlns:r="http://schemas.openxmlformats.org/officeDocument/2006/relationships" xmlns:p="http://schemas.openxmlformats.org/presentationml/2006/main">
   <p:cSld>
     <p:spTree>
@@ -1339,7 +1449,7 @@
             <a:pPr rtl="0"/>
             <a:fld id="{5FB91549-43BF-425A-AF25-75262019208C}" type="slidenum">
               <a:rPr lang="en-US" altLang="ko-KR" smtClean="0"/>
-              <a:t>15</a:t>
+              <a:t>16</a:t>
             </a:fld>
             <a:endParaRPr lang="ko-KR" altLang="en-US" dirty="0"/>
           </a:p>
@@ -1349,91 +1459,6 @@
     <p:extLst>
       <p:ext uri="{BB962C8B-B14F-4D97-AF65-F5344CB8AC3E}">
         <p14:creationId xmlns:p14="http://schemas.microsoft.com/office/powerpoint/2010/main" val="1252142345"/>
-      </p:ext>
-    </p:extLst>
-  </p:cSld>
-  <p:clrMapOvr>
-    <a:masterClrMapping/>
-  </p:clrMapOvr>
-</p:notes>
-</file>
-
-<file path=ppt/notesSlides/notesSlide16.xml><?xml version="1.0" encoding="utf-8"?>
-<p:notes xmlns:a="http://schemas.openxmlformats.org/drawingml/2006/main" xmlns:r="http://schemas.openxmlformats.org/officeDocument/2006/relationships" xmlns:p="http://schemas.openxmlformats.org/presentationml/2006/main">
-  <p:cSld>
-    <p:spTree>
-      <p:nvGrpSpPr>
-        <p:cNvPr id="1" name=""/>
-        <p:cNvGrpSpPr/>
-        <p:nvPr/>
-      </p:nvGrpSpPr>
-      <p:grpSpPr>
-        <a:xfrm>
-          <a:off x="0" y="0"/>
-          <a:ext cx="0" cy="0"/>
-          <a:chOff x="0" y="0"/>
-          <a:chExt cx="0" cy="0"/>
-        </a:xfrm>
-      </p:grpSpPr>
-      <p:sp>
-        <p:nvSpPr>
-          <p:cNvPr id="2" name="슬라이드 이미지 개체 틀 1"/>
-          <p:cNvSpPr>
-            <a:spLocks noGrp="1" noRot="1" noChangeAspect="1"/>
-          </p:cNvSpPr>
-          <p:nvPr>
-            <p:ph type="sldImg"/>
-          </p:nvPr>
-        </p:nvSpPr>
-        <p:spPr/>
-      </p:sp>
-      <p:sp>
-        <p:nvSpPr>
-          <p:cNvPr id="3" name="슬라이드 노트 개체 틀 2"/>
-          <p:cNvSpPr>
-            <a:spLocks noGrp="1"/>
-          </p:cNvSpPr>
-          <p:nvPr>
-            <p:ph type="body" idx="1"/>
-          </p:nvPr>
-        </p:nvSpPr>
-        <p:spPr/>
-        <p:txBody>
-          <a:bodyPr/>
-          <a:lstStyle/>
-          <a:p>
-            <a:endParaRPr lang="ko-KR" altLang="en-US" dirty="0"/>
-          </a:p>
-        </p:txBody>
-      </p:sp>
-      <p:sp>
-        <p:nvSpPr>
-          <p:cNvPr id="4" name="슬라이드 번호 개체 틀 3"/>
-          <p:cNvSpPr>
-            <a:spLocks noGrp="1"/>
-          </p:cNvSpPr>
-          <p:nvPr>
-            <p:ph type="sldNum" sz="quarter" idx="10"/>
-          </p:nvPr>
-        </p:nvSpPr>
-        <p:spPr/>
-        <p:txBody>
-          <a:bodyPr/>
-          <a:lstStyle/>
-          <a:p>
-            <a:pPr rtl="0"/>
-            <a:fld id="{5FB91549-43BF-425A-AF25-75262019208C}" type="slidenum">
-              <a:rPr lang="en-US" altLang="ko-KR" smtClean="0"/>
-              <a:t>16</a:t>
-            </a:fld>
-            <a:endParaRPr lang="ko-KR" altLang="en-US" dirty="0"/>
-          </a:p>
-        </p:txBody>
-      </p:sp>
-    </p:spTree>
-    <p:extLst>
-      <p:ext uri="{BB962C8B-B14F-4D97-AF65-F5344CB8AC3E}">
-        <p14:creationId xmlns:p14="http://schemas.microsoft.com/office/powerpoint/2010/main" val="114399789"/>
       </p:ext>
     </p:extLst>
   </p:cSld>
@@ -1518,6 +1543,91 @@
     </p:spTree>
     <p:extLst>
       <p:ext uri="{BB962C8B-B14F-4D97-AF65-F5344CB8AC3E}">
+        <p14:creationId xmlns:p14="http://schemas.microsoft.com/office/powerpoint/2010/main" val="114399789"/>
+      </p:ext>
+    </p:extLst>
+  </p:cSld>
+  <p:clrMapOvr>
+    <a:masterClrMapping/>
+  </p:clrMapOvr>
+</p:notes>
+</file>
+
+<file path=ppt/notesSlides/notesSlide18.xml><?xml version="1.0" encoding="utf-8"?>
+<p:notes xmlns:a="http://schemas.openxmlformats.org/drawingml/2006/main" xmlns:r="http://schemas.openxmlformats.org/officeDocument/2006/relationships" xmlns:p="http://schemas.openxmlformats.org/presentationml/2006/main">
+  <p:cSld>
+    <p:spTree>
+      <p:nvGrpSpPr>
+        <p:cNvPr id="1" name=""/>
+        <p:cNvGrpSpPr/>
+        <p:nvPr/>
+      </p:nvGrpSpPr>
+      <p:grpSpPr>
+        <a:xfrm>
+          <a:off x="0" y="0"/>
+          <a:ext cx="0" cy="0"/>
+          <a:chOff x="0" y="0"/>
+          <a:chExt cx="0" cy="0"/>
+        </a:xfrm>
+      </p:grpSpPr>
+      <p:sp>
+        <p:nvSpPr>
+          <p:cNvPr id="2" name="슬라이드 이미지 개체 틀 1"/>
+          <p:cNvSpPr>
+            <a:spLocks noGrp="1" noRot="1" noChangeAspect="1"/>
+          </p:cNvSpPr>
+          <p:nvPr>
+            <p:ph type="sldImg"/>
+          </p:nvPr>
+        </p:nvSpPr>
+        <p:spPr/>
+      </p:sp>
+      <p:sp>
+        <p:nvSpPr>
+          <p:cNvPr id="3" name="슬라이드 노트 개체 틀 2"/>
+          <p:cNvSpPr>
+            <a:spLocks noGrp="1"/>
+          </p:cNvSpPr>
+          <p:nvPr>
+            <p:ph type="body" idx="1"/>
+          </p:nvPr>
+        </p:nvSpPr>
+        <p:spPr/>
+        <p:txBody>
+          <a:bodyPr/>
+          <a:lstStyle/>
+          <a:p>
+            <a:endParaRPr lang="ko-KR" altLang="en-US" dirty="0"/>
+          </a:p>
+        </p:txBody>
+      </p:sp>
+      <p:sp>
+        <p:nvSpPr>
+          <p:cNvPr id="4" name="슬라이드 번호 개체 틀 3"/>
+          <p:cNvSpPr>
+            <a:spLocks noGrp="1"/>
+          </p:cNvSpPr>
+          <p:nvPr>
+            <p:ph type="sldNum" sz="quarter" idx="10"/>
+          </p:nvPr>
+        </p:nvSpPr>
+        <p:spPr/>
+        <p:txBody>
+          <a:bodyPr/>
+          <a:lstStyle/>
+          <a:p>
+            <a:pPr rtl="0"/>
+            <a:fld id="{5FB91549-43BF-425A-AF25-75262019208C}" type="slidenum">
+              <a:rPr lang="en-US" altLang="ko-KR" smtClean="0"/>
+              <a:t>18</a:t>
+            </a:fld>
+            <a:endParaRPr lang="ko-KR" altLang="en-US" dirty="0"/>
+          </a:p>
+        </p:txBody>
+      </p:sp>
+    </p:spTree>
+    <p:extLst>
+      <p:ext uri="{BB962C8B-B14F-4D97-AF65-F5344CB8AC3E}">
         <p14:creationId xmlns:p14="http://schemas.microsoft.com/office/powerpoint/2010/main" val="945868928"/>
       </p:ext>
     </p:extLst>
@@ -1528,7 +1638,7 @@
 </p:notes>
 </file>
 
-<file path=ppt/notesSlides/notesSlide18.xml><?xml version="1.0" encoding="utf-8"?>
+<file path=ppt/notesSlides/notesSlide19.xml><?xml version="1.0" encoding="utf-8"?>
 <p:notes xmlns:a="http://schemas.openxmlformats.org/drawingml/2006/main" xmlns:r="http://schemas.openxmlformats.org/officeDocument/2006/relationships" xmlns:p="http://schemas.openxmlformats.org/presentationml/2006/main">
   <p:cSld>
     <p:spTree>
@@ -1618,7 +1728,7 @@
             <a:pPr rtl="0"/>
             <a:fld id="{5FB91549-43BF-425A-AF25-75262019208C}" type="slidenum">
               <a:rPr lang="en-US" altLang="ko-KR" smtClean="0"/>
-              <a:t>18</a:t>
+              <a:t>19</a:t>
             </a:fld>
             <a:endParaRPr lang="ko-KR" altLang="en-US" dirty="0"/>
           </a:p>
@@ -1628,91 +1738,6 @@
     <p:extLst>
       <p:ext uri="{BB962C8B-B14F-4D97-AF65-F5344CB8AC3E}">
         <p14:creationId xmlns:p14="http://schemas.microsoft.com/office/powerpoint/2010/main" val="266090397"/>
-      </p:ext>
-    </p:extLst>
-  </p:cSld>
-  <p:clrMapOvr>
-    <a:masterClrMapping/>
-  </p:clrMapOvr>
-</p:notes>
-</file>
-
-<file path=ppt/notesSlides/notesSlide19.xml><?xml version="1.0" encoding="utf-8"?>
-<p:notes xmlns:a="http://schemas.openxmlformats.org/drawingml/2006/main" xmlns:r="http://schemas.openxmlformats.org/officeDocument/2006/relationships" xmlns:p="http://schemas.openxmlformats.org/presentationml/2006/main">
-  <p:cSld>
-    <p:spTree>
-      <p:nvGrpSpPr>
-        <p:cNvPr id="1" name=""/>
-        <p:cNvGrpSpPr/>
-        <p:nvPr/>
-      </p:nvGrpSpPr>
-      <p:grpSpPr>
-        <a:xfrm>
-          <a:off x="0" y="0"/>
-          <a:ext cx="0" cy="0"/>
-          <a:chOff x="0" y="0"/>
-          <a:chExt cx="0" cy="0"/>
-        </a:xfrm>
-      </p:grpSpPr>
-      <p:sp>
-        <p:nvSpPr>
-          <p:cNvPr id="2" name="슬라이드 이미지 개체 틀 1"/>
-          <p:cNvSpPr>
-            <a:spLocks noGrp="1" noRot="1" noChangeAspect="1"/>
-          </p:cNvSpPr>
-          <p:nvPr>
-            <p:ph type="sldImg"/>
-          </p:nvPr>
-        </p:nvSpPr>
-        <p:spPr/>
-      </p:sp>
-      <p:sp>
-        <p:nvSpPr>
-          <p:cNvPr id="3" name="슬라이드 노트 개체 틀 2"/>
-          <p:cNvSpPr>
-            <a:spLocks noGrp="1"/>
-          </p:cNvSpPr>
-          <p:nvPr>
-            <p:ph type="body" idx="1"/>
-          </p:nvPr>
-        </p:nvSpPr>
-        <p:spPr/>
-        <p:txBody>
-          <a:bodyPr/>
-          <a:lstStyle/>
-          <a:p>
-            <a:endParaRPr lang="ko-KR" altLang="en-US" dirty="0"/>
-          </a:p>
-        </p:txBody>
-      </p:sp>
-      <p:sp>
-        <p:nvSpPr>
-          <p:cNvPr id="4" name="슬라이드 번호 개체 틀 3"/>
-          <p:cNvSpPr>
-            <a:spLocks noGrp="1"/>
-          </p:cNvSpPr>
-          <p:nvPr>
-            <p:ph type="sldNum" sz="quarter" idx="10"/>
-          </p:nvPr>
-        </p:nvSpPr>
-        <p:spPr/>
-        <p:txBody>
-          <a:bodyPr/>
-          <a:lstStyle/>
-          <a:p>
-            <a:pPr rtl="0"/>
-            <a:fld id="{5FB91549-43BF-425A-AF25-75262019208C}" type="slidenum">
-              <a:rPr lang="en-US" altLang="ko-KR" smtClean="0"/>
-              <a:t>19</a:t>
-            </a:fld>
-            <a:endParaRPr lang="ko-KR" altLang="en-US" dirty="0"/>
-          </a:p>
-        </p:txBody>
-      </p:sp>
-    </p:spTree>
-    <p:extLst>
-      <p:ext uri="{BB962C8B-B14F-4D97-AF65-F5344CB8AC3E}">
-        <p14:creationId xmlns:p14="http://schemas.microsoft.com/office/powerpoint/2010/main" val="2261553159"/>
       </p:ext>
     </p:extLst>
   </p:cSld>
@@ -1836,6 +1861,91 @@
   <p:cSld>
     <p:spTree>
       <p:nvGrpSpPr>
+        <p:cNvPr id="1" name=""/>
+        <p:cNvGrpSpPr/>
+        <p:nvPr/>
+      </p:nvGrpSpPr>
+      <p:grpSpPr>
+        <a:xfrm>
+          <a:off x="0" y="0"/>
+          <a:ext cx="0" cy="0"/>
+          <a:chOff x="0" y="0"/>
+          <a:chExt cx="0" cy="0"/>
+        </a:xfrm>
+      </p:grpSpPr>
+      <p:sp>
+        <p:nvSpPr>
+          <p:cNvPr id="2" name="슬라이드 이미지 개체 틀 1"/>
+          <p:cNvSpPr>
+            <a:spLocks noGrp="1" noRot="1" noChangeAspect="1"/>
+          </p:cNvSpPr>
+          <p:nvPr>
+            <p:ph type="sldImg"/>
+          </p:nvPr>
+        </p:nvSpPr>
+        <p:spPr/>
+      </p:sp>
+      <p:sp>
+        <p:nvSpPr>
+          <p:cNvPr id="3" name="슬라이드 노트 개체 틀 2"/>
+          <p:cNvSpPr>
+            <a:spLocks noGrp="1"/>
+          </p:cNvSpPr>
+          <p:nvPr>
+            <p:ph type="body" idx="1"/>
+          </p:nvPr>
+        </p:nvSpPr>
+        <p:spPr/>
+        <p:txBody>
+          <a:bodyPr/>
+          <a:lstStyle/>
+          <a:p>
+            <a:endParaRPr lang="ko-KR" altLang="en-US" dirty="0"/>
+          </a:p>
+        </p:txBody>
+      </p:sp>
+      <p:sp>
+        <p:nvSpPr>
+          <p:cNvPr id="4" name="슬라이드 번호 개체 틀 3"/>
+          <p:cNvSpPr>
+            <a:spLocks noGrp="1"/>
+          </p:cNvSpPr>
+          <p:nvPr>
+            <p:ph type="sldNum" sz="quarter" idx="10"/>
+          </p:nvPr>
+        </p:nvSpPr>
+        <p:spPr/>
+        <p:txBody>
+          <a:bodyPr/>
+          <a:lstStyle/>
+          <a:p>
+            <a:pPr rtl="0"/>
+            <a:fld id="{5FB91549-43BF-425A-AF25-75262019208C}" type="slidenum">
+              <a:rPr lang="en-US" altLang="ko-KR" smtClean="0"/>
+              <a:t>20</a:t>
+            </a:fld>
+            <a:endParaRPr lang="ko-KR" altLang="en-US" dirty="0"/>
+          </a:p>
+        </p:txBody>
+      </p:sp>
+    </p:spTree>
+    <p:extLst>
+      <p:ext uri="{BB962C8B-B14F-4D97-AF65-F5344CB8AC3E}">
+        <p14:creationId xmlns:p14="http://schemas.microsoft.com/office/powerpoint/2010/main" val="2261553159"/>
+      </p:ext>
+    </p:extLst>
+  </p:cSld>
+  <p:clrMapOvr>
+    <a:masterClrMapping/>
+  </p:clrMapOvr>
+</p:notes>
+</file>
+
+<file path=ppt/notesSlides/notesSlide21.xml><?xml version="1.0" encoding="utf-8"?>
+<p:notes xmlns:a="http://schemas.openxmlformats.org/drawingml/2006/main" xmlns:r="http://schemas.openxmlformats.org/officeDocument/2006/relationships" xmlns:p="http://schemas.openxmlformats.org/presentationml/2006/main">
+  <p:cSld>
+    <p:spTree>
+      <p:nvGrpSpPr>
         <p:cNvPr id="1" name="">
           <a:extLst>
             <a:ext uri="{FF2B5EF4-FFF2-40B4-BE49-F238E27FC236}">
@@ -1921,7 +2031,7 @@
             <a:pPr rtl="0"/>
             <a:fld id="{5FB91549-43BF-425A-AF25-75262019208C}" type="slidenum">
               <a:rPr lang="en-US" altLang="ko-KR" smtClean="0"/>
-              <a:t>20</a:t>
+              <a:t>21</a:t>
             </a:fld>
             <a:endParaRPr lang="ko-KR" altLang="en-US" dirty="0"/>
           </a:p>
@@ -1941,6 +2051,115 @@
 </file>
 
 <file path=ppt/notesSlides/notesSlide3.xml><?xml version="1.0" encoding="utf-8"?>
+<p:notes xmlns:a="http://schemas.openxmlformats.org/drawingml/2006/main" xmlns:r="http://schemas.openxmlformats.org/officeDocument/2006/relationships" xmlns:p="http://schemas.openxmlformats.org/presentationml/2006/main">
+  <p:cSld>
+    <p:spTree>
+      <p:nvGrpSpPr>
+        <p:cNvPr id="1" name="">
+          <a:extLst>
+            <a:ext uri="{FF2B5EF4-FFF2-40B4-BE49-F238E27FC236}">
+              <a16:creationId xmlns:a16="http://schemas.microsoft.com/office/drawing/2014/main" id="{48587B48-8513-9B9E-4380-3E33745082C4}"/>
+            </a:ext>
+          </a:extLst>
+        </p:cNvPr>
+        <p:cNvGrpSpPr/>
+        <p:nvPr/>
+      </p:nvGrpSpPr>
+      <p:grpSpPr>
+        <a:xfrm>
+          <a:off x="0" y="0"/>
+          <a:ext cx="0" cy="0"/>
+          <a:chOff x="0" y="0"/>
+          <a:chExt cx="0" cy="0"/>
+        </a:xfrm>
+      </p:grpSpPr>
+      <p:sp>
+        <p:nvSpPr>
+          <p:cNvPr id="2" name="슬라이드 이미지 개체 틀 1">
+            <a:extLst>
+              <a:ext uri="{FF2B5EF4-FFF2-40B4-BE49-F238E27FC236}">
+                <a16:creationId xmlns:a16="http://schemas.microsoft.com/office/drawing/2014/main" id="{AEF1336B-6871-F396-D140-FD7AD04F5E64}"/>
+              </a:ext>
+            </a:extLst>
+          </p:cNvPr>
+          <p:cNvSpPr>
+            <a:spLocks noGrp="1" noRot="1" noChangeAspect="1"/>
+          </p:cNvSpPr>
+          <p:nvPr>
+            <p:ph type="sldImg"/>
+          </p:nvPr>
+        </p:nvSpPr>
+        <p:spPr/>
+      </p:sp>
+      <p:sp>
+        <p:nvSpPr>
+          <p:cNvPr id="3" name="슬라이드 노트 개체 틀 2">
+            <a:extLst>
+              <a:ext uri="{FF2B5EF4-FFF2-40B4-BE49-F238E27FC236}">
+                <a16:creationId xmlns:a16="http://schemas.microsoft.com/office/drawing/2014/main" id="{CEE6D0FA-0181-2A77-D825-163A3FFE9E20}"/>
+              </a:ext>
+            </a:extLst>
+          </p:cNvPr>
+          <p:cNvSpPr>
+            <a:spLocks noGrp="1"/>
+          </p:cNvSpPr>
+          <p:nvPr>
+            <p:ph type="body" idx="1"/>
+          </p:nvPr>
+        </p:nvSpPr>
+        <p:spPr/>
+        <p:txBody>
+          <a:bodyPr/>
+          <a:lstStyle/>
+          <a:p>
+            <a:endParaRPr lang="ko-KR" altLang="en-US" dirty="0"/>
+          </a:p>
+        </p:txBody>
+      </p:sp>
+      <p:sp>
+        <p:nvSpPr>
+          <p:cNvPr id="4" name="슬라이드 번호 개체 틀 3">
+            <a:extLst>
+              <a:ext uri="{FF2B5EF4-FFF2-40B4-BE49-F238E27FC236}">
+                <a16:creationId xmlns:a16="http://schemas.microsoft.com/office/drawing/2014/main" id="{C9764640-F1C9-5255-D057-4BD377B261B9}"/>
+              </a:ext>
+            </a:extLst>
+          </p:cNvPr>
+          <p:cNvSpPr>
+            <a:spLocks noGrp="1"/>
+          </p:cNvSpPr>
+          <p:nvPr>
+            <p:ph type="sldNum" sz="quarter" idx="10"/>
+          </p:nvPr>
+        </p:nvSpPr>
+        <p:spPr/>
+        <p:txBody>
+          <a:bodyPr/>
+          <a:lstStyle/>
+          <a:p>
+            <a:pPr rtl="0"/>
+            <a:fld id="{5FB91549-43BF-425A-AF25-75262019208C}" type="slidenum">
+              <a:rPr lang="en-US" altLang="ko-KR" smtClean="0"/>
+              <a:t>3</a:t>
+            </a:fld>
+            <a:endParaRPr lang="ko-KR" altLang="en-US" dirty="0"/>
+          </a:p>
+        </p:txBody>
+      </p:sp>
+    </p:spTree>
+    <p:extLst>
+      <p:ext uri="{BB962C8B-B14F-4D97-AF65-F5344CB8AC3E}">
+        <p14:creationId xmlns:p14="http://schemas.microsoft.com/office/powerpoint/2010/main" val="3893473488"/>
+      </p:ext>
+    </p:extLst>
+  </p:cSld>
+  <p:clrMapOvr>
+    <a:masterClrMapping/>
+  </p:clrMapOvr>
+</p:notes>
+</file>
+
+<file path=ppt/notesSlides/notesSlide4.xml><?xml version="1.0" encoding="utf-8"?>
 <p:notes xmlns:a="http://schemas.openxmlformats.org/drawingml/2006/main" xmlns:r="http://schemas.openxmlformats.org/officeDocument/2006/relationships" xmlns:p="http://schemas.openxmlformats.org/presentationml/2006/main">
   <p:cSld>
     <p:spTree>
@@ -2030,7 +2249,7 @@
             <a:pPr rtl="0"/>
             <a:fld id="{5FB91549-43BF-425A-AF25-75262019208C}" type="slidenum">
               <a:rPr lang="en-US" altLang="ko-KR" smtClean="0"/>
-              <a:t>3</a:t>
+              <a:t>4</a:t>
             </a:fld>
             <a:endParaRPr lang="ko-KR" altLang="en-US" dirty="0"/>
           </a:p>
@@ -2040,91 +2259,6 @@
     <p:extLst>
       <p:ext uri="{BB962C8B-B14F-4D97-AF65-F5344CB8AC3E}">
         <p14:creationId xmlns:p14="http://schemas.microsoft.com/office/powerpoint/2010/main" val="329701599"/>
-      </p:ext>
-    </p:extLst>
-  </p:cSld>
-  <p:clrMapOvr>
-    <a:masterClrMapping/>
-  </p:clrMapOvr>
-</p:notes>
-</file>
-
-<file path=ppt/notesSlides/notesSlide4.xml><?xml version="1.0" encoding="utf-8"?>
-<p:notes xmlns:a="http://schemas.openxmlformats.org/drawingml/2006/main" xmlns:r="http://schemas.openxmlformats.org/officeDocument/2006/relationships" xmlns:p="http://schemas.openxmlformats.org/presentationml/2006/main">
-  <p:cSld>
-    <p:spTree>
-      <p:nvGrpSpPr>
-        <p:cNvPr id="1" name=""/>
-        <p:cNvGrpSpPr/>
-        <p:nvPr/>
-      </p:nvGrpSpPr>
-      <p:grpSpPr>
-        <a:xfrm>
-          <a:off x="0" y="0"/>
-          <a:ext cx="0" cy="0"/>
-          <a:chOff x="0" y="0"/>
-          <a:chExt cx="0" cy="0"/>
-        </a:xfrm>
-      </p:grpSpPr>
-      <p:sp>
-        <p:nvSpPr>
-          <p:cNvPr id="2" name="슬라이드 이미지 개체 틀 1"/>
-          <p:cNvSpPr>
-            <a:spLocks noGrp="1" noRot="1" noChangeAspect="1"/>
-          </p:cNvSpPr>
-          <p:nvPr>
-            <p:ph type="sldImg"/>
-          </p:nvPr>
-        </p:nvSpPr>
-        <p:spPr/>
-      </p:sp>
-      <p:sp>
-        <p:nvSpPr>
-          <p:cNvPr id="3" name="슬라이드 노트 개체 틀 2"/>
-          <p:cNvSpPr>
-            <a:spLocks noGrp="1"/>
-          </p:cNvSpPr>
-          <p:nvPr>
-            <p:ph type="body" idx="1"/>
-          </p:nvPr>
-        </p:nvSpPr>
-        <p:spPr/>
-        <p:txBody>
-          <a:bodyPr/>
-          <a:lstStyle/>
-          <a:p>
-            <a:endParaRPr lang="ko-KR" altLang="en-US" dirty="0"/>
-          </a:p>
-        </p:txBody>
-      </p:sp>
-      <p:sp>
-        <p:nvSpPr>
-          <p:cNvPr id="4" name="슬라이드 번호 개체 틀 3"/>
-          <p:cNvSpPr>
-            <a:spLocks noGrp="1"/>
-          </p:cNvSpPr>
-          <p:nvPr>
-            <p:ph type="sldNum" sz="quarter" idx="10"/>
-          </p:nvPr>
-        </p:nvSpPr>
-        <p:spPr/>
-        <p:txBody>
-          <a:bodyPr/>
-          <a:lstStyle/>
-          <a:p>
-            <a:pPr rtl="0"/>
-            <a:fld id="{5FB91549-43BF-425A-AF25-75262019208C}" type="slidenum">
-              <a:rPr lang="en-US" altLang="ko-KR" smtClean="0"/>
-              <a:t>4</a:t>
-            </a:fld>
-            <a:endParaRPr lang="ko-KR" altLang="en-US" dirty="0"/>
-          </a:p>
-        </p:txBody>
-      </p:sp>
-    </p:spTree>
-    <p:extLst>
-      <p:ext uri="{BB962C8B-B14F-4D97-AF65-F5344CB8AC3E}">
-        <p14:creationId xmlns:p14="http://schemas.microsoft.com/office/powerpoint/2010/main" val="1911418281"/>
       </p:ext>
     </p:extLst>
   </p:cSld>
@@ -2209,7 +2343,7 @@
     </p:spTree>
     <p:extLst>
       <p:ext uri="{BB962C8B-B14F-4D97-AF65-F5344CB8AC3E}">
-        <p14:creationId xmlns:p14="http://schemas.microsoft.com/office/powerpoint/2010/main" val="3674128110"/>
+        <p14:creationId xmlns:p14="http://schemas.microsoft.com/office/powerpoint/2010/main" val="1911418281"/>
       </p:ext>
     </p:extLst>
   </p:cSld>
@@ -2294,7 +2428,7 @@
     </p:spTree>
     <p:extLst>
       <p:ext uri="{BB962C8B-B14F-4D97-AF65-F5344CB8AC3E}">
-        <p14:creationId xmlns:p14="http://schemas.microsoft.com/office/powerpoint/2010/main" val="962635640"/>
+        <p14:creationId xmlns:p14="http://schemas.microsoft.com/office/powerpoint/2010/main" val="3674128110"/>
       </p:ext>
     </p:extLst>
   </p:cSld>
@@ -2379,7 +2513,7 @@
     </p:spTree>
     <p:extLst>
       <p:ext uri="{BB962C8B-B14F-4D97-AF65-F5344CB8AC3E}">
-        <p14:creationId xmlns:p14="http://schemas.microsoft.com/office/powerpoint/2010/main" val="3912811316"/>
+        <p14:creationId xmlns:p14="http://schemas.microsoft.com/office/powerpoint/2010/main" val="962635640"/>
       </p:ext>
     </p:extLst>
   </p:cSld>
@@ -2464,7 +2598,7 @@
     </p:spTree>
     <p:extLst>
       <p:ext uri="{BB962C8B-B14F-4D97-AF65-F5344CB8AC3E}">
-        <p14:creationId xmlns:p14="http://schemas.microsoft.com/office/powerpoint/2010/main" val="3259237565"/>
+        <p14:creationId xmlns:p14="http://schemas.microsoft.com/office/powerpoint/2010/main" val="3912811316"/>
       </p:ext>
     </p:extLst>
   </p:cSld>
@@ -2479,13 +2613,7 @@
   <p:cSld>
     <p:spTree>
       <p:nvGrpSpPr>
-        <p:cNvPr id="1" name="">
-          <a:extLst>
-            <a:ext uri="{FF2B5EF4-FFF2-40B4-BE49-F238E27FC236}">
-              <a16:creationId xmlns:a16="http://schemas.microsoft.com/office/drawing/2014/main" id="{7FFE48B6-8181-F485-483D-74B530894E3E}"/>
-            </a:ext>
-          </a:extLst>
-        </p:cNvPr>
+        <p:cNvPr id="1" name=""/>
         <p:cNvGrpSpPr/>
         <p:nvPr/>
       </p:nvGrpSpPr>
@@ -2499,13 +2627,7 @@
       </p:grpSpPr>
       <p:sp>
         <p:nvSpPr>
-          <p:cNvPr id="2" name="슬라이드 이미지 개체 틀 1">
-            <a:extLst>
-              <a:ext uri="{FF2B5EF4-FFF2-40B4-BE49-F238E27FC236}">
-                <a16:creationId xmlns:a16="http://schemas.microsoft.com/office/drawing/2014/main" id="{ABA4750D-9A32-1465-3219-6D24F3105F42}"/>
-              </a:ext>
-            </a:extLst>
-          </p:cNvPr>
+          <p:cNvPr id="2" name="슬라이드 이미지 개체 틀 1"/>
           <p:cNvSpPr>
             <a:spLocks noGrp="1" noRot="1" noChangeAspect="1"/>
           </p:cNvSpPr>
@@ -2517,13 +2639,7 @@
       </p:sp>
       <p:sp>
         <p:nvSpPr>
-          <p:cNvPr id="3" name="슬라이드 노트 개체 틀 2">
-            <a:extLst>
-              <a:ext uri="{FF2B5EF4-FFF2-40B4-BE49-F238E27FC236}">
-                <a16:creationId xmlns:a16="http://schemas.microsoft.com/office/drawing/2014/main" id="{6E012341-B157-0FA0-B642-6A8375F85540}"/>
-              </a:ext>
-            </a:extLst>
-          </p:cNvPr>
+          <p:cNvPr id="3" name="슬라이드 노트 개체 틀 2"/>
           <p:cNvSpPr>
             <a:spLocks noGrp="1"/>
           </p:cNvSpPr>
@@ -2542,13 +2658,7 @@
       </p:sp>
       <p:sp>
         <p:nvSpPr>
-          <p:cNvPr id="4" name="슬라이드 번호 개체 틀 3">
-            <a:extLst>
-              <a:ext uri="{FF2B5EF4-FFF2-40B4-BE49-F238E27FC236}">
-                <a16:creationId xmlns:a16="http://schemas.microsoft.com/office/drawing/2014/main" id="{68637A8C-9EC5-48D4-4FED-AD011394FDE8}"/>
-              </a:ext>
-            </a:extLst>
-          </p:cNvPr>
+          <p:cNvPr id="4" name="슬라이드 번호 개체 틀 3"/>
           <p:cNvSpPr>
             <a:spLocks noGrp="1"/>
           </p:cNvSpPr>
@@ -2573,7 +2683,7 @@
     </p:spTree>
     <p:extLst>
       <p:ext uri="{BB962C8B-B14F-4D97-AF65-F5344CB8AC3E}">
-        <p14:creationId xmlns:p14="http://schemas.microsoft.com/office/powerpoint/2010/main" val="151068689"/>
+        <p14:creationId xmlns:p14="http://schemas.microsoft.com/office/powerpoint/2010/main" val="3259237565"/>
       </p:ext>
     </p:extLst>
   </p:cSld>
@@ -2821,7 +2931,7 @@
           <a:p>
             <a:fld id="{4B229CEB-779D-4AB3-81CB-8FCEEAE03F61}" type="datetime1">
               <a:rPr lang="ko-KR" altLang="en-US" smtClean="0"/>
-              <a:t>2026-03-16</a:t>
+              <a:t>2026-03-17</a:t>
             </a:fld>
             <a:endParaRPr lang="ko-KR" altLang="en-US" dirty="0"/>
           </a:p>
@@ -3059,7 +3169,7 @@
             <a:pPr rtl="0"/>
             <a:fld id="{C3B7A883-0BF0-4B4B-84D5-D747A0111A56}" type="datetime1">
               <a:rPr lang="ko-KR" altLang="en-US" noProof="0" smtClean="0"/>
-              <a:t>2026-03-16</a:t>
+              <a:t>2026-03-17</a:t>
             </a:fld>
             <a:endParaRPr lang="ko-KR" altLang="en-US" noProof="0" dirty="0"/>
           </a:p>
@@ -3277,7 +3387,7 @@
             <a:pPr rtl="0"/>
             <a:fld id="{3DA7EA29-F2BB-4FB1-BB4B-C55A7FA3FC5C}" type="datetime1">
               <a:rPr lang="ko-KR" altLang="en-US" noProof="0" smtClean="0"/>
-              <a:t>2026-03-16</a:t>
+              <a:t>2026-03-17</a:t>
             </a:fld>
             <a:endParaRPr lang="ko-KR" altLang="en-US" noProof="0" dirty="0"/>
           </a:p>
@@ -3486,7 +3596,7 @@
             <a:pPr rtl="0"/>
             <a:fld id="{D76306AB-75A0-421C-B431-0E4E30A5C28E}" type="datetime1">
               <a:rPr lang="ko-KR" altLang="en-US" noProof="0" smtClean="0"/>
-              <a:t>2026-03-16</a:t>
+              <a:t>2026-03-17</a:t>
             </a:fld>
             <a:endParaRPr lang="ko-KR" altLang="en-US" noProof="0" dirty="0"/>
           </a:p>
@@ -3756,7 +3866,7 @@
             <a:pPr rtl="0"/>
             <a:fld id="{E1D969EE-F1EB-462E-B70D-5B36B3806A4E}" type="datetime1">
               <a:rPr lang="ko-KR" altLang="en-US" noProof="0" smtClean="0"/>
-              <a:t>2026-03-16</a:t>
+              <a:t>2026-03-17</a:t>
             </a:fld>
             <a:endParaRPr lang="ko-KR" altLang="en-US" noProof="0" dirty="0"/>
           </a:p>
@@ -4064,7 +4174,7 @@
             <a:pPr rtl="0"/>
             <a:fld id="{E8CBB1B7-E0A1-46A3-B5B5-C69931095FF6}" type="datetime1">
               <a:rPr lang="ko-KR" altLang="en-US" noProof="0" smtClean="0"/>
-              <a:t>2026-03-16</a:t>
+              <a:t>2026-03-17</a:t>
             </a:fld>
             <a:endParaRPr lang="ko-KR" altLang="en-US" noProof="0" dirty="0"/>
           </a:p>
@@ -4515,7 +4625,7 @@
             <a:pPr rtl="0"/>
             <a:fld id="{DAFC0E65-06AB-44D7-AAEE-8F4C7ED84A0C}" type="datetime1">
               <a:rPr lang="ko-KR" altLang="en-US" noProof="0" smtClean="0"/>
-              <a:t>2026-03-16</a:t>
+              <a:t>2026-03-17</a:t>
             </a:fld>
             <a:endParaRPr lang="ko-KR" altLang="en-US" noProof="0" dirty="0"/>
           </a:p>
@@ -4652,7 +4762,7 @@
             <a:pPr rtl="0"/>
             <a:fld id="{30189E66-D439-4767-B911-EB49CB20E313}" type="datetime1">
               <a:rPr lang="ko-KR" altLang="en-US" noProof="0" smtClean="0"/>
-              <a:t>2026-03-16</a:t>
+              <a:t>2026-03-17</a:t>
             </a:fld>
             <a:endParaRPr lang="ko-KR" altLang="en-US" noProof="0" dirty="0"/>
           </a:p>
@@ -4765,7 +4875,7 @@
             <a:pPr rtl="0"/>
             <a:fld id="{D4E4FFC0-DB28-4291-80A0-63DBF8428320}" type="datetime1">
               <a:rPr lang="ko-KR" altLang="en-US" noProof="0" smtClean="0"/>
-              <a:t>2026-03-16</a:t>
+              <a:t>2026-03-17</a:t>
             </a:fld>
             <a:endParaRPr lang="ko-KR" altLang="en-US" noProof="0" dirty="0"/>
           </a:p>
@@ -5070,7 +5180,7 @@
             <a:pPr rtl="0"/>
             <a:fld id="{3AB5804B-C38E-4214-93DF-3E6DA00134E8}" type="datetime1">
               <a:rPr lang="ko-KR" altLang="en-US" noProof="0" smtClean="0"/>
-              <a:t>2026-03-16</a:t>
+              <a:t>2026-03-17</a:t>
             </a:fld>
             <a:endParaRPr lang="ko-KR" altLang="en-US" noProof="0" dirty="0"/>
           </a:p>
@@ -5364,7 +5474,7 @@
             <a:pPr rtl="0"/>
             <a:fld id="{CABEE384-F18F-4153-AC21-608599869F84}" type="datetime1">
               <a:rPr lang="ko-KR" altLang="en-US" noProof="0" smtClean="0"/>
-              <a:t>2026-03-16</a:t>
+              <a:t>2026-03-17</a:t>
             </a:fld>
             <a:endParaRPr lang="ko-KR" altLang="en-US" noProof="0" dirty="0"/>
           </a:p>
@@ -5596,7 +5706,7 @@
           <a:p>
             <a:fld id="{667A4C69-65FB-481C-AC2A-84D254D33675}" type="datetime1">
               <a:rPr lang="ko-KR" altLang="en-US" smtClean="0"/>
-              <a:t>2026-03-16</a:t>
+              <a:t>2026-03-17</a:t>
             </a:fld>
             <a:endParaRPr lang="ko-KR" altLang="en-US" dirty="0"/>
           </a:p>
@@ -6202,6 +6312,303 @@
   <p:cSld>
     <p:spTree>
       <p:nvGrpSpPr>
+        <p:cNvPr id="1" name="">
+          <a:extLst>
+            <a:ext uri="{FF2B5EF4-FFF2-40B4-BE49-F238E27FC236}">
+              <a16:creationId xmlns:a16="http://schemas.microsoft.com/office/drawing/2014/main" id="{EE79E9C0-81B0-8C4F-5C8C-787A71062EC8}"/>
+            </a:ext>
+          </a:extLst>
+        </p:cNvPr>
+        <p:cNvGrpSpPr/>
+        <p:nvPr/>
+      </p:nvGrpSpPr>
+      <p:grpSpPr>
+        <a:xfrm>
+          <a:off x="0" y="0"/>
+          <a:ext cx="0" cy="0"/>
+          <a:chOff x="0" y="0"/>
+          <a:chExt cx="0" cy="0"/>
+        </a:xfrm>
+      </p:grpSpPr>
+      <p:sp>
+        <p:nvSpPr>
+          <p:cNvPr id="8" name="슬라이드 번호 개체 틀 7">
+            <a:extLst>
+              <a:ext uri="{FF2B5EF4-FFF2-40B4-BE49-F238E27FC236}">
+                <a16:creationId xmlns:a16="http://schemas.microsoft.com/office/drawing/2014/main" id="{BBD3D25E-EFF0-5F40-330C-23098F2AD3E2}"/>
+              </a:ext>
+            </a:extLst>
+          </p:cNvPr>
+          <p:cNvSpPr>
+            <a:spLocks noGrp="1"/>
+          </p:cNvSpPr>
+          <p:nvPr>
+            <p:ph type="sldNum" sz="quarter" idx="12"/>
+          </p:nvPr>
+        </p:nvSpPr>
+        <p:spPr/>
+        <p:txBody>
+          <a:bodyPr/>
+          <a:lstStyle/>
+          <a:p>
+            <a:pPr rtl="0"/>
+            <a:fld id="{A3F31473-23EB-4724-8B59-FE6D21D89FA4}" type="slidenum">
+              <a:rPr lang="en-US" altLang="ko-KR" noProof="0" smtClean="0"/>
+              <a:t>10</a:t>
+            </a:fld>
+            <a:endParaRPr lang="en-US" altLang="ko-KR" noProof="0" dirty="0"/>
+          </a:p>
+        </p:txBody>
+      </p:sp>
+      <p:pic>
+        <p:nvPicPr>
+          <p:cNvPr id="4" name="그림 3">
+            <a:extLst>
+              <a:ext uri="{FF2B5EF4-FFF2-40B4-BE49-F238E27FC236}">
+                <a16:creationId xmlns:a16="http://schemas.microsoft.com/office/drawing/2014/main" id="{D0AEC730-96C0-FDED-EAAB-33E4F3BFD9D7}"/>
+              </a:ext>
+            </a:extLst>
+          </p:cNvPr>
+          <p:cNvPicPr>
+            <a:picLocks noChangeAspect="1"/>
+          </p:cNvPicPr>
+          <p:nvPr/>
+        </p:nvPicPr>
+        <p:blipFill>
+          <a:blip r:embed="rId3"/>
+          <a:stretch>
+            <a:fillRect/>
+          </a:stretch>
+        </p:blipFill>
+        <p:spPr>
+          <a:xfrm>
+            <a:off x="4587291" y="1275706"/>
+            <a:ext cx="1882303" cy="800169"/>
+          </a:xfrm>
+          <a:prstGeom prst="rect">
+            <a:avLst/>
+          </a:prstGeom>
+        </p:spPr>
+      </p:pic>
+      <p:sp>
+        <p:nvSpPr>
+          <p:cNvPr id="5" name="TextBox 4">
+            <a:extLst>
+              <a:ext uri="{FF2B5EF4-FFF2-40B4-BE49-F238E27FC236}">
+                <a16:creationId xmlns:a16="http://schemas.microsoft.com/office/drawing/2014/main" id="{CB8A57C6-BE01-3B58-9166-EA79E5C13F5A}"/>
+              </a:ext>
+            </a:extLst>
+          </p:cNvPr>
+          <p:cNvSpPr txBox="1"/>
+          <p:nvPr/>
+        </p:nvSpPr>
+        <p:spPr>
+          <a:xfrm>
+            <a:off x="837828" y="699423"/>
+            <a:ext cx="4690615" cy="461665"/>
+          </a:xfrm>
+          <a:prstGeom prst="rect">
+            <a:avLst/>
+          </a:prstGeom>
+          <a:noFill/>
+        </p:spPr>
+        <p:txBody>
+          <a:bodyPr wrap="square" rtlCol="0">
+            <a:spAutoFit/>
+          </a:bodyPr>
+          <a:lstStyle/>
+          <a:p>
+            <a:r>
+              <a:rPr lang="en-US" altLang="ko-KR" sz="2400" b="1" dirty="0">
+                <a:hlinkClick r:id="rId4">
+                  <a:extLst>
+                    <a:ext uri="{A12FA001-AC4F-418D-AE19-62706E023703}">
+                      <ahyp:hlinkClr xmlns:ahyp="http://schemas.microsoft.com/office/drawing/2018/hyperlinkcolor" val="tx"/>
+                    </a:ext>
+                  </a:extLst>
+                </a:hlinkClick>
+              </a:rPr>
+              <a:t>standard-normal-distribution</a:t>
+            </a:r>
+            <a:endParaRPr lang="ko-KR" altLang="en-US" sz="2400" b="1" dirty="0"/>
+          </a:p>
+        </p:txBody>
+      </p:sp>
+      <p:pic>
+        <p:nvPicPr>
+          <p:cNvPr id="7" name="그림 6">
+            <a:extLst>
+              <a:ext uri="{FF2B5EF4-FFF2-40B4-BE49-F238E27FC236}">
+                <a16:creationId xmlns:a16="http://schemas.microsoft.com/office/drawing/2014/main" id="{9EDC347C-1170-0C74-BF60-0FE9675C19C2}"/>
+              </a:ext>
+            </a:extLst>
+          </p:cNvPr>
+          <p:cNvPicPr>
+            <a:picLocks noChangeAspect="1"/>
+          </p:cNvPicPr>
+          <p:nvPr/>
+        </p:nvPicPr>
+        <p:blipFill>
+          <a:blip r:embed="rId5"/>
+          <a:stretch>
+            <a:fillRect/>
+          </a:stretch>
+        </p:blipFill>
+        <p:spPr>
+          <a:xfrm>
+            <a:off x="6339908" y="2106090"/>
+            <a:ext cx="5845042" cy="4220046"/>
+          </a:xfrm>
+          <a:prstGeom prst="rect">
+            <a:avLst/>
+          </a:prstGeom>
+        </p:spPr>
+      </p:pic>
+      <p:pic>
+        <p:nvPicPr>
+          <p:cNvPr id="10" name="그림 9">
+            <a:extLst>
+              <a:ext uri="{FF2B5EF4-FFF2-40B4-BE49-F238E27FC236}">
+                <a16:creationId xmlns:a16="http://schemas.microsoft.com/office/drawing/2014/main" id="{4A8B8853-47C3-831B-B202-1FEE598974BC}"/>
+              </a:ext>
+            </a:extLst>
+          </p:cNvPr>
+          <p:cNvPicPr>
+            <a:picLocks noChangeAspect="1"/>
+          </p:cNvPicPr>
+          <p:nvPr/>
+        </p:nvPicPr>
+        <p:blipFill>
+          <a:blip r:embed="rId6"/>
+          <a:stretch>
+            <a:fillRect/>
+          </a:stretch>
+        </p:blipFill>
+        <p:spPr>
+          <a:xfrm>
+            <a:off x="117748" y="2636912"/>
+            <a:ext cx="4816257" cy="3071126"/>
+          </a:xfrm>
+          <a:prstGeom prst="rect">
+            <a:avLst/>
+          </a:prstGeom>
+        </p:spPr>
+      </p:pic>
+      <p:cxnSp>
+        <p:nvCxnSpPr>
+          <p:cNvPr id="12" name="연결선: 구부러짐 11">
+            <a:extLst>
+              <a:ext uri="{FF2B5EF4-FFF2-40B4-BE49-F238E27FC236}">
+                <a16:creationId xmlns:a16="http://schemas.microsoft.com/office/drawing/2014/main" id="{2B89B2F7-740E-AE2E-91B8-B7CD467955D1}"/>
+              </a:ext>
+            </a:extLst>
+          </p:cNvPr>
+          <p:cNvCxnSpPr>
+            <a:stCxn id="10" idx="0"/>
+            <a:endCxn id="4" idx="1"/>
+          </p:cNvCxnSpPr>
+          <p:nvPr/>
+        </p:nvCxnSpPr>
+        <p:spPr>
+          <a:xfrm rot="5400000" flipH="1" flipV="1">
+            <a:off x="3076024" y="1125645"/>
+            <a:ext cx="961121" cy="2061414"/>
+          </a:xfrm>
+          <a:prstGeom prst="curvedConnector2">
+            <a:avLst/>
+          </a:prstGeom>
+          <a:ln>
+            <a:tailEnd type="triangle"/>
+          </a:ln>
+        </p:spPr>
+        <p:style>
+          <a:lnRef idx="1">
+            <a:schemeClr val="accent1"/>
+          </a:lnRef>
+          <a:fillRef idx="0">
+            <a:schemeClr val="accent1"/>
+          </a:fillRef>
+          <a:effectRef idx="0">
+            <a:schemeClr val="accent1"/>
+          </a:effectRef>
+          <a:fontRef idx="minor">
+            <a:schemeClr val="tx1"/>
+          </a:fontRef>
+        </p:style>
+      </p:cxnSp>
+      <p:cxnSp>
+        <p:nvCxnSpPr>
+          <p:cNvPr id="13" name="연결선: 구부러짐 12">
+            <a:extLst>
+              <a:ext uri="{FF2B5EF4-FFF2-40B4-BE49-F238E27FC236}">
+                <a16:creationId xmlns:a16="http://schemas.microsoft.com/office/drawing/2014/main" id="{88D6A85B-4015-7ACD-5625-59966C8135C8}"/>
+              </a:ext>
+            </a:extLst>
+          </p:cNvPr>
+          <p:cNvCxnSpPr>
+            <a:cxnSpLocks/>
+            <a:stCxn id="4" idx="3"/>
+            <a:endCxn id="7" idx="0"/>
+          </p:cNvCxnSpPr>
+          <p:nvPr/>
+        </p:nvCxnSpPr>
+        <p:spPr>
+          <a:xfrm>
+            <a:off x="6469594" y="1675791"/>
+            <a:ext cx="2792835" cy="430299"/>
+          </a:xfrm>
+          <a:prstGeom prst="curvedConnector2">
+            <a:avLst/>
+          </a:prstGeom>
+          <a:ln>
+            <a:tailEnd type="triangle"/>
+          </a:ln>
+        </p:spPr>
+        <p:style>
+          <a:lnRef idx="1">
+            <a:schemeClr val="accent1"/>
+          </a:lnRef>
+          <a:fillRef idx="0">
+            <a:schemeClr val="accent1"/>
+          </a:fillRef>
+          <a:effectRef idx="0">
+            <a:schemeClr val="accent1"/>
+          </a:effectRef>
+          <a:fontRef idx="minor">
+            <a:schemeClr val="tx1"/>
+          </a:fontRef>
+        </p:style>
+      </p:cxnSp>
+    </p:spTree>
+    <p:extLst>
+      <p:ext uri="{BB962C8B-B14F-4D97-AF65-F5344CB8AC3E}">
+        <p14:creationId xmlns:p14="http://schemas.microsoft.com/office/powerpoint/2010/main" val="2011196701"/>
+      </p:ext>
+    </p:extLst>
+  </p:cSld>
+  <p:clrMapOvr>
+    <a:masterClrMapping/>
+  </p:clrMapOvr>
+  <mc:AlternateContent xmlns:mc="http://schemas.openxmlformats.org/markup-compatibility/2006" xmlns:p14="http://schemas.microsoft.com/office/powerpoint/2010/main">
+    <mc:Choice Requires="p14">
+      <p:transition spd="med" p14:dur="700">
+        <p:fade/>
+      </p:transition>
+    </mc:Choice>
+    <mc:Fallback xmlns="">
+      <p:transition spd="med">
+        <p:fade/>
+      </p:transition>
+    </mc:Fallback>
+  </mc:AlternateContent>
+</p:sld>
+</file>
+
+<file path=ppt/slides/slide11.xml><?xml version="1.0" encoding="utf-8"?>
+<p:sld xmlns:a="http://schemas.openxmlformats.org/drawingml/2006/main" xmlns:r="http://schemas.openxmlformats.org/officeDocument/2006/relationships" xmlns:p="http://schemas.openxmlformats.org/presentationml/2006/main">
+  <p:cSld>
+    <p:spTree>
+      <p:nvGrpSpPr>
         <p:cNvPr id="1" name=""/>
         <p:cNvGrpSpPr/>
         <p:nvPr/>
@@ -6232,7 +6639,7 @@
             <a:pPr rtl="0"/>
             <a:fld id="{A3F31473-23EB-4724-8B59-FE6D21D89FA4}" type="slidenum">
               <a:rPr lang="en-US" altLang="ko-KR" noProof="0" smtClean="0"/>
-              <a:t>10</a:t>
+              <a:t>11</a:t>
             </a:fld>
             <a:endParaRPr lang="en-US" altLang="ko-KR" noProof="0" dirty="0"/>
           </a:p>
@@ -6287,7 +6694,7 @@
 </p:sld>
 </file>
 
-<file path=ppt/slides/slide11.xml><?xml version="1.0" encoding="utf-8"?>
+<file path=ppt/slides/slide12.xml><?xml version="1.0" encoding="utf-8"?>
 <p:sld xmlns:a="http://schemas.openxmlformats.org/drawingml/2006/main" xmlns:r="http://schemas.openxmlformats.org/officeDocument/2006/relationships" xmlns:p="http://schemas.openxmlformats.org/presentationml/2006/main">
   <p:cSld>
     <p:spTree>
@@ -6322,7 +6729,7 @@
             <a:pPr rtl="0"/>
             <a:fld id="{A3F31473-23EB-4724-8B59-FE6D21D89FA4}" type="slidenum">
               <a:rPr lang="en-US" altLang="ko-KR" noProof="0" smtClean="0"/>
-              <a:t>11</a:t>
+              <a:t>12</a:t>
             </a:fld>
             <a:endParaRPr lang="en-US" altLang="ko-KR" noProof="0" dirty="0"/>
           </a:p>
@@ -6428,7 +6835,7 @@
 </p:sld>
 </file>
 
-<file path=ppt/slides/slide12.xml><?xml version="1.0" encoding="utf-8"?>
+<file path=ppt/slides/slide13.xml><?xml version="1.0" encoding="utf-8"?>
 <p:sld xmlns:a="http://schemas.openxmlformats.org/drawingml/2006/main" xmlns:r="http://schemas.openxmlformats.org/officeDocument/2006/relationships" xmlns:p="http://schemas.openxmlformats.org/presentationml/2006/main">
   <p:cSld>
     <p:spTree>
@@ -6463,7 +6870,7 @@
             <a:pPr rtl="0"/>
             <a:fld id="{A3F31473-23EB-4724-8B59-FE6D21D89FA4}" type="slidenum">
               <a:rPr lang="en-US" altLang="ko-KR" noProof="0" smtClean="0"/>
-              <a:t>12</a:t>
+              <a:t>13</a:t>
             </a:fld>
             <a:endParaRPr lang="en-US" altLang="ko-KR" noProof="0" dirty="0"/>
           </a:p>
@@ -6552,7 +6959,7 @@
 </p:sld>
 </file>
 
-<file path=ppt/slides/slide13.xml><?xml version="1.0" encoding="utf-8"?>
+<file path=ppt/slides/slide14.xml><?xml version="1.0" encoding="utf-8"?>
 <p:sld xmlns:a="http://schemas.openxmlformats.org/drawingml/2006/main" xmlns:r="http://schemas.openxmlformats.org/officeDocument/2006/relationships" xmlns:p="http://schemas.openxmlformats.org/presentationml/2006/main">
   <p:cSld>
     <p:spTree>
@@ -6599,7 +7006,7 @@
             <a:pPr rtl="0"/>
             <a:fld id="{A3F31473-23EB-4724-8B59-FE6D21D89FA4}" type="slidenum">
               <a:rPr lang="en-US" altLang="ko-KR" noProof="0" smtClean="0"/>
-              <a:t>13</a:t>
+              <a:t>14</a:t>
             </a:fld>
             <a:endParaRPr lang="en-US" altLang="ko-KR" noProof="0" dirty="0"/>
           </a:p>
@@ -6795,7 +7202,7 @@
 </p:sld>
 </file>
 
-<file path=ppt/slides/slide14.xml><?xml version="1.0" encoding="utf-8"?>
+<file path=ppt/slides/slide15.xml><?xml version="1.0" encoding="utf-8"?>
 <p:sld xmlns:a="http://schemas.openxmlformats.org/drawingml/2006/main" xmlns:r="http://schemas.openxmlformats.org/officeDocument/2006/relationships" xmlns:p="http://schemas.openxmlformats.org/presentationml/2006/main">
   <p:cSld>
     <p:spTree>
@@ -6830,7 +7237,7 @@
             <a:pPr rtl="0"/>
             <a:fld id="{A3F31473-23EB-4724-8B59-FE6D21D89FA4}" type="slidenum">
               <a:rPr lang="en-US" altLang="ko-KR" noProof="0" smtClean="0"/>
-              <a:t>14</a:t>
+              <a:t>15</a:t>
             </a:fld>
             <a:endParaRPr lang="en-US" altLang="ko-KR" noProof="0" dirty="0"/>
           </a:p>
@@ -6885,7 +7292,7 @@
 </p:sld>
 </file>
 
-<file path=ppt/slides/slide15.xml><?xml version="1.0" encoding="utf-8"?>
+<file path=ppt/slides/slide16.xml><?xml version="1.0" encoding="utf-8"?>
 <p:sld xmlns:a="http://schemas.openxmlformats.org/drawingml/2006/main" xmlns:r="http://schemas.openxmlformats.org/officeDocument/2006/relationships" xmlns:p="http://schemas.openxmlformats.org/presentationml/2006/main">
   <p:cSld>
     <p:spTree>
@@ -6932,7 +7339,7 @@
             <a:pPr rtl="0"/>
             <a:fld id="{A3F31473-23EB-4724-8B59-FE6D21D89FA4}" type="slidenum">
               <a:rPr lang="en-US" altLang="ko-KR" noProof="0" smtClean="0"/>
-              <a:t>15</a:t>
+              <a:t>16</a:t>
             </a:fld>
             <a:endParaRPr lang="en-US" altLang="ko-KR" noProof="0" dirty="0"/>
           </a:p>
@@ -7467,7 +7874,7 @@
 </p:sld>
 </file>
 
-<file path=ppt/slides/slide16.xml><?xml version="1.0" encoding="utf-8"?>
+<file path=ppt/slides/slide17.xml><?xml version="1.0" encoding="utf-8"?>
 <p:sld xmlns:a="http://schemas.openxmlformats.org/drawingml/2006/main" xmlns:r="http://schemas.openxmlformats.org/officeDocument/2006/relationships" xmlns:p="http://schemas.openxmlformats.org/presentationml/2006/main">
   <p:cSld>
     <p:spTree>
@@ -7502,7 +7909,7 @@
             <a:pPr rtl="0"/>
             <a:fld id="{A3F31473-23EB-4724-8B59-FE6D21D89FA4}" type="slidenum">
               <a:rPr lang="en-US" altLang="ko-KR" noProof="0" smtClean="0"/>
-              <a:t>16</a:t>
+              <a:t>17</a:t>
             </a:fld>
             <a:endParaRPr lang="en-US" altLang="ko-KR" noProof="0" dirty="0"/>
           </a:p>
@@ -7557,7 +7964,7 @@
 </p:sld>
 </file>
 
-<file path=ppt/slides/slide17.xml><?xml version="1.0" encoding="utf-8"?>
+<file path=ppt/slides/slide18.xml><?xml version="1.0" encoding="utf-8"?>
 <p:sld xmlns:a="http://schemas.openxmlformats.org/drawingml/2006/main" xmlns:r="http://schemas.openxmlformats.org/officeDocument/2006/relationships" xmlns:p="http://schemas.openxmlformats.org/presentationml/2006/main">
   <p:cSld>
     <p:spTree>
@@ -7592,7 +7999,7 @@
             <a:pPr rtl="0"/>
             <a:fld id="{A3F31473-23EB-4724-8B59-FE6D21D89FA4}" type="slidenum">
               <a:rPr lang="en-US" altLang="ko-KR" noProof="0" smtClean="0"/>
-              <a:t>17</a:t>
+              <a:t>18</a:t>
             </a:fld>
             <a:endParaRPr lang="en-US" altLang="ko-KR" noProof="0" dirty="0"/>
           </a:p>
@@ -7653,7 +8060,7 @@
 </p:sld>
 </file>
 
-<file path=ppt/slides/slide18.xml><?xml version="1.0" encoding="utf-8"?>
+<file path=ppt/slides/slide19.xml><?xml version="1.0" encoding="utf-8"?>
 <p:sld xmlns:a="http://schemas.openxmlformats.org/drawingml/2006/main" xmlns:r="http://schemas.openxmlformats.org/officeDocument/2006/relationships" xmlns:p="http://schemas.openxmlformats.org/presentationml/2006/main">
   <p:cSld>
     <p:spTree>
@@ -7700,7 +8107,7 @@
             <a:pPr rtl="0"/>
             <a:fld id="{A3F31473-23EB-4724-8B59-FE6D21D89FA4}" type="slidenum">
               <a:rPr lang="en-US" altLang="ko-KR" noProof="0" smtClean="0"/>
-              <a:t>18</a:t>
+              <a:t>19</a:t>
             </a:fld>
             <a:endParaRPr lang="en-US" altLang="ko-KR" noProof="0" dirty="0"/>
           </a:p>
@@ -8424,7 +8831,663 @@
 </p:sld>
 </file>
 
-<file path=ppt/slides/slide19.xml><?xml version="1.0" encoding="utf-8"?>
+<file path=ppt/slides/slide2.xml><?xml version="1.0" encoding="utf-8"?>
+<p:sld xmlns:a="http://schemas.openxmlformats.org/drawingml/2006/main" xmlns:r="http://schemas.openxmlformats.org/officeDocument/2006/relationships" xmlns:p="http://schemas.openxmlformats.org/presentationml/2006/main">
+  <p:cSld>
+    <p:spTree>
+      <p:nvGrpSpPr>
+        <p:cNvPr id="1" name="">
+          <a:extLst>
+            <a:ext uri="{FF2B5EF4-FFF2-40B4-BE49-F238E27FC236}">
+              <a16:creationId xmlns:a16="http://schemas.microsoft.com/office/drawing/2014/main" id="{7690E2C1-BB1A-4FCC-4EBC-8B540F598F5F}"/>
+            </a:ext>
+          </a:extLst>
+        </p:cNvPr>
+        <p:cNvGrpSpPr/>
+        <p:nvPr/>
+      </p:nvGrpSpPr>
+      <p:grpSpPr>
+        <a:xfrm>
+          <a:off x="0" y="0"/>
+          <a:ext cx="0" cy="0"/>
+          <a:chOff x="0" y="0"/>
+          <a:chExt cx="0" cy="0"/>
+        </a:xfrm>
+      </p:grpSpPr>
+      <p:pic>
+        <p:nvPicPr>
+          <p:cNvPr id="23" name="그림 22">
+            <a:extLst>
+              <a:ext uri="{FF2B5EF4-FFF2-40B4-BE49-F238E27FC236}">
+                <a16:creationId xmlns:a16="http://schemas.microsoft.com/office/drawing/2014/main" id="{2F7740F9-27E4-C53E-CB3B-D47E195CF1E7}"/>
+              </a:ext>
+            </a:extLst>
+          </p:cNvPr>
+          <p:cNvPicPr>
+            <a:picLocks noChangeAspect="1"/>
+          </p:cNvPicPr>
+          <p:nvPr/>
+        </p:nvPicPr>
+        <p:blipFill>
+          <a:blip r:embed="rId3"/>
+          <a:stretch>
+            <a:fillRect/>
+          </a:stretch>
+        </p:blipFill>
+        <p:spPr>
+          <a:xfrm>
+            <a:off x="1439784" y="1638552"/>
+            <a:ext cx="9407156" cy="4526752"/>
+          </a:xfrm>
+          <a:prstGeom prst="rect">
+            <a:avLst/>
+          </a:prstGeom>
+        </p:spPr>
+      </p:pic>
+      <p:sp>
+        <p:nvSpPr>
+          <p:cNvPr id="8" name="슬라이드 번호 개체 틀 7">
+            <a:extLst>
+              <a:ext uri="{FF2B5EF4-FFF2-40B4-BE49-F238E27FC236}">
+                <a16:creationId xmlns:a16="http://schemas.microsoft.com/office/drawing/2014/main" id="{4EF241B0-03F6-4174-6351-DEA7C3022824}"/>
+              </a:ext>
+            </a:extLst>
+          </p:cNvPr>
+          <p:cNvSpPr>
+            <a:spLocks noGrp="1"/>
+          </p:cNvSpPr>
+          <p:nvPr>
+            <p:ph type="sldNum" sz="quarter" idx="12"/>
+          </p:nvPr>
+        </p:nvSpPr>
+        <p:spPr/>
+        <p:txBody>
+          <a:bodyPr/>
+          <a:lstStyle/>
+          <a:p>
+            <a:pPr rtl="0"/>
+            <a:fld id="{A3F31473-23EB-4724-8B59-FE6D21D89FA4}" type="slidenum">
+              <a:rPr lang="en-US" altLang="ko-KR" noProof="0" smtClean="0"/>
+              <a:t>2</a:t>
+            </a:fld>
+            <a:endParaRPr lang="en-US" altLang="ko-KR" noProof="0" dirty="0"/>
+          </a:p>
+        </p:txBody>
+      </p:sp>
+      <p:sp>
+        <p:nvSpPr>
+          <p:cNvPr id="3" name="TextBox 2">
+            <a:extLst>
+              <a:ext uri="{FF2B5EF4-FFF2-40B4-BE49-F238E27FC236}">
+                <a16:creationId xmlns:a16="http://schemas.microsoft.com/office/drawing/2014/main" id="{9969E69D-4C2D-C812-DDC5-4721F324AC9B}"/>
+              </a:ext>
+            </a:extLst>
+          </p:cNvPr>
+          <p:cNvSpPr txBox="1"/>
+          <p:nvPr/>
+        </p:nvSpPr>
+        <p:spPr>
+          <a:xfrm>
+            <a:off x="591294" y="423483"/>
+            <a:ext cx="11191750" cy="873124"/>
+          </a:xfrm>
+          <a:prstGeom prst="rect">
+            <a:avLst/>
+          </a:prstGeom>
+          <a:noFill/>
+        </p:spPr>
+        <p:txBody>
+          <a:bodyPr wrap="square">
+            <a:spAutoFit/>
+          </a:bodyPr>
+          <a:lstStyle/>
+          <a:p>
+            <a:pPr marL="285750" indent="-285750">
+              <a:lnSpc>
+                <a:spcPct val="150000"/>
+              </a:lnSpc>
+              <a:buFont typeface="Wingdings" panose="05000000000000000000" pitchFamily="2" charset="2"/>
+              <a:buChar char="v"/>
+            </a:pPr>
+            <a:r>
+              <a:rPr lang="ko-KR" altLang="en-US" dirty="0">
+                <a:latin typeface="한컴 말랑말랑 Bold" panose="020F0803000000000000" pitchFamily="50" charset="-127"/>
+                <a:ea typeface="한컴 말랑말랑 Bold" panose="020F0803000000000000" pitchFamily="50" charset="-127"/>
+              </a:rPr>
+              <a:t>표본</a:t>
+            </a:r>
+            <a:r>
+              <a:rPr lang="en-US" altLang="ko-KR" dirty="0">
+                <a:latin typeface="한컴 말랑말랑 Bold" panose="020F0803000000000000" pitchFamily="50" charset="-127"/>
+                <a:ea typeface="한컴 말랑말랑 Bold" panose="020F0803000000000000" pitchFamily="50" charset="-127"/>
+              </a:rPr>
+              <a:t>(Sample)</a:t>
+            </a:r>
+            <a:r>
+              <a:rPr lang="ko-KR" altLang="en-US" dirty="0">
+                <a:latin typeface="한컴 말랑말랑 Bold" panose="020F0803000000000000" pitchFamily="50" charset="-127"/>
+                <a:ea typeface="한컴 말랑말랑 Bold" panose="020F0803000000000000" pitchFamily="50" charset="-127"/>
+              </a:rPr>
+              <a:t>으로부터 얻은 정보</a:t>
+            </a:r>
+            <a:r>
+              <a:rPr lang="en-US" altLang="ko-KR" dirty="0">
+                <a:latin typeface="한컴 말랑말랑 Bold" panose="020F0803000000000000" pitchFamily="50" charset="-127"/>
+                <a:ea typeface="한컴 말랑말랑 Bold" panose="020F0803000000000000" pitchFamily="50" charset="-127"/>
+              </a:rPr>
+              <a:t>(</a:t>
+            </a:r>
+            <a:r>
+              <a:rPr lang="ko-KR" altLang="en-US" dirty="0">
+                <a:latin typeface="한컴 말랑말랑 Bold" panose="020F0803000000000000" pitchFamily="50" charset="-127"/>
+                <a:ea typeface="한컴 말랑말랑 Bold" panose="020F0803000000000000" pitchFamily="50" charset="-127"/>
+              </a:rPr>
+              <a:t>통계량</a:t>
+            </a:r>
+            <a:r>
+              <a:rPr lang="en-US" altLang="ko-KR" dirty="0">
+                <a:latin typeface="한컴 말랑말랑 Bold" panose="020F0803000000000000" pitchFamily="50" charset="-127"/>
+                <a:ea typeface="한컴 말랑말랑 Bold" panose="020F0803000000000000" pitchFamily="50" charset="-127"/>
+              </a:rPr>
+              <a:t>)</a:t>
+            </a:r>
+            <a:r>
+              <a:rPr lang="ko-KR" altLang="en-US" dirty="0">
+                <a:latin typeface="한컴 말랑말랑 Bold" panose="020F0803000000000000" pitchFamily="50" charset="-127"/>
+                <a:ea typeface="한컴 말랑말랑 Bold" panose="020F0803000000000000" pitchFamily="50" charset="-127"/>
+              </a:rPr>
+              <a:t>를 바탕으로 우리가 직접 확인할 수 없는 모집단</a:t>
+            </a:r>
+            <a:r>
+              <a:rPr lang="en-US" altLang="ko-KR" dirty="0">
+                <a:latin typeface="한컴 말랑말랑 Bold" panose="020F0803000000000000" pitchFamily="50" charset="-127"/>
+                <a:ea typeface="한컴 말랑말랑 Bold" panose="020F0803000000000000" pitchFamily="50" charset="-127"/>
+              </a:rPr>
+              <a:t>(Population)</a:t>
+            </a:r>
+            <a:r>
+              <a:rPr lang="ko-KR" altLang="en-US" dirty="0">
+                <a:latin typeface="한컴 말랑말랑 Bold" panose="020F0803000000000000" pitchFamily="50" charset="-127"/>
+                <a:ea typeface="한컴 말랑말랑 Bold" panose="020F0803000000000000" pitchFamily="50" charset="-127"/>
+              </a:rPr>
+              <a:t>의 특성인 </a:t>
+            </a:r>
+            <a:r>
+              <a:rPr lang="ko-KR" altLang="en-US" dirty="0" err="1">
+                <a:latin typeface="한컴 말랑말랑 Bold" panose="020F0803000000000000" pitchFamily="50" charset="-127"/>
+                <a:ea typeface="한컴 말랑말랑 Bold" panose="020F0803000000000000" pitchFamily="50" charset="-127"/>
+              </a:rPr>
+              <a:t>모수</a:t>
+            </a:r>
+            <a:r>
+              <a:rPr lang="en-US" altLang="ko-KR" dirty="0">
+                <a:latin typeface="한컴 말랑말랑 Bold" panose="020F0803000000000000" pitchFamily="50" charset="-127"/>
+                <a:ea typeface="한컴 말랑말랑 Bold" panose="020F0803000000000000" pitchFamily="50" charset="-127"/>
+              </a:rPr>
+              <a:t>(Parameter)</a:t>
+            </a:r>
+            <a:r>
+              <a:rPr lang="ko-KR" altLang="en-US" dirty="0">
+                <a:latin typeface="한컴 말랑말랑 Bold" panose="020F0803000000000000" pitchFamily="50" charset="-127"/>
+                <a:ea typeface="한컴 말랑말랑 Bold" panose="020F0803000000000000" pitchFamily="50" charset="-127"/>
+              </a:rPr>
+              <a:t>를 추측</a:t>
+            </a:r>
+            <a:r>
+              <a:rPr lang="en-US" altLang="ko-KR" dirty="0">
+                <a:latin typeface="한컴 말랑말랑 Bold" panose="020F0803000000000000" pitchFamily="50" charset="-127"/>
+                <a:ea typeface="한컴 말랑말랑 Bold" panose="020F0803000000000000" pitchFamily="50" charset="-127"/>
+              </a:rPr>
+              <a:t>(Estimate)</a:t>
+            </a:r>
+            <a:r>
+              <a:rPr lang="ko-KR" altLang="en-US" dirty="0">
+                <a:latin typeface="한컴 말랑말랑 Bold" panose="020F0803000000000000" pitchFamily="50" charset="-127"/>
+                <a:ea typeface="한컴 말랑말랑 Bold" panose="020F0803000000000000" pitchFamily="50" charset="-127"/>
+              </a:rPr>
+              <a:t>하는 과정</a:t>
+            </a:r>
+            <a:endParaRPr lang="en-US" altLang="ko-KR" dirty="0">
+              <a:latin typeface="한컴 말랑말랑 Bold" panose="020F0803000000000000" pitchFamily="50" charset="-127"/>
+              <a:ea typeface="한컴 말랑말랑 Bold" panose="020F0803000000000000" pitchFamily="50" charset="-127"/>
+            </a:endParaRPr>
+          </a:p>
+        </p:txBody>
+      </p:sp>
+      <p:pic>
+        <p:nvPicPr>
+          <p:cNvPr id="11" name="그림 10">
+            <a:extLst>
+              <a:ext uri="{FF2B5EF4-FFF2-40B4-BE49-F238E27FC236}">
+                <a16:creationId xmlns:a16="http://schemas.microsoft.com/office/drawing/2014/main" id="{E88E14C8-D847-8386-AF10-B67948C8045E}"/>
+              </a:ext>
+            </a:extLst>
+          </p:cNvPr>
+          <p:cNvPicPr>
+            <a:picLocks noChangeAspect="1"/>
+          </p:cNvPicPr>
+          <p:nvPr/>
+        </p:nvPicPr>
+        <p:blipFill>
+          <a:blip r:embed="rId4"/>
+          <a:stretch>
+            <a:fillRect/>
+          </a:stretch>
+        </p:blipFill>
+        <p:spPr>
+          <a:xfrm>
+            <a:off x="4534321" y="5667663"/>
+            <a:ext cx="1396608" cy="422757"/>
+          </a:xfrm>
+          <a:prstGeom prst="rect">
+            <a:avLst/>
+          </a:prstGeom>
+        </p:spPr>
+      </p:pic>
+      <p:pic>
+        <p:nvPicPr>
+          <p:cNvPr id="15" name="그림 14">
+            <a:extLst>
+              <a:ext uri="{FF2B5EF4-FFF2-40B4-BE49-F238E27FC236}">
+                <a16:creationId xmlns:a16="http://schemas.microsoft.com/office/drawing/2014/main" id="{C244365C-50E4-FE33-6E55-3A63E827AB83}"/>
+              </a:ext>
+            </a:extLst>
+          </p:cNvPr>
+          <p:cNvPicPr>
+            <a:picLocks noChangeAspect="1"/>
+          </p:cNvPicPr>
+          <p:nvPr/>
+        </p:nvPicPr>
+        <p:blipFill>
+          <a:blip r:embed="rId5"/>
+          <a:stretch>
+            <a:fillRect/>
+          </a:stretch>
+        </p:blipFill>
+        <p:spPr>
+          <a:xfrm>
+            <a:off x="9139056" y="5702640"/>
+            <a:ext cx="1073215" cy="361758"/>
+          </a:xfrm>
+          <a:prstGeom prst="rect">
+            <a:avLst/>
+          </a:prstGeom>
+        </p:spPr>
+      </p:pic>
+      <p:pic>
+        <p:nvPicPr>
+          <p:cNvPr id="19" name="그림 18">
+            <a:extLst>
+              <a:ext uri="{FF2B5EF4-FFF2-40B4-BE49-F238E27FC236}">
+                <a16:creationId xmlns:a16="http://schemas.microsoft.com/office/drawing/2014/main" id="{D8CA8D10-EEED-BFF4-9620-A60E713E1698}"/>
+              </a:ext>
+            </a:extLst>
+          </p:cNvPr>
+          <p:cNvPicPr>
+            <a:picLocks noChangeAspect="1"/>
+          </p:cNvPicPr>
+          <p:nvPr/>
+        </p:nvPicPr>
+        <p:blipFill>
+          <a:blip r:embed="rId6"/>
+          <a:stretch>
+            <a:fillRect/>
+          </a:stretch>
+        </p:blipFill>
+        <p:spPr>
+          <a:xfrm>
+            <a:off x="9139056" y="5079253"/>
+            <a:ext cx="952693" cy="458165"/>
+          </a:xfrm>
+          <a:prstGeom prst="rect">
+            <a:avLst/>
+          </a:prstGeom>
+        </p:spPr>
+      </p:pic>
+      <p:pic>
+        <p:nvPicPr>
+          <p:cNvPr id="21" name="그림 20">
+            <a:extLst>
+              <a:ext uri="{FF2B5EF4-FFF2-40B4-BE49-F238E27FC236}">
+                <a16:creationId xmlns:a16="http://schemas.microsoft.com/office/drawing/2014/main" id="{99C56E69-4866-ACDC-66C9-09E7DD22E0B5}"/>
+              </a:ext>
+            </a:extLst>
+          </p:cNvPr>
+          <p:cNvPicPr>
+            <a:picLocks noChangeAspect="1"/>
+          </p:cNvPicPr>
+          <p:nvPr/>
+        </p:nvPicPr>
+        <p:blipFill>
+          <a:blip r:embed="rId7"/>
+          <a:stretch>
+            <a:fillRect/>
+          </a:stretch>
+        </p:blipFill>
+        <p:spPr>
+          <a:xfrm>
+            <a:off x="4559017" y="5078003"/>
+            <a:ext cx="1046865" cy="459415"/>
+          </a:xfrm>
+          <a:prstGeom prst="rect">
+            <a:avLst/>
+          </a:prstGeom>
+        </p:spPr>
+      </p:pic>
+      <p:cxnSp>
+        <p:nvCxnSpPr>
+          <p:cNvPr id="30" name="연결선: 꺾임 29">
+            <a:extLst>
+              <a:ext uri="{FF2B5EF4-FFF2-40B4-BE49-F238E27FC236}">
+                <a16:creationId xmlns:a16="http://schemas.microsoft.com/office/drawing/2014/main" id="{CB68CFCC-51B8-9ADE-A862-33AB5157120C}"/>
+              </a:ext>
+            </a:extLst>
+          </p:cNvPr>
+          <p:cNvCxnSpPr>
+            <a:cxnSpLocks/>
+            <a:stCxn id="31" idx="2"/>
+            <a:endCxn id="33" idx="2"/>
+          </p:cNvCxnSpPr>
+          <p:nvPr/>
+        </p:nvCxnSpPr>
+        <p:spPr>
+          <a:xfrm rot="5400000">
+            <a:off x="5595002" y="3289630"/>
+            <a:ext cx="422756" cy="4752528"/>
+          </a:xfrm>
+          <a:prstGeom prst="bentConnector3">
+            <a:avLst>
+              <a:gd name="adj1" fmla="val 234412"/>
+            </a:avLst>
+          </a:prstGeom>
+          <a:ln w="28575">
+            <a:solidFill>
+              <a:srgbClr val="0070C0"/>
+            </a:solidFill>
+            <a:prstDash val="sysDot"/>
+            <a:tailEnd type="triangle"/>
+          </a:ln>
+        </p:spPr>
+        <p:style>
+          <a:lnRef idx="1">
+            <a:schemeClr val="accent1"/>
+          </a:lnRef>
+          <a:fillRef idx="0">
+            <a:schemeClr val="accent1"/>
+          </a:fillRef>
+          <a:effectRef idx="0">
+            <a:schemeClr val="accent1"/>
+          </a:effectRef>
+          <a:fontRef idx="minor">
+            <a:schemeClr val="tx1"/>
+          </a:fontRef>
+        </p:style>
+      </p:cxnSp>
+      <p:sp>
+        <p:nvSpPr>
+          <p:cNvPr id="31" name="TextBox 30">
+            <a:extLst>
+              <a:ext uri="{FF2B5EF4-FFF2-40B4-BE49-F238E27FC236}">
+                <a16:creationId xmlns:a16="http://schemas.microsoft.com/office/drawing/2014/main" id="{5789674A-A293-AAF4-63E2-45D1C3A1DA84}"/>
+              </a:ext>
+            </a:extLst>
+          </p:cNvPr>
+          <p:cNvSpPr txBox="1"/>
+          <p:nvPr/>
+        </p:nvSpPr>
+        <p:spPr>
+          <a:xfrm>
+            <a:off x="7318548" y="5085184"/>
+            <a:ext cx="1728192" cy="369332"/>
+          </a:xfrm>
+          <a:prstGeom prst="rect">
+            <a:avLst/>
+          </a:prstGeom>
+          <a:noFill/>
+        </p:spPr>
+        <p:txBody>
+          <a:bodyPr wrap="square" rtlCol="0">
+            <a:spAutoFit/>
+          </a:bodyPr>
+          <a:lstStyle/>
+          <a:p>
+            <a:r>
+              <a:rPr lang="en-US" altLang="ko-KR" dirty="0"/>
+              <a:t>  </a:t>
+            </a:r>
+            <a:endParaRPr lang="ko-KR" altLang="en-US" dirty="0"/>
+          </a:p>
+        </p:txBody>
+      </p:sp>
+      <p:sp>
+        <p:nvSpPr>
+          <p:cNvPr id="33" name="TextBox 32">
+            <a:extLst>
+              <a:ext uri="{FF2B5EF4-FFF2-40B4-BE49-F238E27FC236}">
+                <a16:creationId xmlns:a16="http://schemas.microsoft.com/office/drawing/2014/main" id="{364EE4B9-6EFF-6D7D-BFB7-C176B643F6B2}"/>
+              </a:ext>
+            </a:extLst>
+          </p:cNvPr>
+          <p:cNvSpPr txBox="1"/>
+          <p:nvPr/>
+        </p:nvSpPr>
+        <p:spPr>
+          <a:xfrm>
+            <a:off x="2566020" y="5507940"/>
+            <a:ext cx="1728192" cy="369332"/>
+          </a:xfrm>
+          <a:prstGeom prst="rect">
+            <a:avLst/>
+          </a:prstGeom>
+          <a:noFill/>
+        </p:spPr>
+        <p:txBody>
+          <a:bodyPr wrap="square" rtlCol="0">
+            <a:spAutoFit/>
+          </a:bodyPr>
+          <a:lstStyle/>
+          <a:p>
+            <a:r>
+              <a:rPr lang="en-US" altLang="ko-KR" dirty="0"/>
+              <a:t>  </a:t>
+            </a:r>
+            <a:endParaRPr lang="ko-KR" altLang="en-US" dirty="0"/>
+          </a:p>
+        </p:txBody>
+      </p:sp>
+      <p:sp>
+        <p:nvSpPr>
+          <p:cNvPr id="39" name="TextBox 38">
+            <a:extLst>
+              <a:ext uri="{FF2B5EF4-FFF2-40B4-BE49-F238E27FC236}">
+                <a16:creationId xmlns:a16="http://schemas.microsoft.com/office/drawing/2014/main" id="{AB03C50B-5D70-FE55-B239-837D71B20DFC}"/>
+              </a:ext>
+            </a:extLst>
+          </p:cNvPr>
+          <p:cNvSpPr txBox="1"/>
+          <p:nvPr/>
+        </p:nvSpPr>
+        <p:spPr>
+          <a:xfrm>
+            <a:off x="6205191" y="6007350"/>
+            <a:ext cx="1822276" cy="369332"/>
+          </a:xfrm>
+          <a:prstGeom prst="rect">
+            <a:avLst/>
+          </a:prstGeom>
+          <a:noFill/>
+        </p:spPr>
+        <p:txBody>
+          <a:bodyPr wrap="square">
+            <a:spAutoFit/>
+          </a:bodyPr>
+          <a:lstStyle/>
+          <a:p>
+            <a:r>
+              <a:rPr lang="ko-KR" altLang="en-US" b="1" dirty="0">
+                <a:solidFill>
+                  <a:schemeClr val="bg2">
+                    <a:lumMod val="75000"/>
+                  </a:schemeClr>
+                </a:solidFill>
+                <a:latin typeface="한컴 말랑말랑 Bold" panose="020F0803000000000000" pitchFamily="50" charset="-127"/>
+                <a:ea typeface="한컴 말랑말랑 Bold" panose="020F0803000000000000" pitchFamily="50" charset="-127"/>
+              </a:rPr>
+              <a:t>추정</a:t>
+            </a:r>
+            <a:r>
+              <a:rPr lang="en-US" altLang="ko-KR" b="1" dirty="0">
+                <a:solidFill>
+                  <a:schemeClr val="bg2">
+                    <a:lumMod val="75000"/>
+                  </a:schemeClr>
+                </a:solidFill>
+                <a:latin typeface="한컴 말랑말랑 Bold" panose="020F0803000000000000" pitchFamily="50" charset="-127"/>
+                <a:ea typeface="한컴 말랑말랑 Bold" panose="020F0803000000000000" pitchFamily="50" charset="-127"/>
+              </a:rPr>
+              <a:t>(Estimation)</a:t>
+            </a:r>
+            <a:endParaRPr lang="ko-KR" altLang="en-US" b="1" dirty="0">
+              <a:solidFill>
+                <a:schemeClr val="bg2">
+                  <a:lumMod val="75000"/>
+                </a:schemeClr>
+              </a:solidFill>
+            </a:endParaRPr>
+          </a:p>
+        </p:txBody>
+      </p:sp>
+    </p:spTree>
+    <p:extLst>
+      <p:ext uri="{BB962C8B-B14F-4D97-AF65-F5344CB8AC3E}">
+        <p14:creationId xmlns:p14="http://schemas.microsoft.com/office/powerpoint/2010/main" val="810907724"/>
+      </p:ext>
+    </p:extLst>
+  </p:cSld>
+  <p:clrMapOvr>
+    <a:masterClrMapping/>
+  </p:clrMapOvr>
+  <mc:AlternateContent xmlns:mc="http://schemas.openxmlformats.org/markup-compatibility/2006" xmlns:p14="http://schemas.microsoft.com/office/powerpoint/2010/main">
+    <mc:Choice Requires="p14">
+      <p:transition spd="med" p14:dur="700">
+        <p:fade/>
+      </p:transition>
+    </mc:Choice>
+    <mc:Fallback xmlns="">
+      <p:transition spd="med">
+        <p:fade/>
+      </p:transition>
+    </mc:Fallback>
+  </mc:AlternateContent>
+  <p:timing>
+    <p:tnLst>
+      <p:par>
+        <p:cTn id="1" dur="indefinite" restart="never" nodeType="tmRoot">
+          <p:childTnLst>
+            <p:seq concurrent="1" nextAc="seek">
+              <p:cTn id="2" dur="indefinite" nodeType="mainSeq">
+                <p:childTnLst>
+                  <p:par>
+                    <p:cTn id="3" fill="hold">
+                      <p:stCondLst>
+                        <p:cond delay="indefinite"/>
+                      </p:stCondLst>
+                      <p:childTnLst>
+                        <p:par>
+                          <p:cTn id="4" fill="hold">
+                            <p:stCondLst>
+                              <p:cond delay="0"/>
+                            </p:stCondLst>
+                            <p:childTnLst>
+                              <p:par>
+                                <p:cTn id="5" presetID="1" presetClass="entr" presetSubtype="0" fill="hold" grpId="0" nodeType="clickEffect">
+                                  <p:stCondLst>
+                                    <p:cond delay="0"/>
+                                  </p:stCondLst>
+                                  <p:childTnLst>
+                                    <p:set>
+                                      <p:cBhvr>
+                                        <p:cTn id="6" dur="1" fill="hold">
+                                          <p:stCondLst>
+                                            <p:cond delay="0"/>
+                                          </p:stCondLst>
+                                        </p:cTn>
+                                        <p:tgtEl>
+                                          <p:spTgt spid="39"/>
+                                        </p:tgtEl>
+                                        <p:attrNameLst>
+                                          <p:attrName>style.visibility</p:attrName>
+                                        </p:attrNameLst>
+                                      </p:cBhvr>
+                                      <p:to>
+                                        <p:strVal val="visible"/>
+                                      </p:to>
+                                    </p:set>
+                                  </p:childTnLst>
+                                </p:cTn>
+                              </p:par>
+                              <p:par>
+                                <p:cTn id="7" presetID="1" presetClass="entr" presetSubtype="0" fill="hold" nodeType="withEffect">
+                                  <p:stCondLst>
+                                    <p:cond delay="0"/>
+                                  </p:stCondLst>
+                                  <p:childTnLst>
+                                    <p:set>
+                                      <p:cBhvr>
+                                        <p:cTn id="8" dur="1" fill="hold">
+                                          <p:stCondLst>
+                                            <p:cond delay="0"/>
+                                          </p:stCondLst>
+                                        </p:cTn>
+                                        <p:tgtEl>
+                                          <p:spTgt spid="30"/>
+                                        </p:tgtEl>
+                                        <p:attrNameLst>
+                                          <p:attrName>style.visibility</p:attrName>
+                                        </p:attrNameLst>
+                                      </p:cBhvr>
+                                      <p:to>
+                                        <p:strVal val="visible"/>
+                                      </p:to>
+                                    </p:set>
+                                  </p:childTnLst>
+                                </p:cTn>
+                              </p:par>
+                            </p:childTnLst>
+                          </p:cTn>
+                        </p:par>
+                      </p:childTnLst>
+                    </p:cTn>
+                  </p:par>
+                </p:childTnLst>
+              </p:cTn>
+              <p:prevCondLst>
+                <p:cond evt="onPrev" delay="0">
+                  <p:tgtEl>
+                    <p:sldTgt/>
+                  </p:tgtEl>
+                </p:cond>
+              </p:prevCondLst>
+              <p:nextCondLst>
+                <p:cond evt="onNext" delay="0">
+                  <p:tgtEl>
+                    <p:sldTgt/>
+                  </p:tgtEl>
+                </p:cond>
+              </p:nextCondLst>
+            </p:seq>
+          </p:childTnLst>
+        </p:cTn>
+      </p:par>
+    </p:tnLst>
+    <p:bldLst>
+      <p:bldP spid="39" grpId="0"/>
+    </p:bldLst>
+  </p:timing>
+</p:sld>
+</file>
+
+<file path=ppt/slides/slide20.xml><?xml version="1.0" encoding="utf-8"?>
 <p:sld xmlns:a="http://schemas.openxmlformats.org/drawingml/2006/main" xmlns:r="http://schemas.openxmlformats.org/officeDocument/2006/relationships" xmlns:p="http://schemas.openxmlformats.org/presentationml/2006/main">
   <p:cSld>
     <p:spTree>
@@ -8459,7 +9522,7 @@
             <a:pPr rtl="0"/>
             <a:fld id="{A3F31473-23EB-4724-8B59-FE6D21D89FA4}" type="slidenum">
               <a:rPr lang="en-US" altLang="ko-KR" noProof="0" smtClean="0"/>
-              <a:t>19</a:t>
+              <a:t>20</a:t>
             </a:fld>
             <a:endParaRPr lang="en-US" altLang="ko-KR" noProof="0" dirty="0"/>
           </a:p>
@@ -9190,273 +10253,7 @@
 </p:sld>
 </file>
 
-<file path=ppt/slides/slide2.xml><?xml version="1.0" encoding="utf-8"?>
-<p:sld xmlns:a="http://schemas.openxmlformats.org/drawingml/2006/main" xmlns:r="http://schemas.openxmlformats.org/officeDocument/2006/relationships" xmlns:p="http://schemas.openxmlformats.org/presentationml/2006/main">
-  <p:cSld>
-    <p:spTree>
-      <p:nvGrpSpPr>
-        <p:cNvPr id="1" name="">
-          <a:extLst>
-            <a:ext uri="{FF2B5EF4-FFF2-40B4-BE49-F238E27FC236}">
-              <a16:creationId xmlns:a16="http://schemas.microsoft.com/office/drawing/2014/main" id="{7690E2C1-BB1A-4FCC-4EBC-8B540F598F5F}"/>
-            </a:ext>
-          </a:extLst>
-        </p:cNvPr>
-        <p:cNvGrpSpPr/>
-        <p:nvPr/>
-      </p:nvGrpSpPr>
-      <p:grpSpPr>
-        <a:xfrm>
-          <a:off x="0" y="0"/>
-          <a:ext cx="0" cy="0"/>
-          <a:chOff x="0" y="0"/>
-          <a:chExt cx="0" cy="0"/>
-        </a:xfrm>
-      </p:grpSpPr>
-      <p:sp>
-        <p:nvSpPr>
-          <p:cNvPr id="8" name="슬라이드 번호 개체 틀 7">
-            <a:extLst>
-              <a:ext uri="{FF2B5EF4-FFF2-40B4-BE49-F238E27FC236}">
-                <a16:creationId xmlns:a16="http://schemas.microsoft.com/office/drawing/2014/main" id="{4EF241B0-03F6-4174-6351-DEA7C3022824}"/>
-              </a:ext>
-            </a:extLst>
-          </p:cNvPr>
-          <p:cNvSpPr>
-            <a:spLocks noGrp="1"/>
-          </p:cNvSpPr>
-          <p:nvPr>
-            <p:ph type="sldNum" sz="quarter" idx="12"/>
-          </p:nvPr>
-        </p:nvSpPr>
-        <p:spPr/>
-        <p:txBody>
-          <a:bodyPr/>
-          <a:lstStyle/>
-          <a:p>
-            <a:pPr rtl="0"/>
-            <a:fld id="{A3F31473-23EB-4724-8B59-FE6D21D89FA4}" type="slidenum">
-              <a:rPr lang="en-US" altLang="ko-KR" noProof="0" smtClean="0"/>
-              <a:t>2</a:t>
-            </a:fld>
-            <a:endParaRPr lang="en-US" altLang="ko-KR" noProof="0" dirty="0"/>
-          </a:p>
-        </p:txBody>
-      </p:sp>
-      <p:sp>
-        <p:nvSpPr>
-          <p:cNvPr id="3" name="TextBox 2">
-            <a:extLst>
-              <a:ext uri="{FF2B5EF4-FFF2-40B4-BE49-F238E27FC236}">
-                <a16:creationId xmlns:a16="http://schemas.microsoft.com/office/drawing/2014/main" id="{9969E69D-4C2D-C812-DDC5-4721F324AC9B}"/>
-              </a:ext>
-            </a:extLst>
-          </p:cNvPr>
-          <p:cNvSpPr txBox="1"/>
-          <p:nvPr/>
-        </p:nvSpPr>
-        <p:spPr>
-          <a:xfrm>
-            <a:off x="591295" y="423483"/>
-            <a:ext cx="2088232" cy="856388"/>
-          </a:xfrm>
-          <a:prstGeom prst="rect">
-            <a:avLst/>
-          </a:prstGeom>
-          <a:noFill/>
-        </p:spPr>
-        <p:txBody>
-          <a:bodyPr wrap="square">
-            <a:spAutoFit/>
-          </a:bodyPr>
-          <a:lstStyle/>
-          <a:p>
-            <a:pPr marL="285750" indent="-285750">
-              <a:lnSpc>
-                <a:spcPct val="250000"/>
-              </a:lnSpc>
-              <a:buFont typeface="Wingdings" panose="05000000000000000000" pitchFamily="2" charset="2"/>
-              <a:buChar char="v"/>
-            </a:pPr>
-            <a:r>
-              <a:rPr lang="ko-KR" altLang="en-US" sz="2400" dirty="0">
-                <a:latin typeface="한컴 말랑말랑 Bold" panose="020F0803000000000000" pitchFamily="50" charset="-127"/>
-                <a:ea typeface="한컴 말랑말랑 Bold" panose="020F0803000000000000" pitchFamily="50" charset="-127"/>
-              </a:rPr>
-              <a:t> 점 추정</a:t>
-            </a:r>
-            <a:endParaRPr lang="en-US" altLang="ko-KR" sz="2400" dirty="0">
-              <a:latin typeface="한컴 말랑말랑 Bold" panose="020F0803000000000000" pitchFamily="50" charset="-127"/>
-              <a:ea typeface="한컴 말랑말랑 Bold" panose="020F0803000000000000" pitchFamily="50" charset="-127"/>
-            </a:endParaRPr>
-          </a:p>
-        </p:txBody>
-      </p:sp>
-      <p:pic>
-        <p:nvPicPr>
-          <p:cNvPr id="1028" name="Picture 4" descr="물에 노란색과 흰색 물고기">
-            <a:extLst>
-              <a:ext uri="{FF2B5EF4-FFF2-40B4-BE49-F238E27FC236}">
-                <a16:creationId xmlns:a16="http://schemas.microsoft.com/office/drawing/2014/main" id="{FF6962AE-334A-73B8-9E42-5DAA4627E288}"/>
-              </a:ext>
-            </a:extLst>
-          </p:cNvPr>
-          <p:cNvPicPr>
-            <a:picLocks noChangeAspect="1" noChangeArrowheads="1"/>
-          </p:cNvPicPr>
-          <p:nvPr/>
-        </p:nvPicPr>
-        <p:blipFill>
-          <a:blip r:embed="rId3" cstate="print">
-            <a:extLst>
-              <a:ext uri="{28A0092B-C50C-407E-A947-70E740481C1C}">
-                <a14:useLocalDpi xmlns:a14="http://schemas.microsoft.com/office/drawing/2010/main" val="0"/>
-              </a:ext>
-            </a:extLst>
-          </a:blip>
-          <a:srcRect/>
-          <a:stretch>
-            <a:fillRect/>
-          </a:stretch>
-        </p:blipFill>
-        <p:spPr bwMode="auto">
-          <a:xfrm>
-            <a:off x="1226793" y="1382526"/>
-            <a:ext cx="2905468" cy="4358202"/>
-          </a:xfrm>
-          <a:prstGeom prst="rect">
-            <a:avLst/>
-          </a:prstGeom>
-          <a:noFill/>
-          <a:extLst>
-            <a:ext uri="{909E8E84-426E-40DD-AFC4-6F175D3DCCD1}">
-              <a14:hiddenFill xmlns:a14="http://schemas.microsoft.com/office/drawing/2010/main">
-                <a:solidFill>
-                  <a:srgbClr val="FFFFFF"/>
-                </a:solidFill>
-              </a14:hiddenFill>
-            </a:ext>
-          </a:extLst>
-        </p:spPr>
-      </p:pic>
-      <p:sp>
-        <p:nvSpPr>
-          <p:cNvPr id="2" name="TextBox 1">
-            <a:extLst>
-              <a:ext uri="{FF2B5EF4-FFF2-40B4-BE49-F238E27FC236}">
-                <a16:creationId xmlns:a16="http://schemas.microsoft.com/office/drawing/2014/main" id="{ED8E5E32-8CC6-6668-EE41-22B84BF8E615}"/>
-              </a:ext>
-            </a:extLst>
-          </p:cNvPr>
-          <p:cNvSpPr txBox="1"/>
-          <p:nvPr/>
-        </p:nvSpPr>
-        <p:spPr>
-          <a:xfrm>
-            <a:off x="6166420" y="423483"/>
-            <a:ext cx="2160240" cy="856388"/>
-          </a:xfrm>
-          <a:prstGeom prst="rect">
-            <a:avLst/>
-          </a:prstGeom>
-          <a:noFill/>
-        </p:spPr>
-        <p:txBody>
-          <a:bodyPr wrap="square">
-            <a:spAutoFit/>
-          </a:bodyPr>
-          <a:lstStyle/>
-          <a:p>
-            <a:pPr marL="285750" indent="-285750">
-              <a:lnSpc>
-                <a:spcPct val="250000"/>
-              </a:lnSpc>
-              <a:buFont typeface="Wingdings" panose="05000000000000000000" pitchFamily="2" charset="2"/>
-              <a:buChar char="v"/>
-            </a:pPr>
-            <a:r>
-              <a:rPr lang="ko-KR" altLang="en-US" sz="2400" dirty="0">
-                <a:latin typeface="한컴 말랑말랑 Bold" panose="020F0803000000000000" pitchFamily="50" charset="-127"/>
-                <a:ea typeface="한컴 말랑말랑 Bold" panose="020F0803000000000000" pitchFamily="50" charset="-127"/>
-              </a:rPr>
-              <a:t>구간 추정</a:t>
-            </a:r>
-          </a:p>
-        </p:txBody>
-      </p:sp>
-      <p:pic>
-        <p:nvPicPr>
-          <p:cNvPr id="1032" name="Picture 8" descr="물 속에 서서 호수 옆에서 그물을 잡고 낚시를 하는 행복한 어린 소년.">
-            <a:extLst>
-              <a:ext uri="{FF2B5EF4-FFF2-40B4-BE49-F238E27FC236}">
-                <a16:creationId xmlns:a16="http://schemas.microsoft.com/office/drawing/2014/main" id="{DC13672B-894D-42FF-3D66-D00525BE11B4}"/>
-              </a:ext>
-            </a:extLst>
-          </p:cNvPr>
-          <p:cNvPicPr>
-            <a:picLocks noChangeAspect="1" noChangeArrowheads="1"/>
-          </p:cNvPicPr>
-          <p:nvPr/>
-        </p:nvPicPr>
-        <p:blipFill>
-          <a:blip r:embed="rId4" cstate="print">
-            <a:extLst>
-              <a:ext uri="{28A0092B-C50C-407E-A947-70E740481C1C}">
-                <a14:useLocalDpi xmlns:a14="http://schemas.microsoft.com/office/drawing/2010/main" val="0"/>
-              </a:ext>
-            </a:extLst>
-          </a:blip>
-          <a:srcRect/>
-          <a:stretch>
-            <a:fillRect/>
-          </a:stretch>
-        </p:blipFill>
-        <p:spPr bwMode="auto">
-          <a:xfrm>
-            <a:off x="7102524" y="1412776"/>
-            <a:ext cx="4297712" cy="2996952"/>
-          </a:xfrm>
-          <a:prstGeom prst="rect">
-            <a:avLst/>
-          </a:prstGeom>
-          <a:noFill/>
-          <a:extLst>
-            <a:ext uri="{909E8E84-426E-40DD-AFC4-6F175D3DCCD1}">
-              <a14:hiddenFill xmlns:a14="http://schemas.microsoft.com/office/drawing/2010/main">
-                <a:solidFill>
-                  <a:srgbClr val="FFFFFF"/>
-                </a:solidFill>
-              </a14:hiddenFill>
-            </a:ext>
-          </a:extLst>
-        </p:spPr>
-      </p:pic>
-    </p:spTree>
-    <p:extLst>
-      <p:ext uri="{BB962C8B-B14F-4D97-AF65-F5344CB8AC3E}">
-        <p14:creationId xmlns:p14="http://schemas.microsoft.com/office/powerpoint/2010/main" val="810907724"/>
-      </p:ext>
-    </p:extLst>
-  </p:cSld>
-  <p:clrMapOvr>
-    <a:masterClrMapping/>
-  </p:clrMapOvr>
-  <mc:AlternateContent xmlns:mc="http://schemas.openxmlformats.org/markup-compatibility/2006" xmlns:p14="http://schemas.microsoft.com/office/powerpoint/2010/main">
-    <mc:Choice Requires="p14">
-      <p:transition spd="med" p14:dur="700">
-        <p:fade/>
-      </p:transition>
-    </mc:Choice>
-    <mc:Fallback xmlns="">
-      <p:transition spd="med">
-        <p:fade/>
-      </p:transition>
-    </mc:Fallback>
-  </mc:AlternateContent>
-</p:sld>
-</file>
-
-<file path=ppt/slides/slide20.xml><?xml version="1.0" encoding="utf-8"?>
+<file path=ppt/slides/slide21.xml><?xml version="1.0" encoding="utf-8"?>
 <p:sld xmlns:a="http://schemas.openxmlformats.org/drawingml/2006/main" xmlns:r="http://schemas.openxmlformats.org/officeDocument/2006/relationships" xmlns:p="http://schemas.openxmlformats.org/presentationml/2006/main">
   <p:cSld>
     <p:spTree>
@@ -9503,7 +10300,7 @@
             <a:pPr rtl="0"/>
             <a:fld id="{A3F31473-23EB-4724-8B59-FE6D21D89FA4}" type="slidenum">
               <a:rPr lang="en-US" altLang="ko-KR" noProof="0" smtClean="0"/>
-              <a:t>20</a:t>
+              <a:t>21</a:t>
             </a:fld>
             <a:endParaRPr lang="en-US" altLang="ko-KR" noProof="0" dirty="0"/>
           </a:p>
@@ -10071,6 +10868,272 @@
         <p:cNvPr id="1" name="">
           <a:extLst>
             <a:ext uri="{FF2B5EF4-FFF2-40B4-BE49-F238E27FC236}">
+              <a16:creationId xmlns:a16="http://schemas.microsoft.com/office/drawing/2014/main" id="{A1154015-ADDA-92BD-7F38-1BEC743F1120}"/>
+            </a:ext>
+          </a:extLst>
+        </p:cNvPr>
+        <p:cNvGrpSpPr/>
+        <p:nvPr/>
+      </p:nvGrpSpPr>
+      <p:grpSpPr>
+        <a:xfrm>
+          <a:off x="0" y="0"/>
+          <a:ext cx="0" cy="0"/>
+          <a:chOff x="0" y="0"/>
+          <a:chExt cx="0" cy="0"/>
+        </a:xfrm>
+      </p:grpSpPr>
+      <p:sp>
+        <p:nvSpPr>
+          <p:cNvPr id="8" name="슬라이드 번호 개체 틀 7">
+            <a:extLst>
+              <a:ext uri="{FF2B5EF4-FFF2-40B4-BE49-F238E27FC236}">
+                <a16:creationId xmlns:a16="http://schemas.microsoft.com/office/drawing/2014/main" id="{8587F499-F5E0-E97A-9C8F-E31A474CD43E}"/>
+              </a:ext>
+            </a:extLst>
+          </p:cNvPr>
+          <p:cNvSpPr>
+            <a:spLocks noGrp="1"/>
+          </p:cNvSpPr>
+          <p:nvPr>
+            <p:ph type="sldNum" sz="quarter" idx="12"/>
+          </p:nvPr>
+        </p:nvSpPr>
+        <p:spPr/>
+        <p:txBody>
+          <a:bodyPr/>
+          <a:lstStyle/>
+          <a:p>
+            <a:pPr rtl="0"/>
+            <a:fld id="{A3F31473-23EB-4724-8B59-FE6D21D89FA4}" type="slidenum">
+              <a:rPr lang="en-US" altLang="ko-KR" noProof="0" smtClean="0"/>
+              <a:t>3</a:t>
+            </a:fld>
+            <a:endParaRPr lang="en-US" altLang="ko-KR" noProof="0" dirty="0"/>
+          </a:p>
+        </p:txBody>
+      </p:sp>
+      <p:sp>
+        <p:nvSpPr>
+          <p:cNvPr id="3" name="TextBox 2">
+            <a:extLst>
+              <a:ext uri="{FF2B5EF4-FFF2-40B4-BE49-F238E27FC236}">
+                <a16:creationId xmlns:a16="http://schemas.microsoft.com/office/drawing/2014/main" id="{F88BBA99-4B6A-6EF5-6482-A1415497604F}"/>
+              </a:ext>
+            </a:extLst>
+          </p:cNvPr>
+          <p:cNvSpPr txBox="1"/>
+          <p:nvPr/>
+        </p:nvSpPr>
+        <p:spPr>
+          <a:xfrm>
+            <a:off x="591295" y="423483"/>
+            <a:ext cx="2088232" cy="856388"/>
+          </a:xfrm>
+          <a:prstGeom prst="rect">
+            <a:avLst/>
+          </a:prstGeom>
+          <a:noFill/>
+        </p:spPr>
+        <p:txBody>
+          <a:bodyPr wrap="square">
+            <a:spAutoFit/>
+          </a:bodyPr>
+          <a:lstStyle/>
+          <a:p>
+            <a:pPr marL="285750" indent="-285750">
+              <a:lnSpc>
+                <a:spcPct val="250000"/>
+              </a:lnSpc>
+              <a:buFont typeface="Wingdings" panose="05000000000000000000" pitchFamily="2" charset="2"/>
+              <a:buChar char="v"/>
+            </a:pPr>
+            <a:r>
+              <a:rPr lang="ko-KR" altLang="en-US" sz="2400" dirty="0">
+                <a:latin typeface="한컴 말랑말랑 Bold" panose="020F0803000000000000" pitchFamily="50" charset="-127"/>
+                <a:ea typeface="한컴 말랑말랑 Bold" panose="020F0803000000000000" pitchFamily="50" charset="-127"/>
+              </a:rPr>
+              <a:t> 점 추정</a:t>
+            </a:r>
+            <a:endParaRPr lang="en-US" altLang="ko-KR" sz="2400" dirty="0">
+              <a:latin typeface="한컴 말랑말랑 Bold" panose="020F0803000000000000" pitchFamily="50" charset="-127"/>
+              <a:ea typeface="한컴 말랑말랑 Bold" panose="020F0803000000000000" pitchFamily="50" charset="-127"/>
+            </a:endParaRPr>
+          </a:p>
+        </p:txBody>
+      </p:sp>
+      <p:pic>
+        <p:nvPicPr>
+          <p:cNvPr id="1028" name="Picture 4" descr="물에 노란색과 흰색 물고기">
+            <a:extLst>
+              <a:ext uri="{FF2B5EF4-FFF2-40B4-BE49-F238E27FC236}">
+                <a16:creationId xmlns:a16="http://schemas.microsoft.com/office/drawing/2014/main" id="{BE796E06-CD0D-2419-11B1-4B0F224A852A}"/>
+              </a:ext>
+            </a:extLst>
+          </p:cNvPr>
+          <p:cNvPicPr>
+            <a:picLocks noChangeAspect="1" noChangeArrowheads="1"/>
+          </p:cNvPicPr>
+          <p:nvPr/>
+        </p:nvPicPr>
+        <p:blipFill>
+          <a:blip r:embed="rId3" cstate="print">
+            <a:extLst>
+              <a:ext uri="{28A0092B-C50C-407E-A947-70E740481C1C}">
+                <a14:useLocalDpi xmlns:a14="http://schemas.microsoft.com/office/drawing/2010/main" val="0"/>
+              </a:ext>
+            </a:extLst>
+          </a:blip>
+          <a:srcRect/>
+          <a:stretch>
+            <a:fillRect/>
+          </a:stretch>
+        </p:blipFill>
+        <p:spPr bwMode="auto">
+          <a:xfrm>
+            <a:off x="1226793" y="1382526"/>
+            <a:ext cx="2905468" cy="4358202"/>
+          </a:xfrm>
+          <a:prstGeom prst="rect">
+            <a:avLst/>
+          </a:prstGeom>
+          <a:noFill/>
+          <a:extLst>
+            <a:ext uri="{909E8E84-426E-40DD-AFC4-6F175D3DCCD1}">
+              <a14:hiddenFill xmlns:a14="http://schemas.microsoft.com/office/drawing/2010/main">
+                <a:solidFill>
+                  <a:srgbClr val="FFFFFF"/>
+                </a:solidFill>
+              </a14:hiddenFill>
+            </a:ext>
+          </a:extLst>
+        </p:spPr>
+      </p:pic>
+      <p:sp>
+        <p:nvSpPr>
+          <p:cNvPr id="2" name="TextBox 1">
+            <a:extLst>
+              <a:ext uri="{FF2B5EF4-FFF2-40B4-BE49-F238E27FC236}">
+                <a16:creationId xmlns:a16="http://schemas.microsoft.com/office/drawing/2014/main" id="{1F9C0BBA-6483-3157-F202-FFF9CCAD4BFF}"/>
+              </a:ext>
+            </a:extLst>
+          </p:cNvPr>
+          <p:cNvSpPr txBox="1"/>
+          <p:nvPr/>
+        </p:nvSpPr>
+        <p:spPr>
+          <a:xfrm>
+            <a:off x="6166420" y="423483"/>
+            <a:ext cx="2160240" cy="856388"/>
+          </a:xfrm>
+          <a:prstGeom prst="rect">
+            <a:avLst/>
+          </a:prstGeom>
+          <a:noFill/>
+        </p:spPr>
+        <p:txBody>
+          <a:bodyPr wrap="square">
+            <a:spAutoFit/>
+          </a:bodyPr>
+          <a:lstStyle/>
+          <a:p>
+            <a:pPr marL="285750" indent="-285750">
+              <a:lnSpc>
+                <a:spcPct val="250000"/>
+              </a:lnSpc>
+              <a:buFont typeface="Wingdings" panose="05000000000000000000" pitchFamily="2" charset="2"/>
+              <a:buChar char="v"/>
+            </a:pPr>
+            <a:r>
+              <a:rPr lang="ko-KR" altLang="en-US" sz="2400" dirty="0">
+                <a:latin typeface="한컴 말랑말랑 Bold" panose="020F0803000000000000" pitchFamily="50" charset="-127"/>
+                <a:ea typeface="한컴 말랑말랑 Bold" panose="020F0803000000000000" pitchFamily="50" charset="-127"/>
+              </a:rPr>
+              <a:t>구간 추정</a:t>
+            </a:r>
+          </a:p>
+        </p:txBody>
+      </p:sp>
+      <p:pic>
+        <p:nvPicPr>
+          <p:cNvPr id="1032" name="Picture 8" descr="물 속에 서서 호수 옆에서 그물을 잡고 낚시를 하는 행복한 어린 소년.">
+            <a:extLst>
+              <a:ext uri="{FF2B5EF4-FFF2-40B4-BE49-F238E27FC236}">
+                <a16:creationId xmlns:a16="http://schemas.microsoft.com/office/drawing/2014/main" id="{8CE60872-C0D1-82A9-A742-A31C7527256F}"/>
+              </a:ext>
+            </a:extLst>
+          </p:cNvPr>
+          <p:cNvPicPr>
+            <a:picLocks noChangeAspect="1" noChangeArrowheads="1"/>
+          </p:cNvPicPr>
+          <p:nvPr/>
+        </p:nvPicPr>
+        <p:blipFill>
+          <a:blip r:embed="rId4" cstate="print">
+            <a:extLst>
+              <a:ext uri="{28A0092B-C50C-407E-A947-70E740481C1C}">
+                <a14:useLocalDpi xmlns:a14="http://schemas.microsoft.com/office/drawing/2010/main" val="0"/>
+              </a:ext>
+            </a:extLst>
+          </a:blip>
+          <a:srcRect/>
+          <a:stretch>
+            <a:fillRect/>
+          </a:stretch>
+        </p:blipFill>
+        <p:spPr bwMode="auto">
+          <a:xfrm>
+            <a:off x="7102524" y="1412776"/>
+            <a:ext cx="4297712" cy="2996952"/>
+          </a:xfrm>
+          <a:prstGeom prst="rect">
+            <a:avLst/>
+          </a:prstGeom>
+          <a:noFill/>
+          <a:extLst>
+            <a:ext uri="{909E8E84-426E-40DD-AFC4-6F175D3DCCD1}">
+              <a14:hiddenFill xmlns:a14="http://schemas.microsoft.com/office/drawing/2010/main">
+                <a:solidFill>
+                  <a:srgbClr val="FFFFFF"/>
+                </a:solidFill>
+              </a14:hiddenFill>
+            </a:ext>
+          </a:extLst>
+        </p:spPr>
+      </p:pic>
+    </p:spTree>
+    <p:extLst>
+      <p:ext uri="{BB962C8B-B14F-4D97-AF65-F5344CB8AC3E}">
+        <p14:creationId xmlns:p14="http://schemas.microsoft.com/office/powerpoint/2010/main" val="2881828393"/>
+      </p:ext>
+    </p:extLst>
+  </p:cSld>
+  <p:clrMapOvr>
+    <a:masterClrMapping/>
+  </p:clrMapOvr>
+  <mc:AlternateContent xmlns:mc="http://schemas.openxmlformats.org/markup-compatibility/2006" xmlns:p14="http://schemas.microsoft.com/office/powerpoint/2010/main">
+    <mc:Choice Requires="p14">
+      <p:transition spd="med" p14:dur="700">
+        <p:fade/>
+      </p:transition>
+    </mc:Choice>
+    <mc:Fallback xmlns="">
+      <p:transition spd="med">
+        <p:fade/>
+      </p:transition>
+    </mc:Fallback>
+  </mc:AlternateContent>
+</p:sld>
+</file>
+
+<file path=ppt/slides/slide4.xml><?xml version="1.0" encoding="utf-8"?>
+<p:sld xmlns:a="http://schemas.openxmlformats.org/drawingml/2006/main" xmlns:r="http://schemas.openxmlformats.org/officeDocument/2006/relationships" xmlns:p="http://schemas.openxmlformats.org/presentationml/2006/main">
+  <p:cSld>
+    <p:spTree>
+      <p:nvGrpSpPr>
+        <p:cNvPr id="1" name="">
+          <a:extLst>
+            <a:ext uri="{FF2B5EF4-FFF2-40B4-BE49-F238E27FC236}">
               <a16:creationId xmlns:a16="http://schemas.microsoft.com/office/drawing/2014/main" id="{C6226249-DF82-F305-751E-127F3A71C29B}"/>
             </a:ext>
           </a:extLst>
@@ -10164,7 +11227,7 @@
             <a:pPr rtl="0"/>
             <a:fld id="{A3F31473-23EB-4724-8B59-FE6D21D89FA4}" type="slidenum">
               <a:rPr lang="en-US" altLang="ko-KR" noProof="0" smtClean="0"/>
-              <a:t>3</a:t>
+              <a:t>4</a:t>
             </a:fld>
             <a:endParaRPr lang="en-US" altLang="ko-KR" noProof="0" dirty="0"/>
           </a:p>
@@ -10388,7 +11451,7 @@
 </p:sld>
 </file>
 
-<file path=ppt/slides/slide4.xml><?xml version="1.0" encoding="utf-8"?>
+<file path=ppt/slides/slide5.xml><?xml version="1.0" encoding="utf-8"?>
 <p:sld xmlns:a="http://schemas.openxmlformats.org/drawingml/2006/main" xmlns:r="http://schemas.openxmlformats.org/officeDocument/2006/relationships" xmlns:p="http://schemas.openxmlformats.org/presentationml/2006/main">
   <p:cSld>
     <p:spTree>
@@ -10423,7 +11486,7 @@
             <a:pPr rtl="0"/>
             <a:fld id="{A3F31473-23EB-4724-8B59-FE6D21D89FA4}" type="slidenum">
               <a:rPr lang="en-US" altLang="ko-KR" noProof="0" smtClean="0"/>
-              <a:t>4</a:t>
+              <a:t>5</a:t>
             </a:fld>
             <a:endParaRPr lang="en-US" altLang="ko-KR" noProof="0" dirty="0"/>
           </a:p>
@@ -10641,7 +11704,7 @@
 </p:sld>
 </file>
 
-<file path=ppt/slides/slide5.xml><?xml version="1.0" encoding="utf-8"?>
+<file path=ppt/slides/slide6.xml><?xml version="1.0" encoding="utf-8"?>
 <p:sld xmlns:a="http://schemas.openxmlformats.org/drawingml/2006/main" xmlns:r="http://schemas.openxmlformats.org/officeDocument/2006/relationships" xmlns:p="http://schemas.openxmlformats.org/presentationml/2006/main">
   <p:cSld>
     <p:spTree>
@@ -10676,7 +11739,7 @@
             <a:pPr rtl="0"/>
             <a:fld id="{A3F31473-23EB-4724-8B59-FE6D21D89FA4}" type="slidenum">
               <a:rPr lang="en-US" altLang="ko-KR" noProof="0" smtClean="0"/>
-              <a:t>5</a:t>
+              <a:t>6</a:t>
             </a:fld>
             <a:endParaRPr lang="en-US" altLang="ko-KR" noProof="0" dirty="0"/>
           </a:p>
@@ -10731,7 +11794,7 @@
 </p:sld>
 </file>
 
-<file path=ppt/slides/slide6.xml><?xml version="1.0" encoding="utf-8"?>
+<file path=ppt/slides/slide7.xml><?xml version="1.0" encoding="utf-8"?>
 <p:sld xmlns:a="http://schemas.openxmlformats.org/drawingml/2006/main" xmlns:r="http://schemas.openxmlformats.org/officeDocument/2006/relationships" xmlns:p="http://schemas.openxmlformats.org/presentationml/2006/main">
   <p:cSld>
     <p:spTree>
@@ -10766,7 +11829,7 @@
             <a:pPr rtl="0"/>
             <a:fld id="{A3F31473-23EB-4724-8B59-FE6D21D89FA4}" type="slidenum">
               <a:rPr lang="en-US" altLang="ko-KR" noProof="0" smtClean="0"/>
-              <a:t>6</a:t>
+              <a:t>7</a:t>
             </a:fld>
             <a:endParaRPr lang="en-US" altLang="ko-KR" noProof="0" dirty="0"/>
           </a:p>
@@ -10821,7 +11884,7 @@
 </p:sld>
 </file>
 
-<file path=ppt/slides/slide7.xml><?xml version="1.0" encoding="utf-8"?>
+<file path=ppt/slides/slide8.xml><?xml version="1.0" encoding="utf-8"?>
 <p:sld xmlns:a="http://schemas.openxmlformats.org/drawingml/2006/main" xmlns:r="http://schemas.openxmlformats.org/officeDocument/2006/relationships" xmlns:p="http://schemas.openxmlformats.org/presentationml/2006/main">
   <p:cSld>
     <p:spTree>
@@ -10856,7 +11919,7 @@
             <a:pPr rtl="0"/>
             <a:fld id="{A3F31473-23EB-4724-8B59-FE6D21D89FA4}" type="slidenum">
               <a:rPr lang="en-US" altLang="ko-KR" noProof="0" smtClean="0"/>
-              <a:t>7</a:t>
+              <a:t>8</a:t>
             </a:fld>
             <a:endParaRPr lang="en-US" altLang="ko-KR" noProof="0" dirty="0"/>
           </a:p>
@@ -10911,7 +11974,7 @@
 </p:sld>
 </file>
 
-<file path=ppt/slides/slide8.xml><?xml version="1.0" encoding="utf-8"?>
+<file path=ppt/slides/slide9.xml><?xml version="1.0" encoding="utf-8"?>
 <p:sld xmlns:a="http://schemas.openxmlformats.org/drawingml/2006/main" xmlns:r="http://schemas.openxmlformats.org/officeDocument/2006/relationships" xmlns:p="http://schemas.openxmlformats.org/presentationml/2006/main">
   <p:cSld>
     <p:spTree>
@@ -10946,7 +12009,7 @@
             <a:pPr rtl="0"/>
             <a:fld id="{A3F31473-23EB-4724-8B59-FE6D21D89FA4}" type="slidenum">
               <a:rPr lang="en-US" altLang="ko-KR" noProof="0" smtClean="0"/>
-              <a:t>8</a:t>
+              <a:t>9</a:t>
             </a:fld>
             <a:endParaRPr lang="en-US" altLang="ko-KR" noProof="0" dirty="0"/>
           </a:p>
@@ -11066,303 +12129,6 @@
     <p:extLst>
       <p:ext uri="{BB962C8B-B14F-4D97-AF65-F5344CB8AC3E}">
         <p14:creationId xmlns:p14="http://schemas.microsoft.com/office/powerpoint/2010/main" val="2648513285"/>
-      </p:ext>
-    </p:extLst>
-  </p:cSld>
-  <p:clrMapOvr>
-    <a:masterClrMapping/>
-  </p:clrMapOvr>
-  <mc:AlternateContent xmlns:mc="http://schemas.openxmlformats.org/markup-compatibility/2006" xmlns:p14="http://schemas.microsoft.com/office/powerpoint/2010/main">
-    <mc:Choice Requires="p14">
-      <p:transition spd="med" p14:dur="700">
-        <p:fade/>
-      </p:transition>
-    </mc:Choice>
-    <mc:Fallback xmlns="">
-      <p:transition spd="med">
-        <p:fade/>
-      </p:transition>
-    </mc:Fallback>
-  </mc:AlternateContent>
-</p:sld>
-</file>
-
-<file path=ppt/slides/slide9.xml><?xml version="1.0" encoding="utf-8"?>
-<p:sld xmlns:a="http://schemas.openxmlformats.org/drawingml/2006/main" xmlns:r="http://schemas.openxmlformats.org/officeDocument/2006/relationships" xmlns:p="http://schemas.openxmlformats.org/presentationml/2006/main">
-  <p:cSld>
-    <p:spTree>
-      <p:nvGrpSpPr>
-        <p:cNvPr id="1" name="">
-          <a:extLst>
-            <a:ext uri="{FF2B5EF4-FFF2-40B4-BE49-F238E27FC236}">
-              <a16:creationId xmlns:a16="http://schemas.microsoft.com/office/drawing/2014/main" id="{EE79E9C0-81B0-8C4F-5C8C-787A71062EC8}"/>
-            </a:ext>
-          </a:extLst>
-        </p:cNvPr>
-        <p:cNvGrpSpPr/>
-        <p:nvPr/>
-      </p:nvGrpSpPr>
-      <p:grpSpPr>
-        <a:xfrm>
-          <a:off x="0" y="0"/>
-          <a:ext cx="0" cy="0"/>
-          <a:chOff x="0" y="0"/>
-          <a:chExt cx="0" cy="0"/>
-        </a:xfrm>
-      </p:grpSpPr>
-      <p:sp>
-        <p:nvSpPr>
-          <p:cNvPr id="8" name="슬라이드 번호 개체 틀 7">
-            <a:extLst>
-              <a:ext uri="{FF2B5EF4-FFF2-40B4-BE49-F238E27FC236}">
-                <a16:creationId xmlns:a16="http://schemas.microsoft.com/office/drawing/2014/main" id="{BBD3D25E-EFF0-5F40-330C-23098F2AD3E2}"/>
-              </a:ext>
-            </a:extLst>
-          </p:cNvPr>
-          <p:cNvSpPr>
-            <a:spLocks noGrp="1"/>
-          </p:cNvSpPr>
-          <p:nvPr>
-            <p:ph type="sldNum" sz="quarter" idx="12"/>
-          </p:nvPr>
-        </p:nvSpPr>
-        <p:spPr/>
-        <p:txBody>
-          <a:bodyPr/>
-          <a:lstStyle/>
-          <a:p>
-            <a:pPr rtl="0"/>
-            <a:fld id="{A3F31473-23EB-4724-8B59-FE6D21D89FA4}" type="slidenum">
-              <a:rPr lang="en-US" altLang="ko-KR" noProof="0" smtClean="0"/>
-              <a:t>9</a:t>
-            </a:fld>
-            <a:endParaRPr lang="en-US" altLang="ko-KR" noProof="0" dirty="0"/>
-          </a:p>
-        </p:txBody>
-      </p:sp>
-      <p:pic>
-        <p:nvPicPr>
-          <p:cNvPr id="4" name="그림 3">
-            <a:extLst>
-              <a:ext uri="{FF2B5EF4-FFF2-40B4-BE49-F238E27FC236}">
-                <a16:creationId xmlns:a16="http://schemas.microsoft.com/office/drawing/2014/main" id="{D0AEC730-96C0-FDED-EAAB-33E4F3BFD9D7}"/>
-              </a:ext>
-            </a:extLst>
-          </p:cNvPr>
-          <p:cNvPicPr>
-            <a:picLocks noChangeAspect="1"/>
-          </p:cNvPicPr>
-          <p:nvPr/>
-        </p:nvPicPr>
-        <p:blipFill>
-          <a:blip r:embed="rId3"/>
-          <a:stretch>
-            <a:fillRect/>
-          </a:stretch>
-        </p:blipFill>
-        <p:spPr>
-          <a:xfrm>
-            <a:off x="4587291" y="1275706"/>
-            <a:ext cx="1882303" cy="800169"/>
-          </a:xfrm>
-          <a:prstGeom prst="rect">
-            <a:avLst/>
-          </a:prstGeom>
-        </p:spPr>
-      </p:pic>
-      <p:sp>
-        <p:nvSpPr>
-          <p:cNvPr id="5" name="TextBox 4">
-            <a:extLst>
-              <a:ext uri="{FF2B5EF4-FFF2-40B4-BE49-F238E27FC236}">
-                <a16:creationId xmlns:a16="http://schemas.microsoft.com/office/drawing/2014/main" id="{CB8A57C6-BE01-3B58-9166-EA79E5C13F5A}"/>
-              </a:ext>
-            </a:extLst>
-          </p:cNvPr>
-          <p:cNvSpPr txBox="1"/>
-          <p:nvPr/>
-        </p:nvSpPr>
-        <p:spPr>
-          <a:xfrm>
-            <a:off x="837828" y="699423"/>
-            <a:ext cx="4690615" cy="461665"/>
-          </a:xfrm>
-          <a:prstGeom prst="rect">
-            <a:avLst/>
-          </a:prstGeom>
-          <a:noFill/>
-        </p:spPr>
-        <p:txBody>
-          <a:bodyPr wrap="square" rtlCol="0">
-            <a:spAutoFit/>
-          </a:bodyPr>
-          <a:lstStyle/>
-          <a:p>
-            <a:r>
-              <a:rPr lang="en-US" altLang="ko-KR" sz="2400" b="1" dirty="0">
-                <a:hlinkClick r:id="rId4">
-                  <a:extLst>
-                    <a:ext uri="{A12FA001-AC4F-418D-AE19-62706E023703}">
-                      <ahyp:hlinkClr xmlns:ahyp="http://schemas.microsoft.com/office/drawing/2018/hyperlinkcolor" val="tx"/>
-                    </a:ext>
-                  </a:extLst>
-                </a:hlinkClick>
-              </a:rPr>
-              <a:t>standard-normal-distribution</a:t>
-            </a:r>
-            <a:endParaRPr lang="ko-KR" altLang="en-US" sz="2400" b="1" dirty="0"/>
-          </a:p>
-        </p:txBody>
-      </p:sp>
-      <p:pic>
-        <p:nvPicPr>
-          <p:cNvPr id="7" name="그림 6">
-            <a:extLst>
-              <a:ext uri="{FF2B5EF4-FFF2-40B4-BE49-F238E27FC236}">
-                <a16:creationId xmlns:a16="http://schemas.microsoft.com/office/drawing/2014/main" id="{9EDC347C-1170-0C74-BF60-0FE9675C19C2}"/>
-              </a:ext>
-            </a:extLst>
-          </p:cNvPr>
-          <p:cNvPicPr>
-            <a:picLocks noChangeAspect="1"/>
-          </p:cNvPicPr>
-          <p:nvPr/>
-        </p:nvPicPr>
-        <p:blipFill>
-          <a:blip r:embed="rId5"/>
-          <a:stretch>
-            <a:fillRect/>
-          </a:stretch>
-        </p:blipFill>
-        <p:spPr>
-          <a:xfrm>
-            <a:off x="6339908" y="2106090"/>
-            <a:ext cx="5845042" cy="4220046"/>
-          </a:xfrm>
-          <a:prstGeom prst="rect">
-            <a:avLst/>
-          </a:prstGeom>
-        </p:spPr>
-      </p:pic>
-      <p:pic>
-        <p:nvPicPr>
-          <p:cNvPr id="10" name="그림 9">
-            <a:extLst>
-              <a:ext uri="{FF2B5EF4-FFF2-40B4-BE49-F238E27FC236}">
-                <a16:creationId xmlns:a16="http://schemas.microsoft.com/office/drawing/2014/main" id="{4A8B8853-47C3-831B-B202-1FEE598974BC}"/>
-              </a:ext>
-            </a:extLst>
-          </p:cNvPr>
-          <p:cNvPicPr>
-            <a:picLocks noChangeAspect="1"/>
-          </p:cNvPicPr>
-          <p:nvPr/>
-        </p:nvPicPr>
-        <p:blipFill>
-          <a:blip r:embed="rId6"/>
-          <a:stretch>
-            <a:fillRect/>
-          </a:stretch>
-        </p:blipFill>
-        <p:spPr>
-          <a:xfrm>
-            <a:off x="117748" y="2636912"/>
-            <a:ext cx="4816257" cy="3071126"/>
-          </a:xfrm>
-          <a:prstGeom prst="rect">
-            <a:avLst/>
-          </a:prstGeom>
-        </p:spPr>
-      </p:pic>
-      <p:cxnSp>
-        <p:nvCxnSpPr>
-          <p:cNvPr id="12" name="연결선: 구부러짐 11">
-            <a:extLst>
-              <a:ext uri="{FF2B5EF4-FFF2-40B4-BE49-F238E27FC236}">
-                <a16:creationId xmlns:a16="http://schemas.microsoft.com/office/drawing/2014/main" id="{2B89B2F7-740E-AE2E-91B8-B7CD467955D1}"/>
-              </a:ext>
-            </a:extLst>
-          </p:cNvPr>
-          <p:cNvCxnSpPr>
-            <a:stCxn id="10" idx="0"/>
-            <a:endCxn id="4" idx="1"/>
-          </p:cNvCxnSpPr>
-          <p:nvPr/>
-        </p:nvCxnSpPr>
-        <p:spPr>
-          <a:xfrm rot="5400000" flipH="1" flipV="1">
-            <a:off x="3076024" y="1125645"/>
-            <a:ext cx="961121" cy="2061414"/>
-          </a:xfrm>
-          <a:prstGeom prst="curvedConnector2">
-            <a:avLst/>
-          </a:prstGeom>
-          <a:ln>
-            <a:tailEnd type="triangle"/>
-          </a:ln>
-        </p:spPr>
-        <p:style>
-          <a:lnRef idx="1">
-            <a:schemeClr val="accent1"/>
-          </a:lnRef>
-          <a:fillRef idx="0">
-            <a:schemeClr val="accent1"/>
-          </a:fillRef>
-          <a:effectRef idx="0">
-            <a:schemeClr val="accent1"/>
-          </a:effectRef>
-          <a:fontRef idx="minor">
-            <a:schemeClr val="tx1"/>
-          </a:fontRef>
-        </p:style>
-      </p:cxnSp>
-      <p:cxnSp>
-        <p:nvCxnSpPr>
-          <p:cNvPr id="13" name="연결선: 구부러짐 12">
-            <a:extLst>
-              <a:ext uri="{FF2B5EF4-FFF2-40B4-BE49-F238E27FC236}">
-                <a16:creationId xmlns:a16="http://schemas.microsoft.com/office/drawing/2014/main" id="{88D6A85B-4015-7ACD-5625-59966C8135C8}"/>
-              </a:ext>
-            </a:extLst>
-          </p:cNvPr>
-          <p:cNvCxnSpPr>
-            <a:cxnSpLocks/>
-            <a:stCxn id="4" idx="3"/>
-            <a:endCxn id="7" idx="0"/>
-          </p:cNvCxnSpPr>
-          <p:nvPr/>
-        </p:nvCxnSpPr>
-        <p:spPr>
-          <a:xfrm>
-            <a:off x="6469594" y="1675791"/>
-            <a:ext cx="2792835" cy="430299"/>
-          </a:xfrm>
-          <a:prstGeom prst="curvedConnector2">
-            <a:avLst/>
-          </a:prstGeom>
-          <a:ln>
-            <a:tailEnd type="triangle"/>
-          </a:ln>
-        </p:spPr>
-        <p:style>
-          <a:lnRef idx="1">
-            <a:schemeClr val="accent1"/>
-          </a:lnRef>
-          <a:fillRef idx="0">
-            <a:schemeClr val="accent1"/>
-          </a:fillRef>
-          <a:effectRef idx="0">
-            <a:schemeClr val="accent1"/>
-          </a:effectRef>
-          <a:fontRef idx="minor">
-            <a:schemeClr val="tx1"/>
-          </a:fontRef>
-        </p:style>
-      </p:cxnSp>
-    </p:spTree>
-    <p:extLst>
-      <p:ext uri="{BB962C8B-B14F-4D97-AF65-F5344CB8AC3E}">
-        <p14:creationId xmlns:p14="http://schemas.microsoft.com/office/powerpoint/2010/main" val="2011196701"/>
       </p:ext>
     </p:extLst>
   </p:cSld>
@@ -12366,6 +13132,15 @@
 </file>
 
 <file path=customXml/item2.xml><?xml version="1.0" encoding="utf-8"?>
+<?mso-contentType ?>
+<FormTemplates xmlns="http://schemas.microsoft.com/sharepoint/v3/contenttype/forms">
+  <Display>DocumentLibraryForm</Display>
+  <Edit>DocumentLibraryForm</Edit>
+  <New>DocumentLibraryForm</New>
+</FormTemplates>
+</file>
+
+<file path=customXml/item3.xml><?xml version="1.0" encoding="utf-8"?>
 <p:properties xmlns:p="http://schemas.microsoft.com/office/2006/metadata/properties" xmlns:xsi="http://www.w3.org/2001/XMLSchema-instance" xmlns:pc="http://schemas.microsoft.com/office/infopath/2007/PartnerControls">
   <documentManagement>
     <VSO_x0020_item_x0020_id xmlns="40262f94-9f35-4ac3-9a90-690165a166b7" xsi:nil="true"/>
@@ -12374,15 +13149,6 @@
     <Template_x0020_details xmlns="40262f94-9f35-4ac3-9a90-690165a166b7" xsi:nil="true"/>
   </documentManagement>
 </p:properties>
-</file>
-
-<file path=customXml/item3.xml><?xml version="1.0" encoding="utf-8"?>
-<?mso-contentType ?>
-<FormTemplates xmlns="http://schemas.microsoft.com/sharepoint/v3/contenttype/forms">
-  <Display>DocumentLibraryForm</Display>
-  <Edit>DocumentLibraryForm</Edit>
-  <New>DocumentLibraryForm</New>
-</FormTemplates>
 </file>
 
 <file path=customXml/itemProps1.xml><?xml version="1.0" encoding="utf-8"?>
@@ -12405,6 +13171,14 @@
 </file>
 
 <file path=customXml/itemProps2.xml><?xml version="1.0" encoding="utf-8"?>
+<ds:datastoreItem xmlns:ds="http://schemas.openxmlformats.org/officeDocument/2006/customXml" ds:itemID="{7F9B8BCC-BF24-4800-92E1-9F891BBB27E6}">
+  <ds:schemaRefs>
+    <ds:schemaRef ds:uri="http://schemas.microsoft.com/sharepoint/v3/contenttype/forms"/>
+  </ds:schemaRefs>
+</ds:datastoreItem>
+</file>
+
+<file path=customXml/itemProps3.xml><?xml version="1.0" encoding="utf-8"?>
 <ds:datastoreItem xmlns:ds="http://schemas.openxmlformats.org/officeDocument/2006/customXml" ds:itemID="{50AACE6D-8EB6-447A-8DFD-C2C0C52916AC}">
   <ds:schemaRefs>
     <ds:schemaRef ds:uri="http://schemas.microsoft.com/office/infopath/2007/PartnerControls"/>
@@ -12419,12 +13193,4 @@
     <ds:schemaRef ds:uri="http://purl.org/dc/dcmitype/"/>
   </ds:schemaRefs>
 </ds:datastoreItem>
-</file>
-
-<file path=customXml/itemProps3.xml><?xml version="1.0" encoding="utf-8"?>
-<ds:datastoreItem xmlns:ds="http://schemas.openxmlformats.org/officeDocument/2006/customXml" ds:itemID="{7F9B8BCC-BF24-4800-92E1-9F891BBB27E6}">
-  <ds:schemaRefs>
-    <ds:schemaRef ds:uri="http://schemas.microsoft.com/sharepoint/v3/contenttype/forms"/>
-  </ds:schemaRefs>
-</ds:datastoreItem>
 </file>
--- a/3_Estimation.pptx
+++ b/3_Estimation.pptx
@@ -6884,8 +6884,8 @@
         </p:nvSpPr>
         <p:spPr>
           <a:xfrm>
-            <a:off x="1341883" y="4941168"/>
-            <a:ext cx="8082508" cy="369332"/>
+            <a:off x="189756" y="4500897"/>
+            <a:ext cx="5760640" cy="307777"/>
           </a:xfrm>
           <a:prstGeom prst="rect">
             <a:avLst/>
@@ -6898,13 +6898,19 @@
           <a:lstStyle/>
           <a:p>
             <a:r>
-              <a:rPr lang="ko-KR" altLang="en-US" dirty="0">
-                <a:hlinkClick r:id="rId3"/>
+              <a:rPr lang="ko-KR" altLang="en-US" sz="1400" dirty="0">
+                <a:hlinkClick r:id="rId3">
+                  <a:extLst>
+                    <a:ext uri="{A12FA001-AC4F-418D-AE19-62706E023703}">
+                      <ahyp:hlinkClr xmlns:ahyp="http://schemas.microsoft.com/office/drawing/2018/hyperlinkcolor" val="tx"/>
+                    </a:ext>
+                  </a:extLst>
+                </a:hlinkClick>
               </a:rPr>
               <a:t>https://www.dreamstime.com/illustration/ringer-horseshoe-game.html</a:t>
             </a:r>
             <a:r>
-              <a:rPr lang="ko-KR" altLang="en-US" dirty="0"/>
+              <a:rPr lang="ko-KR" altLang="en-US" sz="1400" dirty="0"/>
               <a:t> </a:t>
             </a:r>
           </a:p>
@@ -6926,12 +6932,59 @@
         </p:blipFill>
         <p:spPr>
           <a:xfrm>
-            <a:off x="1341883" y="1772816"/>
-            <a:ext cx="9739289" cy="2952328"/>
+            <a:off x="261764" y="1401749"/>
+            <a:ext cx="9739290" cy="2952328"/>
           </a:xfrm>
           <a:prstGeom prst="rect">
             <a:avLst/>
           </a:prstGeom>
+        </p:spPr>
+      </p:pic>
+      <p:pic>
+        <p:nvPicPr>
+          <p:cNvPr id="1026" name="Picture 2" descr="Improving Data Estimation Skills">
+            <a:extLst>
+              <a:ext uri="{FF2B5EF4-FFF2-40B4-BE49-F238E27FC236}">
+                <a16:creationId xmlns:a16="http://schemas.microsoft.com/office/drawing/2014/main" id="{ECF4E215-2C7F-CB7F-E11A-15ACF8AF05F1}"/>
+              </a:ext>
+            </a:extLst>
+          </p:cNvPr>
+          <p:cNvPicPr>
+            <a:picLocks noChangeAspect="1" noChangeArrowheads="1"/>
+          </p:cNvPicPr>
+          <p:nvPr/>
+        </p:nvPicPr>
+        <p:blipFill>
+          <a:blip r:embed="rId5">
+            <a:extLst>
+              <a:ext uri="{28A0092B-C50C-407E-A947-70E740481C1C}">
+                <a14:useLocalDpi xmlns:a14="http://schemas.microsoft.com/office/drawing/2010/main" val="0"/>
+              </a:ext>
+            </a:extLst>
+          </a:blip>
+          <a:srcRect/>
+          <a:stretch>
+            <a:fillRect/>
+          </a:stretch>
+        </p:blipFill>
+        <p:spPr bwMode="auto">
+          <a:xfrm>
+            <a:off x="8987985" y="2998602"/>
+            <a:ext cx="3200840" cy="3312368"/>
+          </a:xfrm>
+          <a:prstGeom prst="rect">
+            <a:avLst/>
+          </a:prstGeom>
+          <a:noFill/>
+          <a:extLst>
+            <a:ext uri="{909E8E84-426E-40DD-AFC4-6F175D3DCCD1}">
+              <a14:hiddenFill xmlns:a14="http://schemas.microsoft.com/office/drawing/2010/main">
+                <a:solidFill>
+                  <a:srgbClr val="FFFFFF"/>
+                </a:solidFill>
+              </a14:hiddenFill>
+            </a:ext>
+          </a:extLst>
         </p:spPr>
       </p:pic>
     </p:spTree>
@@ -12951,6 +13004,15 @@
 </file>
 
 <file path=customXml/item1.xml><?xml version="1.0" encoding="utf-8"?>
+<?mso-contentType ?>
+<FormTemplates xmlns="http://schemas.microsoft.com/sharepoint/v3/contenttype/forms">
+  <Display>DocumentLibraryForm</Display>
+  <Edit>DocumentLibraryForm</Edit>
+  <New>DocumentLibraryForm</New>
+</FormTemplates>
+</file>
+
+<file path=customXml/item2.xml><?xml version="1.0" encoding="utf-8"?>
 <ct:contentTypeSchema xmlns:ct="http://schemas.microsoft.com/office/2006/metadata/contentType" xmlns:ma="http://schemas.microsoft.com/office/2006/metadata/properties/metaAttributes" ct:_="" ma:_="" ma:contentTypeName="Document" ma:contentTypeID="0x010100AA3F7D94069FF64A86F7DFF56D60E3BE" ma:contentTypeVersion="6" ma:contentTypeDescription="Create a new document." ma:contentTypeScope="" ma:versionID="c32302c77d4085ecf495bdddb7f5e889">
   <xsd:schema xmlns:xsd="http://www.w3.org/2001/XMLSchema" xmlns:xs="http://www.w3.org/2001/XMLSchema" xmlns:p="http://schemas.microsoft.com/office/2006/metadata/properties" xmlns:ns2="a4f35948-e619-41b3-aa29-22878b09cfd2" xmlns:ns3="40262f94-9f35-4ac3-9a90-690165a166b7" targetNamespace="http://schemas.microsoft.com/office/2006/metadata/properties" ma:root="true" ma:fieldsID="4ab5ae46be95f9d0be6107e8200be7a2" ns2:_="" ns3:_="">
     <xsd:import namespace="a4f35948-e619-41b3-aa29-22878b09cfd2"/>
@@ -13131,15 +13193,6 @@
 </ct:contentTypeSchema>
 </file>
 
-<file path=customXml/item2.xml><?xml version="1.0" encoding="utf-8"?>
-<?mso-contentType ?>
-<FormTemplates xmlns="http://schemas.microsoft.com/sharepoint/v3/contenttype/forms">
-  <Display>DocumentLibraryForm</Display>
-  <Edit>DocumentLibraryForm</Edit>
-  <New>DocumentLibraryForm</New>
-</FormTemplates>
-</file>
-
 <file path=customXml/item3.xml><?xml version="1.0" encoding="utf-8"?>
 <p:properties xmlns:p="http://schemas.microsoft.com/office/2006/metadata/properties" xmlns:xsi="http://www.w3.org/2001/XMLSchema-instance" xmlns:pc="http://schemas.microsoft.com/office/infopath/2007/PartnerControls">
   <documentManagement>
@@ -13152,6 +13205,14 @@
 </file>
 
 <file path=customXml/itemProps1.xml><?xml version="1.0" encoding="utf-8"?>
+<ds:datastoreItem xmlns:ds="http://schemas.openxmlformats.org/officeDocument/2006/customXml" ds:itemID="{7F9B8BCC-BF24-4800-92E1-9F891BBB27E6}">
+  <ds:schemaRefs>
+    <ds:schemaRef ds:uri="http://schemas.microsoft.com/sharepoint/v3/contenttype/forms"/>
+  </ds:schemaRefs>
+</ds:datastoreItem>
+</file>
+
+<file path=customXml/itemProps2.xml><?xml version="1.0" encoding="utf-8"?>
 <ds:datastoreItem xmlns:ds="http://schemas.openxmlformats.org/officeDocument/2006/customXml" ds:itemID="{5CCB2C71-1ED8-4540-B003-293B5E75C71F}">
   <ds:schemaRefs>
     <ds:schemaRef ds:uri="http://schemas.microsoft.com/office/2006/metadata/contentType"/>
@@ -13166,14 +13227,6 @@
     <ds:schemaRef ds:uri="http://purl.org/dc/elements/1.1/"/>
     <ds:schemaRef ds:uri="http://purl.org/dc/terms/"/>
     <ds:schemaRef ds:uri="http://schemas.microsoft.com/internal/obd"/>
-  </ds:schemaRefs>
-</ds:datastoreItem>
-</file>
-
-<file path=customXml/itemProps2.xml><?xml version="1.0" encoding="utf-8"?>
-<ds:datastoreItem xmlns:ds="http://schemas.openxmlformats.org/officeDocument/2006/customXml" ds:itemID="{7F9B8BCC-BF24-4800-92E1-9F891BBB27E6}">
-  <ds:schemaRefs>
-    <ds:schemaRef ds:uri="http://schemas.microsoft.com/sharepoint/v3/contenttype/forms"/>
   </ds:schemaRefs>
 </ds:datastoreItem>
 </file>
